--- a/docs/design/LearnFlow-vNext-Architecture.pptx
+++ b/docs/design/LearnFlow-vNext-Architecture.pptx
@@ -2,15 +2,15 @@
 <file path=ppt/presentation.xml><?xml version="1.0" encoding="utf-8"?>
 <p:presentation xmlns:p="http://schemas.openxmlformats.org/presentationml/2006/main">
   <p:sldMasterIdLst>
-    <p:sldMasterId xmlns:r="http://schemas.openxmlformats.org/officeDocument/2006/relationships" id="2147483648" r:id="Rd2afa00b2fb94844"/>
+    <p:sldMasterId xmlns:r="http://schemas.openxmlformats.org/officeDocument/2006/relationships" id="2147483648" r:id="Re24f6c3e05b14579"/>
   </p:sldMasterIdLst>
   <p:notesMasterIdLst>
-    <p:notesMasterId xmlns:r="http://schemas.openxmlformats.org/officeDocument/2006/relationships" r:id="Rc1332aedef34431b"/>
+    <p:notesMasterId xmlns:r="http://schemas.openxmlformats.org/officeDocument/2006/relationships" r:id="Rfdf9c09c273c4191"/>
   </p:notesMasterIdLst>
   <p:sldIdLst>
-    <p:sldId xmlns:r="http://schemas.openxmlformats.org/officeDocument/2006/relationships" id="256" r:id="R77dc9e1ee99d405e"/>
-    <p:sldId xmlns:r="http://schemas.openxmlformats.org/officeDocument/2006/relationships" id="257" r:id="R77c029f99b984a54"/>
-    <p:sldId xmlns:r="http://schemas.openxmlformats.org/officeDocument/2006/relationships" id="258" r:id="R0e30363ef2ad4bcd"/>
+    <p:sldId xmlns:r="http://schemas.openxmlformats.org/officeDocument/2006/relationships" id="256" r:id="R0beeef3e6faa49f3"/>
+    <p:sldId xmlns:r="http://schemas.openxmlformats.org/officeDocument/2006/relationships" id="257" r:id="R687808947eeb4dad"/>
+    <p:sldId xmlns:r="http://schemas.openxmlformats.org/officeDocument/2006/relationships" id="258" r:id="R49270de47a5a4522"/>
   </p:sldIdLst>
   <p:sldSz cx="12192000" cy="6858000"/>
   <p:notesSz cx="6858000" cy="9144000"/>
@@ -559,27 +559,32 @@
           </a:p>
           <a:p xmlns:a="http://schemas.openxmlformats.org/drawingml/2006/main">
             <a:r>
-              <a:t>- docs/ARCHITECTURE_AUTHORITY.md</a:t>
+              <a:t>- backend/app/services/architecture_registry.py</a:t>
+            </a:r>
+          </a:p>
+          <a:p xmlns:a="http://schemas.openxmlformats.org/drawingml/2006/main">
+            <a:r>
+              <a:t>- vnext/server/tool-runtime.ts</a:t>
+            </a:r>
+          </a:p>
+          <a:p xmlns:a="http://schemas.openxmlformats.org/drawingml/2006/main">
+            <a:r>
+              <a:t>- vnext/server/agent-runtime.ts</a:t>
+            </a:r>
+          </a:p>
+          <a:p xmlns:a="http://schemas.openxmlformats.org/drawingml/2006/main">
+            <a:r>
+              <a:t>- docs/AGENT_ARCHITECTURE_GUIDE.md</a:t>
+            </a:r>
+          </a:p>
+          <a:p xmlns:a="http://schemas.openxmlformats.org/drawingml/2006/main">
+            <a:r>
+              <a:t>- docs/AGENT_CAPABILITY_FABRIC.md</a:t>
             </a:r>
           </a:p>
           <a:p xmlns:a="http://schemas.openxmlformats.org/drawingml/2006/main">
             <a:r>
               <a:t>- docs/CHAT_MODE_PRODUCT_ARCHITECTURE.md</a:t>
-            </a:r>
-          </a:p>
-          <a:p xmlns:a="http://schemas.openxmlformats.org/drawingml/2006/main">
-            <a:r>
-              <a:t>- docs/AGENT_CAPABILITY_FABRIC.md</a:t>
-            </a:r>
-          </a:p>
-          <a:p xmlns:a="http://schemas.openxmlformats.org/drawingml/2006/main">
-            <a:r>
-              <a:t>- backend/app/services/architecture_registry.py</a:t>
-            </a:r>
-          </a:p>
-          <a:p xmlns:a="http://schemas.openxmlformats.org/drawingml/2006/main">
-            <a:r>
-              <a:t>- vnext/src/main.tsx</a:t>
             </a:r>
           </a:p>
           <a:p xmlns:a="http://schemas.openxmlformats.org/drawingml/2006/main">
@@ -752,7 +757,7 @@
   </p:cSld>
   <p:clrMap bg1="lt1" tx1="dk1" bg2="lt2" tx2="dk2" accent1="accent1" accent2="accent2" accent3="accent3" accent4="accent4" accent5="accent5" accent6="accent6" hlink="hlink" folHlink="folHlink"/>
   <p:sldLayoutIdLst>
-    <p:sldLayoutId xmlns:r="http://schemas.openxmlformats.org/officeDocument/2006/relationships" id="2147483649" r:id="Rf1bc4923b2bc4feb"/>
+    <p:sldLayoutId xmlns:r="http://schemas.openxmlformats.org/officeDocument/2006/relationships" id="2147483649" r:id="R2b2add7f2a5d4ecb"/>
   </p:sldLayoutIdLst>
   <p:txStyles>
     <p:titleStyle>
@@ -2699,7 +2704,7 @@
       </p:sp>
       <p:cxnSp>
         <p:nvCxnSpPr>
-          <p:cNvPr id="80" name=""/>
+          <p:cNvPr id="178" name=""/>
           <p:cNvCxnSpPr>
             <a:stCxn xmlns:a="http://schemas.openxmlformats.org/drawingml/2006/main" id="6" idx="3"/>
             <a:endCxn xmlns:a="http://schemas.openxmlformats.org/drawingml/2006/main" id="10" idx="1"/>
@@ -2726,7 +2731,7 @@
       </p:cxnSp>
       <p:cxnSp>
         <p:nvCxnSpPr>
-          <p:cNvPr id="81" name=""/>
+          <p:cNvPr id="179" name=""/>
           <p:cNvCxnSpPr>
             <a:stCxn xmlns:a="http://schemas.openxmlformats.org/drawingml/2006/main" id="10" idx="3"/>
             <a:endCxn xmlns:a="http://schemas.openxmlformats.org/drawingml/2006/main" id="15" idx="1"/>
@@ -2753,7 +2758,7 @@
       </p:cxnSp>
       <p:cxnSp>
         <p:nvCxnSpPr>
-          <p:cNvPr id="82" name=""/>
+          <p:cNvPr id="180" name=""/>
           <p:cNvCxnSpPr>
             <a:stCxn xmlns:a="http://schemas.openxmlformats.org/drawingml/2006/main" id="15" idx="3"/>
             <a:endCxn xmlns:a="http://schemas.openxmlformats.org/drawingml/2006/main" id="20" idx="1"/>
@@ -3740,7 +3745,7 @@
       </p:sp>
       <p:cxnSp>
         <p:nvCxnSpPr>
-          <p:cNvPr id="101" name=""/>
+          <p:cNvPr id="199" name=""/>
           <p:cNvCxnSpPr>
             <a:stCxn xmlns:a="http://schemas.openxmlformats.org/drawingml/2006/main" id="31" idx="0"/>
             <a:endCxn xmlns:a="http://schemas.openxmlformats.org/drawingml/2006/main" id="10" idx="2"/>
@@ -3767,7 +3772,7 @@
       </p:cxnSp>
       <p:cxnSp>
         <p:nvCxnSpPr>
-          <p:cNvPr id="102" name=""/>
+          <p:cNvPr id="200" name=""/>
           <p:cNvCxnSpPr>
             <a:stCxn xmlns:a="http://schemas.openxmlformats.org/drawingml/2006/main" id="36" idx="0"/>
             <a:endCxn xmlns:a="http://schemas.openxmlformats.org/drawingml/2006/main" id="6" idx="2"/>
@@ -3794,7 +3799,7 @@
       </p:cxnSp>
       <p:cxnSp>
         <p:nvCxnSpPr>
-          <p:cNvPr id="103" name=""/>
+          <p:cNvPr id="201" name=""/>
           <p:cNvCxnSpPr>
             <a:stCxn xmlns:a="http://schemas.openxmlformats.org/drawingml/2006/main" id="41" idx="0"/>
             <a:endCxn xmlns:a="http://schemas.openxmlformats.org/drawingml/2006/main" id="15" idx="2"/>
@@ -3821,7 +3826,7 @@
       </p:cxnSp>
       <p:cxnSp>
         <p:nvCxnSpPr>
-          <p:cNvPr id="104" name=""/>
+          <p:cNvPr id="202" name=""/>
           <p:cNvCxnSpPr>
             <a:stCxn xmlns:a="http://schemas.openxmlformats.org/drawingml/2006/main" id="20" idx="2"/>
             <a:endCxn xmlns:a="http://schemas.openxmlformats.org/drawingml/2006/main" id="36" idx="3"/>
@@ -4390,7 +4395,7 @@
                 <a:ea typeface="PingFang SC"/>
                 <a:cs typeface="PingFang SC"/>
               </a:rPr>
-              <a:t>四种状态，共用一组受约束工具</a:t>
+              <a:t>工具按场景开放，并连接正式学习对象</a:t>
             </a:r>
           </a:p>
         </p:txBody>
@@ -4452,7 +4457,7 @@
                 <a:ea typeface="PingFang SC"/>
                 <a:cs typeface="PingFang SC"/>
               </a:rPr>
-              <a:t>状态决定本轮目标；工具只读取、生成产物或提交待确认提案。</a:t>
+              <a:t>状态决定本轮目标；Harness 按 scope 开放工具，读取、产物与提案各有边界。</a:t>
             </a:r>
           </a:p>
         </p:txBody>
@@ -4521,32 +4526,61 @@
       </p:sp>
       <p:sp>
         <p:nvSpPr>
-          <p:cNvPr id="6" name="state-free">
-            <a:extLst xmlns:a="http://schemas.openxmlformats.org/drawingml/2006/main">
-              <a:ext uri="{FF2B5EF4-FFF2-40B4-BE49-F238E27FC236}">
-                <a16:creationId xmlns:a16="http://schemas.microsoft.com/office/drawing/2014/main" id="{305B7F0A-E7D7-4242-85E6-1712FDB8B784}"/>
-              </a:ext>
-            </a:extLst>
-          </p:cNvPr>
-          <p:cNvSpPr>
-            <a:spLocks xmlns:a="http://schemas.openxmlformats.org/drawingml/2006/main" noGrp="1"/>
-          </p:cNvSpPr>
-          <p:nvPr/>
-        </p:nvSpPr>
-        <p:spPr>
-          <a:xfrm xmlns:a="http://schemas.openxmlformats.org/drawingml/2006/main">
-            <a:off x="647700" y="1581150"/>
-            <a:ext cx="2724150" cy="2333625"/>
+          <p:cNvPr id="58" name="mode-free">
+            <a:extLst xmlns:a="http://schemas.openxmlformats.org/drawingml/2006/main">
+              <a:ext uri="{FF2B5EF4-FFF2-40B4-BE49-F238E27FC236}">
+                <a16:creationId xmlns:a16="http://schemas.microsoft.com/office/drawing/2014/main" id="{A15DAAA9-382F-4DF9-AB46-A9150F1FB01E}"/>
+              </a:ext>
+            </a:extLst>
+          </p:cNvPr>
+          <p:cNvSpPr>
+            <a:spLocks xmlns:a="http://schemas.openxmlformats.org/drawingml/2006/main" noGrp="1"/>
+          </p:cNvSpPr>
+          <p:nvPr/>
+        </p:nvSpPr>
+        <p:spPr>
+          <a:xfrm xmlns:a="http://schemas.openxmlformats.org/drawingml/2006/main">
+            <a:off x="647700" y="1466850"/>
+            <a:ext cx="2638425" cy="666750"/>
           </a:xfrm>
           <a:prstGeom xmlns:a="http://schemas.openxmlformats.org/drawingml/2006/main" prst="roundRect">
             <a:avLst>
-              <a:gd name="adj" fmla="val 8980"/>
+              <a:gd name="adj" fmla="val 17143"/>
             </a:avLst>
+          </a:prstGeom>
+          <a:noFill xmlns:a="http://schemas.openxmlformats.org/drawingml/2006/main"/>
+          <a:ln xmlns:a="http://schemas.openxmlformats.org/drawingml/2006/main" w="0">
+            <a:noFill/>
+            <a:prstDash val="solid"/>
+          </a:ln>
+        </p:spPr>
+      </p:sp>
+      <p:sp>
+        <p:nvSpPr>
+          <p:cNvPr id="59" name="">
+            <a:extLst xmlns:a="http://schemas.openxmlformats.org/drawingml/2006/main">
+              <a:ext uri="{FF2B5EF4-FFF2-40B4-BE49-F238E27FC236}">
+                <a16:creationId xmlns:a16="http://schemas.microsoft.com/office/drawing/2014/main" id="{D26FD67E-82AA-4BD7-86B3-AB88AE2F7180}"/>
+              </a:ext>
+            </a:extLst>
+          </p:cNvPr>
+          <p:cNvSpPr>
+            <a:spLocks xmlns:a="http://schemas.openxmlformats.org/drawingml/2006/main" noGrp="1"/>
+          </p:cNvSpPr>
+          <p:nvPr/>
+        </p:nvSpPr>
+        <p:spPr>
+          <a:xfrm xmlns:a="http://schemas.openxmlformats.org/drawingml/2006/main">
+            <a:off x="647700" y="1466850"/>
+            <a:ext cx="2638425" cy="47625"/>
+          </a:xfrm>
+          <a:prstGeom xmlns:a="http://schemas.openxmlformats.org/drawingml/2006/main" prst="rect">
+            <a:avLst/>
           </a:prstGeom>
           <a:solidFill xmlns:a="http://schemas.openxmlformats.org/drawingml/2006/main">
             <a:srgbClr val="087A53"/>
           </a:solidFill>
-          <a:ln xmlns:a="http://schemas.openxmlformats.org/drawingml/2006/main" w="9525">
+          <a:ln xmlns:a="http://schemas.openxmlformats.org/drawingml/2006/main" w="0">
             <a:solidFill>
               <a:srgbClr val="087A53"/>
             </a:solidFill>
@@ -4556,22 +4590,22 @@
       </p:sp>
       <p:sp>
         <p:nvSpPr>
-          <p:cNvPr id="7" name="">
-            <a:extLst xmlns:a="http://schemas.openxmlformats.org/drawingml/2006/main">
-              <a:ext uri="{FF2B5EF4-FFF2-40B4-BE49-F238E27FC236}">
-                <a16:creationId xmlns:a16="http://schemas.microsoft.com/office/drawing/2014/main" id="{E9F98238-58D3-4675-B6A8-4BB590122B1D}"/>
-              </a:ext>
-            </a:extLst>
-          </p:cNvPr>
-          <p:cNvSpPr>
-            <a:spLocks xmlns:a="http://schemas.openxmlformats.org/drawingml/2006/main" noGrp="1"/>
-          </p:cNvSpPr>
-          <p:nvPr/>
-        </p:nvSpPr>
-        <p:spPr>
-          <a:xfrm xmlns:a="http://schemas.openxmlformats.org/drawingml/2006/main">
-            <a:off x="876300" y="1790700"/>
-            <a:ext cx="2000250" cy="361950"/>
+          <p:cNvPr id="60" name="">
+            <a:extLst xmlns:a="http://schemas.openxmlformats.org/drawingml/2006/main">
+              <a:ext uri="{FF2B5EF4-FFF2-40B4-BE49-F238E27FC236}">
+                <a16:creationId xmlns:a16="http://schemas.microsoft.com/office/drawing/2014/main" id="{D7F424D7-E736-4863-858E-CE7BD87D58B8}"/>
+              </a:ext>
+            </a:extLst>
+          </p:cNvPr>
+          <p:cNvSpPr>
+            <a:spLocks xmlns:a="http://schemas.openxmlformats.org/drawingml/2006/main" noGrp="1"/>
+          </p:cNvSpPr>
+          <p:nvPr/>
+        </p:nvSpPr>
+        <p:spPr>
+          <a:xfrm xmlns:a="http://schemas.openxmlformats.org/drawingml/2006/main">
+            <a:off x="800100" y="1600200"/>
+            <a:ext cx="742950" cy="190500"/>
           </a:xfrm>
           <a:prstGeom xmlns:a="http://schemas.openxmlformats.org/drawingml/2006/main" prst="rect">
             <a:avLst/>
@@ -4593,9 +4627,9 @@
                 <a:spcPct val="115000"/>
               </a:lnSpc>
               <a:buNone/>
-              <a:defRPr sz="2325" b="1">
-                <a:solidFill>
-                  <a:srgbClr val="FFFFFF"/>
+              <a:defRPr sz="975" b="1">
+                <a:solidFill>
+                  <a:srgbClr val="087A53"/>
                 </a:solidFill>
                 <a:latin typeface="SFMono-Regular"/>
                 <a:ea typeface="SFMono-Regular"/>
@@ -4603,37 +4637,37 @@
               </a:defRPr>
             </a:pPr>
             <a:r>
-              <a:rPr sz="2325" b="1">
-                <a:solidFill>
-                  <a:srgbClr val="FFFFFF"/>
+              <a:rPr sz="975" b="1">
+                <a:solidFill>
+                  <a:srgbClr val="087A53"/>
                 </a:solidFill>
                 <a:latin typeface="SFMono-Regular"/>
                 <a:ea typeface="SFMono-Regular"/>
                 <a:cs typeface="SFMono-Regular"/>
               </a:rPr>
-              <a:t>free</a:t>
-            </a:r>
-          </a:p>
-        </p:txBody>
-      </p:sp>
-      <p:sp>
-        <p:nvSpPr>
-          <p:cNvPr id="8" name="">
-            <a:extLst xmlns:a="http://schemas.openxmlformats.org/drawingml/2006/main">
-              <a:ext uri="{FF2B5EF4-FFF2-40B4-BE49-F238E27FC236}">
-                <a16:creationId xmlns:a16="http://schemas.microsoft.com/office/drawing/2014/main" id="{A6C9FE5F-6ABD-4B3E-9073-4680C0755A6A}"/>
-              </a:ext>
-            </a:extLst>
-          </p:cNvPr>
-          <p:cNvSpPr>
-            <a:spLocks xmlns:a="http://schemas.openxmlformats.org/drawingml/2006/main" noGrp="1"/>
-          </p:cNvSpPr>
-          <p:nvPr/>
-        </p:nvSpPr>
-        <p:spPr>
-          <a:xfrm xmlns:a="http://schemas.openxmlformats.org/drawingml/2006/main">
-            <a:off x="876300" y="2228850"/>
-            <a:ext cx="2000250" cy="323850"/>
+              <a:t>FREE</a:t>
+            </a:r>
+          </a:p>
+        </p:txBody>
+      </p:sp>
+      <p:sp>
+        <p:nvSpPr>
+          <p:cNvPr id="61" name="">
+            <a:extLst xmlns:a="http://schemas.openxmlformats.org/drawingml/2006/main">
+              <a:ext uri="{FF2B5EF4-FFF2-40B4-BE49-F238E27FC236}">
+                <a16:creationId xmlns:a16="http://schemas.microsoft.com/office/drawing/2014/main" id="{B42D2651-6701-450F-85F3-F0FE9DF2EC3F}"/>
+              </a:ext>
+            </a:extLst>
+          </p:cNvPr>
+          <p:cNvSpPr>
+            <a:spLocks xmlns:a="http://schemas.openxmlformats.org/drawingml/2006/main" noGrp="1"/>
+          </p:cNvSpPr>
+          <p:nvPr/>
+        </p:nvSpPr>
+        <p:spPr>
+          <a:xfrm xmlns:a="http://schemas.openxmlformats.org/drawingml/2006/main">
+            <a:off x="1524000" y="1571625"/>
+            <a:ext cx="1524000" cy="247650"/>
           </a:xfrm>
           <a:prstGeom xmlns:a="http://schemas.openxmlformats.org/drawingml/2006/main" prst="rect">
             <a:avLst/>
@@ -4655,47 +4689,47 @@
                 <a:spcPct val="115000"/>
               </a:lnSpc>
               <a:buNone/>
-              <a:defRPr sz="1875" b="1">
-                <a:solidFill>
-                  <a:srgbClr val="FFFFFF"/>
-                </a:solidFill>
-                <a:latin typeface="PingFang SC"/>
-                <a:ea typeface="PingFang SC"/>
-                <a:cs typeface="PingFang SC"/>
-              </a:defRPr>
-            </a:pPr>
-            <a:r>
-              <a:rPr sz="1875" b="1">
-                <a:solidFill>
-                  <a:srgbClr val="FFFFFF"/>
-                </a:solidFill>
-                <a:latin typeface="PingFang SC"/>
-                <a:ea typeface="PingFang SC"/>
-                <a:cs typeface="PingFang SC"/>
-              </a:rPr>
-              <a:t>自由探索</a:t>
-            </a:r>
-          </a:p>
-        </p:txBody>
-      </p:sp>
-      <p:sp>
-        <p:nvSpPr>
-          <p:cNvPr id="9" name="">
-            <a:extLst xmlns:a="http://schemas.openxmlformats.org/drawingml/2006/main">
-              <a:ext uri="{FF2B5EF4-FFF2-40B4-BE49-F238E27FC236}">
-                <a16:creationId xmlns:a16="http://schemas.microsoft.com/office/drawing/2014/main" id="{D6D72974-5946-4ACD-AA1B-F4DFE474DFFC}"/>
-              </a:ext>
-            </a:extLst>
-          </p:cNvPr>
-          <p:cNvSpPr>
-            <a:spLocks xmlns:a="http://schemas.openxmlformats.org/drawingml/2006/main" noGrp="1"/>
-          </p:cNvSpPr>
-          <p:nvPr/>
-        </p:nvSpPr>
-        <p:spPr>
-          <a:xfrm xmlns:a="http://schemas.openxmlformats.org/drawingml/2006/main">
-            <a:off x="876300" y="2762250"/>
-            <a:ext cx="2000250" cy="819150"/>
+              <a:defRPr sz="1425" b="1">
+                <a:solidFill>
+                  <a:srgbClr val="15221D"/>
+                </a:solidFill>
+                <a:latin typeface="PingFang SC"/>
+                <a:ea typeface="PingFang SC"/>
+                <a:cs typeface="PingFang SC"/>
+              </a:defRPr>
+            </a:pPr>
+            <a:r>
+              <a:rPr sz="1425" b="1">
+                <a:solidFill>
+                  <a:srgbClr val="15221D"/>
+                </a:solidFill>
+                <a:latin typeface="PingFang SC"/>
+                <a:ea typeface="PingFang SC"/>
+                <a:cs typeface="PingFang SC"/>
+              </a:rPr>
+              <a:t>开放探索</a:t>
+            </a:r>
+          </a:p>
+        </p:txBody>
+      </p:sp>
+      <p:sp>
+        <p:nvSpPr>
+          <p:cNvPr id="62" name="">
+            <a:extLst xmlns:a="http://schemas.openxmlformats.org/drawingml/2006/main">
+              <a:ext uri="{FF2B5EF4-FFF2-40B4-BE49-F238E27FC236}">
+                <a16:creationId xmlns:a16="http://schemas.microsoft.com/office/drawing/2014/main" id="{AB89136E-7DFE-40B2-AC3F-9D20A1CF71F4}"/>
+              </a:ext>
+            </a:extLst>
+          </p:cNvPr>
+          <p:cNvSpPr>
+            <a:spLocks xmlns:a="http://schemas.openxmlformats.org/drawingml/2006/main" noGrp="1"/>
+          </p:cNvSpPr>
+          <p:nvPr/>
+        </p:nvSpPr>
+        <p:spPr>
+          <a:xfrm xmlns:a="http://schemas.openxmlformats.org/drawingml/2006/main">
+            <a:off x="800100" y="1857375"/>
+            <a:ext cx="2333625" cy="190500"/>
           </a:xfrm>
           <a:prstGeom xmlns:a="http://schemas.openxmlformats.org/drawingml/2006/main" prst="rect">
             <a:avLst/>
@@ -4714,176 +4748,89 @@
           <a:p xmlns:a="http://schemas.openxmlformats.org/drawingml/2006/main">
             <a:pPr algn="l">
               <a:lnSpc>
-                <a:spcPct val="128000"/>
-              </a:lnSpc>
-              <a:buNone/>
-              <a:defRPr sz="1350" b="0">
-                <a:solidFill>
-                  <a:srgbClr val="E5F6EC"/>
-                </a:solidFill>
-                <a:latin typeface="PingFang SC"/>
-                <a:ea typeface="PingFang SC"/>
-                <a:cs typeface="PingFang SC"/>
-              </a:defRPr>
-            </a:pPr>
-            <a:r>
-              <a:rPr sz="1350" b="0">
-                <a:solidFill>
-                  <a:srgbClr val="E5F6EC"/>
-                </a:solidFill>
-                <a:latin typeface="PingFang SC"/>
-                <a:ea typeface="PingFang SC"/>
-                <a:cs typeface="PingFang SC"/>
-              </a:rPr>
-              <a:t>开放问题</a:t>
-            </a:r>
-          </a:p>
-          <a:p xmlns:a="http://schemas.openxmlformats.org/drawingml/2006/main">
-            <a:pPr algn="l">
-              <a:lnSpc>
-                <a:spcPct val="128000"/>
-              </a:lnSpc>
-              <a:buNone/>
-              <a:defRPr sz="1350" b="0">
-                <a:solidFill>
-                  <a:srgbClr val="E5F6EC"/>
-                </a:solidFill>
-                <a:latin typeface="PingFang SC"/>
-                <a:ea typeface="PingFang SC"/>
-                <a:cs typeface="PingFang SC"/>
-              </a:defRPr>
-            </a:pPr>
-            <a:r>
-              <a:rPr sz="1350" b="0">
-                <a:solidFill>
-                  <a:srgbClr val="E5F6EC"/>
-                </a:solidFill>
-                <a:latin typeface="PingFang SC"/>
-                <a:ea typeface="PingFang SC"/>
-                <a:cs typeface="PingFang SC"/>
-              </a:rPr>
-              <a:t>收敛意图</a:t>
-            </a:r>
-          </a:p>
-          <a:p xmlns:a="http://schemas.openxmlformats.org/drawingml/2006/main">
-            <a:pPr algn="l">
-              <a:lnSpc>
-                <a:spcPct val="128000"/>
-              </a:lnSpc>
-              <a:buNone/>
-              <a:defRPr sz="1350" b="0">
-                <a:solidFill>
-                  <a:srgbClr val="E5F6EC"/>
-                </a:solidFill>
-                <a:latin typeface="PingFang SC"/>
-                <a:ea typeface="PingFang SC"/>
-                <a:cs typeface="PingFang SC"/>
-              </a:defRPr>
-            </a:pPr>
-            <a:r>
-              <a:rPr sz="1350" b="0">
-                <a:solidFill>
-                  <a:srgbClr val="E5F6EC"/>
-                </a:solidFill>
-                <a:latin typeface="PingFang SC"/>
-                <a:ea typeface="PingFang SC"/>
-                <a:cs typeface="PingFang SC"/>
-              </a:rPr>
-              <a:t>选择下一种状态</a:t>
-            </a:r>
-          </a:p>
-        </p:txBody>
-      </p:sp>
-      <p:sp>
-        <p:nvSpPr>
-          <p:cNvPr id="10" name="">
-            <a:extLst xmlns:a="http://schemas.openxmlformats.org/drawingml/2006/main">
-              <a:ext uri="{FF2B5EF4-FFF2-40B4-BE49-F238E27FC236}">
-                <a16:creationId xmlns:a16="http://schemas.microsoft.com/office/drawing/2014/main" id="{0096FC00-3149-4308-9C41-F9C1CE2EB591}"/>
-              </a:ext>
-            </a:extLst>
-          </p:cNvPr>
-          <p:cNvSpPr>
-            <a:spLocks xmlns:a="http://schemas.openxmlformats.org/drawingml/2006/main" noGrp="1"/>
-          </p:cNvSpPr>
-          <p:nvPr/>
-        </p:nvSpPr>
-        <p:spPr>
-          <a:xfrm xmlns:a="http://schemas.openxmlformats.org/drawingml/2006/main">
-            <a:off x="876300" y="3619500"/>
-            <a:ext cx="2152650" cy="190500"/>
-          </a:xfrm>
-          <a:prstGeom xmlns:a="http://schemas.openxmlformats.org/drawingml/2006/main" prst="rect">
-            <a:avLst/>
-          </a:prstGeom>
-          <a:noFill xmlns:a="http://schemas.openxmlformats.org/drawingml/2006/main"/>
-          <a:ln xmlns:a="http://schemas.openxmlformats.org/drawingml/2006/main" w="0">
-            <a:noFill/>
-            <a:prstDash val="solid"/>
-          </a:ln>
-        </p:spPr>
-        <p:txBody>
-          <a:bodyPr xmlns:a="http://schemas.openxmlformats.org/drawingml/2006/main" wrap="square" lIns="0" tIns="0" rIns="0" bIns="0" anchor="t">
-            <a:noAutofit/>
-          </a:bodyPr>
-          <a:lstStyle xmlns:a="http://schemas.openxmlformats.org/drawingml/2006/main"/>
-          <a:p xmlns:a="http://schemas.openxmlformats.org/drawingml/2006/main">
-            <a:pPr algn="l">
-              <a:lnSpc>
                 <a:spcPct val="115000"/>
               </a:lnSpc>
               <a:buNone/>
-              <a:defRPr sz="975" b="1">
-                <a:solidFill>
-                  <a:srgbClr val="BDE5CD"/>
-                </a:solidFill>
-                <a:latin typeface="PingFang SC"/>
-                <a:ea typeface="PingFang SC"/>
-                <a:cs typeface="PingFang SC"/>
-              </a:defRPr>
-            </a:pPr>
-            <a:r>
-              <a:rPr sz="975" b="1">
-                <a:solidFill>
-                  <a:srgbClr val="BDE5CD"/>
-                </a:solidFill>
-                <a:latin typeface="PingFang SC"/>
-                <a:ea typeface="PingFang SC"/>
-                <a:cs typeface="PingFang SC"/>
-              </a:rPr>
-              <a:t>其余状态结束后回到这里</a:t>
-            </a:r>
-          </a:p>
-        </p:txBody>
-      </p:sp>
-      <p:sp>
-        <p:nvSpPr>
-          <p:cNvPr id="11" name="state-explain">
-            <a:extLst xmlns:a="http://schemas.openxmlformats.org/drawingml/2006/main">
-              <a:ext uri="{FF2B5EF4-FFF2-40B4-BE49-F238E27FC236}">
-                <a16:creationId xmlns:a16="http://schemas.microsoft.com/office/drawing/2014/main" id="{B39225D2-BD8C-46D0-93AD-B2BA9CC34948}"/>
-              </a:ext>
-            </a:extLst>
-          </p:cNvPr>
-          <p:cNvSpPr>
-            <a:spLocks xmlns:a="http://schemas.openxmlformats.org/drawingml/2006/main" noGrp="1"/>
-          </p:cNvSpPr>
-          <p:nvPr/>
-        </p:nvSpPr>
-        <p:spPr>
-          <a:xfrm xmlns:a="http://schemas.openxmlformats.org/drawingml/2006/main">
-            <a:off x="4286250" y="1466850"/>
-            <a:ext cx="3143250" cy="742950"/>
+              <a:defRPr sz="1013" b="0">
+                <a:solidFill>
+                  <a:srgbClr val="6D7C73"/>
+                </a:solidFill>
+                <a:latin typeface="PingFang SC"/>
+                <a:ea typeface="PingFang SC"/>
+                <a:cs typeface="PingFang SC"/>
+              </a:defRPr>
+            </a:pPr>
+            <a:r>
+              <a:rPr sz="1013" b="0">
+                <a:solidFill>
+                  <a:srgbClr val="6D7C73"/>
+                </a:solidFill>
+                <a:latin typeface="PingFang SC"/>
+                <a:ea typeface="PingFang SC"/>
+                <a:cs typeface="PingFang SC"/>
+              </a:rPr>
+              <a:t>开放问题 · 收敛意图</a:t>
+            </a:r>
+          </a:p>
+        </p:txBody>
+      </p:sp>
+      <p:sp>
+        <p:nvSpPr>
+          <p:cNvPr id="63" name="mode-explain">
+            <a:extLst xmlns:a="http://schemas.openxmlformats.org/drawingml/2006/main">
+              <a:ext uri="{FF2B5EF4-FFF2-40B4-BE49-F238E27FC236}">
+                <a16:creationId xmlns:a16="http://schemas.microsoft.com/office/drawing/2014/main" id="{C8856BF1-9188-4FE4-A6EC-8D52CC424587}"/>
+              </a:ext>
+            </a:extLst>
+          </p:cNvPr>
+          <p:cNvSpPr>
+            <a:spLocks xmlns:a="http://schemas.openxmlformats.org/drawingml/2006/main" noGrp="1"/>
+          </p:cNvSpPr>
+          <p:nvPr/>
+        </p:nvSpPr>
+        <p:spPr>
+          <a:xfrm xmlns:a="http://schemas.openxmlformats.org/drawingml/2006/main">
+            <a:off x="3400425" y="1466850"/>
+            <a:ext cx="2638425" cy="666750"/>
           </a:xfrm>
           <a:prstGeom xmlns:a="http://schemas.openxmlformats.org/drawingml/2006/main" prst="roundRect">
             <a:avLst>
-              <a:gd name="adj" fmla="val 20513"/>
+              <a:gd name="adj" fmla="val 17143"/>
             </a:avLst>
           </a:prstGeom>
+          <a:noFill xmlns:a="http://schemas.openxmlformats.org/drawingml/2006/main"/>
+          <a:ln xmlns:a="http://schemas.openxmlformats.org/drawingml/2006/main" w="0">
+            <a:noFill/>
+            <a:prstDash val="solid"/>
+          </a:ln>
+        </p:spPr>
+      </p:sp>
+      <p:sp>
+        <p:nvSpPr>
+          <p:cNvPr id="64" name="">
+            <a:extLst xmlns:a="http://schemas.openxmlformats.org/drawingml/2006/main">
+              <a:ext uri="{FF2B5EF4-FFF2-40B4-BE49-F238E27FC236}">
+                <a16:creationId xmlns:a16="http://schemas.microsoft.com/office/drawing/2014/main" id="{442FE8E7-95B1-49B5-8531-390962356B1C}"/>
+              </a:ext>
+            </a:extLst>
+          </p:cNvPr>
+          <p:cNvSpPr>
+            <a:spLocks xmlns:a="http://schemas.openxmlformats.org/drawingml/2006/main" noGrp="1"/>
+          </p:cNvSpPr>
+          <p:nvPr/>
+        </p:nvSpPr>
+        <p:spPr>
+          <a:xfrm xmlns:a="http://schemas.openxmlformats.org/drawingml/2006/main">
+            <a:off x="3400425" y="1466850"/>
+            <a:ext cx="2638425" cy="47625"/>
+          </a:xfrm>
+          <a:prstGeom xmlns:a="http://schemas.openxmlformats.org/drawingml/2006/main" prst="rect">
+            <a:avLst/>
+          </a:prstGeom>
           <a:solidFill xmlns:a="http://schemas.openxmlformats.org/drawingml/2006/main">
-            <a:srgbClr val="FFF5DC"/>
+            <a:srgbClr val="9B6D12"/>
           </a:solidFill>
-          <a:ln xmlns:a="http://schemas.openxmlformats.org/drawingml/2006/main" w="11430">
+          <a:ln xmlns:a="http://schemas.openxmlformats.org/drawingml/2006/main" w="0">
             <a:solidFill>
               <a:srgbClr val="9B6D12"/>
             </a:solidFill>
@@ -4893,22 +4840,22 @@
       </p:sp>
       <p:sp>
         <p:nvSpPr>
-          <p:cNvPr id="12" name="">
-            <a:extLst xmlns:a="http://schemas.openxmlformats.org/drawingml/2006/main">
-              <a:ext uri="{FF2B5EF4-FFF2-40B4-BE49-F238E27FC236}">
-                <a16:creationId xmlns:a16="http://schemas.microsoft.com/office/drawing/2014/main" id="{072B0456-985D-41A9-B4E6-5A969A8E5C9B}"/>
-              </a:ext>
-            </a:extLst>
-          </p:cNvPr>
-          <p:cNvSpPr>
-            <a:spLocks xmlns:a="http://schemas.openxmlformats.org/drawingml/2006/main" noGrp="1"/>
-          </p:cNvSpPr>
-          <p:nvPr/>
-        </p:nvSpPr>
-        <p:spPr>
-          <a:xfrm xmlns:a="http://schemas.openxmlformats.org/drawingml/2006/main">
-            <a:off x="4457700" y="1590675"/>
-            <a:ext cx="819150" cy="238125"/>
+          <p:cNvPr id="65" name="">
+            <a:extLst xmlns:a="http://schemas.openxmlformats.org/drawingml/2006/main">
+              <a:ext uri="{FF2B5EF4-FFF2-40B4-BE49-F238E27FC236}">
+                <a16:creationId xmlns:a16="http://schemas.microsoft.com/office/drawing/2014/main" id="{8868467D-6D4B-40D0-B07A-926E8129C377}"/>
+              </a:ext>
+            </a:extLst>
+          </p:cNvPr>
+          <p:cNvSpPr>
+            <a:spLocks xmlns:a="http://schemas.openxmlformats.org/drawingml/2006/main" noGrp="1"/>
+          </p:cNvSpPr>
+          <p:nvPr/>
+        </p:nvSpPr>
+        <p:spPr>
+          <a:xfrm xmlns:a="http://schemas.openxmlformats.org/drawingml/2006/main">
+            <a:off x="3552825" y="1600200"/>
+            <a:ext cx="742950" cy="190500"/>
           </a:xfrm>
           <a:prstGeom xmlns:a="http://schemas.openxmlformats.org/drawingml/2006/main" prst="rect">
             <a:avLst/>
@@ -4930,7 +4877,7 @@
                 <a:spcPct val="115000"/>
               </a:lnSpc>
               <a:buNone/>
-              <a:defRPr sz="1275" b="1">
+              <a:defRPr sz="975" b="1">
                 <a:solidFill>
                   <a:srgbClr val="9B6D12"/>
                 </a:solidFill>
@@ -4940,7 +4887,7 @@
               </a:defRPr>
             </a:pPr>
             <a:r>
-              <a:rPr sz="1275" b="1">
+              <a:rPr sz="975" b="1">
                 <a:solidFill>
                   <a:srgbClr val="9B6D12"/>
                 </a:solidFill>
@@ -4948,29 +4895,29 @@
                 <a:ea typeface="SFMono-Regular"/>
                 <a:cs typeface="SFMono-Regular"/>
               </a:rPr>
-              <a:t>explain</a:t>
-            </a:r>
-          </a:p>
-        </p:txBody>
-      </p:sp>
-      <p:sp>
-        <p:nvSpPr>
-          <p:cNvPr id="13" name="">
-            <a:extLst xmlns:a="http://schemas.openxmlformats.org/drawingml/2006/main">
-              <a:ext uri="{FF2B5EF4-FFF2-40B4-BE49-F238E27FC236}">
-                <a16:creationId xmlns:a16="http://schemas.microsoft.com/office/drawing/2014/main" id="{99E7DB9A-5BC8-4F41-BA9B-8D1F053A5029}"/>
-              </a:ext>
-            </a:extLst>
-          </p:cNvPr>
-          <p:cNvSpPr>
-            <a:spLocks xmlns:a="http://schemas.openxmlformats.org/drawingml/2006/main" noGrp="1"/>
-          </p:cNvSpPr>
-          <p:nvPr/>
-        </p:nvSpPr>
-        <p:spPr>
-          <a:xfrm xmlns:a="http://schemas.openxmlformats.org/drawingml/2006/main">
-            <a:off x="5286375" y="1571625"/>
-            <a:ext cx="1809750" cy="266700"/>
+              <a:t>EXPLAIN</a:t>
+            </a:r>
+          </a:p>
+        </p:txBody>
+      </p:sp>
+      <p:sp>
+        <p:nvSpPr>
+          <p:cNvPr id="66" name="">
+            <a:extLst xmlns:a="http://schemas.openxmlformats.org/drawingml/2006/main">
+              <a:ext uri="{FF2B5EF4-FFF2-40B4-BE49-F238E27FC236}">
+                <a16:creationId xmlns:a16="http://schemas.microsoft.com/office/drawing/2014/main" id="{B615B960-147C-4590-8F8C-094211AA6103}"/>
+              </a:ext>
+            </a:extLst>
+          </p:cNvPr>
+          <p:cNvSpPr>
+            <a:spLocks xmlns:a="http://schemas.openxmlformats.org/drawingml/2006/main" noGrp="1"/>
+          </p:cNvSpPr>
+          <p:nvPr/>
+        </p:nvSpPr>
+        <p:spPr>
+          <a:xfrm xmlns:a="http://schemas.openxmlformats.org/drawingml/2006/main">
+            <a:off x="4276725" y="1571625"/>
+            <a:ext cx="1524000" cy="247650"/>
           </a:xfrm>
           <a:prstGeom xmlns:a="http://schemas.openxmlformats.org/drawingml/2006/main" prst="rect">
             <a:avLst/>
@@ -4992,7 +4939,7 @@
                 <a:spcPct val="115000"/>
               </a:lnSpc>
               <a:buNone/>
-              <a:defRPr sz="1650" b="1">
+              <a:defRPr sz="1425" b="1">
                 <a:solidFill>
                   <a:srgbClr val="15221D"/>
                 </a:solidFill>
@@ -5002,7 +4949,7 @@
               </a:defRPr>
             </a:pPr>
             <a:r>
-              <a:rPr sz="1650" b="1">
+              <a:rPr sz="1425" b="1">
                 <a:solidFill>
                   <a:srgbClr val="15221D"/>
                 </a:solidFill>
@@ -5017,22 +4964,22 @@
       </p:sp>
       <p:sp>
         <p:nvSpPr>
-          <p:cNvPr id="14" name="">
-            <a:extLst xmlns:a="http://schemas.openxmlformats.org/drawingml/2006/main">
-              <a:ext uri="{FF2B5EF4-FFF2-40B4-BE49-F238E27FC236}">
-                <a16:creationId xmlns:a16="http://schemas.microsoft.com/office/drawing/2014/main" id="{00A7A6CB-3E41-4980-B1A0-6CA8CF2E2630}"/>
-              </a:ext>
-            </a:extLst>
-          </p:cNvPr>
-          <p:cNvSpPr>
-            <a:spLocks xmlns:a="http://schemas.openxmlformats.org/drawingml/2006/main" noGrp="1"/>
-          </p:cNvSpPr>
-          <p:nvPr/>
-        </p:nvSpPr>
-        <p:spPr>
-          <a:xfrm xmlns:a="http://schemas.openxmlformats.org/drawingml/2006/main">
-            <a:off x="4457700" y="1905000"/>
-            <a:ext cx="1952625" cy="190500"/>
+          <p:cNvPr id="67" name="">
+            <a:extLst xmlns:a="http://schemas.openxmlformats.org/drawingml/2006/main">
+              <a:ext uri="{FF2B5EF4-FFF2-40B4-BE49-F238E27FC236}">
+                <a16:creationId xmlns:a16="http://schemas.microsoft.com/office/drawing/2014/main" id="{7FBB358F-8376-4D73-85DD-43C655A6E8DC}"/>
+              </a:ext>
+            </a:extLst>
+          </p:cNvPr>
+          <p:cNvSpPr>
+            <a:spLocks xmlns:a="http://schemas.openxmlformats.org/drawingml/2006/main" noGrp="1"/>
+          </p:cNvSpPr>
+          <p:nvPr/>
+        </p:nvSpPr>
+        <p:spPr>
+          <a:xfrm xmlns:a="http://schemas.openxmlformats.org/drawingml/2006/main">
+            <a:off x="3552825" y="1857375"/>
+            <a:ext cx="2333625" cy="190500"/>
           </a:xfrm>
           <a:prstGeom xmlns:a="http://schemas.openxmlformats.org/drawingml/2006/main" prst="rect">
             <a:avLst/>
@@ -5054,7 +5001,7 @@
                 <a:spcPct val="115000"/>
               </a:lnSpc>
               <a:buNone/>
-              <a:defRPr sz="1050" b="0">
+              <a:defRPr sz="1013" b="0">
                 <a:solidFill>
                   <a:srgbClr val="6D7C73"/>
                 </a:solidFill>
@@ -5064,7 +5011,7 @@
               </a:defRPr>
             </a:pPr>
             <a:r>
-              <a:rPr sz="1050" b="0">
+              <a:rPr sz="1013" b="0">
                 <a:solidFill>
                   <a:srgbClr val="6D7C73"/>
                 </a:solidFill>
@@ -5072,29 +5019,93 @@
                 <a:ea typeface="PingFang SC"/>
                 <a:cs typeface="PingFang SC"/>
               </a:rPr>
-              <a:t>定义 · 区别 · 最小示例</a:t>
-            </a:r>
-          </a:p>
-        </p:txBody>
-      </p:sp>
-      <p:sp>
-        <p:nvSpPr>
-          <p:cNvPr id="15" name="">
-            <a:extLst xmlns:a="http://schemas.openxmlformats.org/drawingml/2006/main">
-              <a:ext uri="{FF2B5EF4-FFF2-40B4-BE49-F238E27FC236}">
-                <a16:creationId xmlns:a16="http://schemas.microsoft.com/office/drawing/2014/main" id="{3CF2443A-39E6-488A-9D9F-721D9D630A75}"/>
-              </a:ext>
-            </a:extLst>
-          </p:cNvPr>
-          <p:cNvSpPr>
-            <a:spLocks xmlns:a="http://schemas.openxmlformats.org/drawingml/2006/main" noGrp="1"/>
-          </p:cNvSpPr>
-          <p:nvPr/>
-        </p:nvSpPr>
-        <p:spPr>
-          <a:xfrm xmlns:a="http://schemas.openxmlformats.org/drawingml/2006/main">
-            <a:off x="6315075" y="1905000"/>
-            <a:ext cx="914400" cy="190500"/>
+              <a:t>查资料 · 讲机制 · 图解</a:t>
+            </a:r>
+          </a:p>
+        </p:txBody>
+      </p:sp>
+      <p:sp>
+        <p:nvSpPr>
+          <p:cNvPr id="68" name="mode-learn">
+            <a:extLst xmlns:a="http://schemas.openxmlformats.org/drawingml/2006/main">
+              <a:ext uri="{FF2B5EF4-FFF2-40B4-BE49-F238E27FC236}">
+                <a16:creationId xmlns:a16="http://schemas.microsoft.com/office/drawing/2014/main" id="{6D44A42B-2C41-45D1-A809-B09BF1992565}"/>
+              </a:ext>
+            </a:extLst>
+          </p:cNvPr>
+          <p:cNvSpPr>
+            <a:spLocks xmlns:a="http://schemas.openxmlformats.org/drawingml/2006/main" noGrp="1"/>
+          </p:cNvSpPr>
+          <p:nvPr/>
+        </p:nvSpPr>
+        <p:spPr>
+          <a:xfrm xmlns:a="http://schemas.openxmlformats.org/drawingml/2006/main">
+            <a:off x="6153150" y="1466850"/>
+            <a:ext cx="2638425" cy="666750"/>
+          </a:xfrm>
+          <a:prstGeom xmlns:a="http://schemas.openxmlformats.org/drawingml/2006/main" prst="roundRect">
+            <a:avLst>
+              <a:gd name="adj" fmla="val 17143"/>
+            </a:avLst>
+          </a:prstGeom>
+          <a:noFill xmlns:a="http://schemas.openxmlformats.org/drawingml/2006/main"/>
+          <a:ln xmlns:a="http://schemas.openxmlformats.org/drawingml/2006/main" w="0">
+            <a:noFill/>
+            <a:prstDash val="solid"/>
+          </a:ln>
+        </p:spPr>
+      </p:sp>
+      <p:sp>
+        <p:nvSpPr>
+          <p:cNvPr id="69" name="">
+            <a:extLst xmlns:a="http://schemas.openxmlformats.org/drawingml/2006/main">
+              <a:ext uri="{FF2B5EF4-FFF2-40B4-BE49-F238E27FC236}">
+                <a16:creationId xmlns:a16="http://schemas.microsoft.com/office/drawing/2014/main" id="{2C7D00FE-BC25-4ED1-B8C1-C79E9FA9FB66}"/>
+              </a:ext>
+            </a:extLst>
+          </p:cNvPr>
+          <p:cNvSpPr>
+            <a:spLocks xmlns:a="http://schemas.openxmlformats.org/drawingml/2006/main" noGrp="1"/>
+          </p:cNvSpPr>
+          <p:nvPr/>
+        </p:nvSpPr>
+        <p:spPr>
+          <a:xfrm xmlns:a="http://schemas.openxmlformats.org/drawingml/2006/main">
+            <a:off x="6153150" y="1466850"/>
+            <a:ext cx="2638425" cy="47625"/>
+          </a:xfrm>
+          <a:prstGeom xmlns:a="http://schemas.openxmlformats.org/drawingml/2006/main" prst="rect">
+            <a:avLst/>
+          </a:prstGeom>
+          <a:solidFill xmlns:a="http://schemas.openxmlformats.org/drawingml/2006/main">
+            <a:srgbClr val="315E9D"/>
+          </a:solidFill>
+          <a:ln xmlns:a="http://schemas.openxmlformats.org/drawingml/2006/main" w="0">
+            <a:solidFill>
+              <a:srgbClr val="315E9D"/>
+            </a:solidFill>
+            <a:prstDash val="solid"/>
+          </a:ln>
+        </p:spPr>
+      </p:sp>
+      <p:sp>
+        <p:nvSpPr>
+          <p:cNvPr id="70" name="">
+            <a:extLst xmlns:a="http://schemas.openxmlformats.org/drawingml/2006/main">
+              <a:ext uri="{FF2B5EF4-FFF2-40B4-BE49-F238E27FC236}">
+                <a16:creationId xmlns:a16="http://schemas.microsoft.com/office/drawing/2014/main" id="{D8CCBF51-8FB8-4D65-91AF-9232711488C1}"/>
+              </a:ext>
+            </a:extLst>
+          </p:cNvPr>
+          <p:cNvSpPr>
+            <a:spLocks xmlns:a="http://schemas.openxmlformats.org/drawingml/2006/main" noGrp="1"/>
+          </p:cNvSpPr>
+          <p:nvPr/>
+        </p:nvSpPr>
+        <p:spPr>
+          <a:xfrm xmlns:a="http://schemas.openxmlformats.org/drawingml/2006/main">
+            <a:off x="6305550" y="1600200"/>
+            <a:ext cx="742950" cy="190500"/>
           </a:xfrm>
           <a:prstGeom xmlns:a="http://schemas.openxmlformats.org/drawingml/2006/main" prst="rect">
             <a:avLst/>
@@ -5111,91 +5122,2248 @@
           </a:bodyPr>
           <a:lstStyle xmlns:a="http://schemas.openxmlformats.org/drawingml/2006/main"/>
           <a:p xmlns:a="http://schemas.openxmlformats.org/drawingml/2006/main">
-            <a:pPr algn="r">
+            <a:pPr algn="l">
               <a:lnSpc>
                 <a:spcPct val="115000"/>
               </a:lnSpc>
               <a:buNone/>
               <a:defRPr sz="975" b="1">
                 <a:solidFill>
-                  <a:srgbClr val="9B6D12"/>
-                </a:solidFill>
-                <a:latin typeface="PingFang SC"/>
-                <a:ea typeface="PingFang SC"/>
-                <a:cs typeface="PingFang SC"/>
+                  <a:srgbClr val="315E9D"/>
+                </a:solidFill>
+                <a:latin typeface="SFMono-Regular"/>
+                <a:ea typeface="SFMono-Regular"/>
+                <a:cs typeface="SFMono-Regular"/>
               </a:defRPr>
             </a:pPr>
             <a:r>
               <a:rPr sz="975" b="1">
                 <a:solidFill>
-                  <a:srgbClr val="9B6D12"/>
-                </a:solidFill>
-                <a:latin typeface="PingFang SC"/>
-                <a:ea typeface="PingFang SC"/>
-                <a:cs typeface="PingFang SC"/>
-              </a:rPr>
-              <a:t>交付后返回</a:t>
-            </a:r>
-          </a:p>
-        </p:txBody>
-      </p:sp>
-      <p:cxnSp>
-        <p:nvCxnSpPr>
-          <p:cNvPr id="72" name=""/>
-          <p:cNvCxnSpPr>
-            <a:stCxn xmlns:a="http://schemas.openxmlformats.org/drawingml/2006/main" id="6" idx="3"/>
-            <a:endCxn xmlns:a="http://schemas.openxmlformats.org/drawingml/2006/main" id="11" idx="1"/>
-          </p:cNvCxnSpPr>
-          <p:nvPr/>
-        </p:nvCxnSpPr>
-        <p:spPr>
-          <a:xfrm xmlns:a="http://schemas.openxmlformats.org/drawingml/2006/main" flipV="1">
-            <a:off x="3371850" y="1838325"/>
-            <a:ext cx="914400" cy="909638"/>
-          </a:xfrm>
-          <a:prstGeom xmlns:a="http://schemas.openxmlformats.org/drawingml/2006/main" prst="bentConnector3">
+                  <a:srgbClr val="315E9D"/>
+                </a:solidFill>
+                <a:latin typeface="SFMono-Regular"/>
+                <a:ea typeface="SFMono-Regular"/>
+                <a:cs typeface="SFMono-Regular"/>
+              </a:rPr>
+              <a:t>LEARN</a:t>
+            </a:r>
+          </a:p>
+        </p:txBody>
+      </p:sp>
+      <p:sp>
+        <p:nvSpPr>
+          <p:cNvPr id="71" name="">
+            <a:extLst xmlns:a="http://schemas.openxmlformats.org/drawingml/2006/main">
+              <a:ext uri="{FF2B5EF4-FFF2-40B4-BE49-F238E27FC236}">
+                <a16:creationId xmlns:a16="http://schemas.microsoft.com/office/drawing/2014/main" id="{327B0944-CC6B-4FEC-9A13-3C5B78FCDB7F}"/>
+              </a:ext>
+            </a:extLst>
+          </p:cNvPr>
+          <p:cNvSpPr>
+            <a:spLocks xmlns:a="http://schemas.openxmlformats.org/drawingml/2006/main" noGrp="1"/>
+          </p:cNvSpPr>
+          <p:nvPr/>
+        </p:nvSpPr>
+        <p:spPr>
+          <a:xfrm xmlns:a="http://schemas.openxmlformats.org/drawingml/2006/main">
+            <a:off x="7029450" y="1571625"/>
+            <a:ext cx="1524000" cy="247650"/>
+          </a:xfrm>
+          <a:prstGeom xmlns:a="http://schemas.openxmlformats.org/drawingml/2006/main" prst="rect">
+            <a:avLst/>
+          </a:prstGeom>
+          <a:noFill xmlns:a="http://schemas.openxmlformats.org/drawingml/2006/main"/>
+          <a:ln xmlns:a="http://schemas.openxmlformats.org/drawingml/2006/main" w="0">
+            <a:noFill/>
+            <a:prstDash val="solid"/>
+          </a:ln>
+        </p:spPr>
+        <p:txBody>
+          <a:bodyPr xmlns:a="http://schemas.openxmlformats.org/drawingml/2006/main" wrap="square" lIns="0" tIns="0" rIns="0" bIns="0" anchor="t">
+            <a:noAutofit/>
+          </a:bodyPr>
+          <a:lstStyle xmlns:a="http://schemas.openxmlformats.org/drawingml/2006/main"/>
+          <a:p xmlns:a="http://schemas.openxmlformats.org/drawingml/2006/main">
+            <a:pPr algn="l">
+              <a:lnSpc>
+                <a:spcPct val="115000"/>
+              </a:lnSpc>
+              <a:buNone/>
+              <a:defRPr sz="1425" b="1">
+                <a:solidFill>
+                  <a:srgbClr val="15221D"/>
+                </a:solidFill>
+                <a:latin typeface="PingFang SC"/>
+                <a:ea typeface="PingFang SC"/>
+                <a:cs typeface="PingFang SC"/>
+              </a:defRPr>
+            </a:pPr>
+            <a:r>
+              <a:rPr sz="1425" b="1">
+                <a:solidFill>
+                  <a:srgbClr val="15221D"/>
+                </a:solidFill>
+                <a:latin typeface="PingFang SC"/>
+                <a:ea typeface="PingFang SC"/>
+                <a:cs typeface="PingFang SC"/>
+              </a:rPr>
+              <a:t>学习任务</a:t>
+            </a:r>
+          </a:p>
+        </p:txBody>
+      </p:sp>
+      <p:sp>
+        <p:nvSpPr>
+          <p:cNvPr id="72" name="">
+            <a:extLst xmlns:a="http://schemas.openxmlformats.org/drawingml/2006/main">
+              <a:ext uri="{FF2B5EF4-FFF2-40B4-BE49-F238E27FC236}">
+                <a16:creationId xmlns:a16="http://schemas.microsoft.com/office/drawing/2014/main" id="{0FF30E0F-F133-4A4D-AE88-12726151418E}"/>
+              </a:ext>
+            </a:extLst>
+          </p:cNvPr>
+          <p:cNvSpPr>
+            <a:spLocks xmlns:a="http://schemas.openxmlformats.org/drawingml/2006/main" noGrp="1"/>
+          </p:cNvSpPr>
+          <p:nvPr/>
+        </p:nvSpPr>
+        <p:spPr>
+          <a:xfrm xmlns:a="http://schemas.openxmlformats.org/drawingml/2006/main">
+            <a:off x="6305550" y="1857375"/>
+            <a:ext cx="2333625" cy="190500"/>
+          </a:xfrm>
+          <a:prstGeom xmlns:a="http://schemas.openxmlformats.org/drawingml/2006/main" prst="rect">
+            <a:avLst/>
+          </a:prstGeom>
+          <a:noFill xmlns:a="http://schemas.openxmlformats.org/drawingml/2006/main"/>
+          <a:ln xmlns:a="http://schemas.openxmlformats.org/drawingml/2006/main" w="0">
+            <a:noFill/>
+            <a:prstDash val="solid"/>
+          </a:ln>
+        </p:spPr>
+        <p:txBody>
+          <a:bodyPr xmlns:a="http://schemas.openxmlformats.org/drawingml/2006/main" wrap="square" lIns="0" tIns="0" rIns="0" bIns="0" anchor="t">
+            <a:noAutofit/>
+          </a:bodyPr>
+          <a:lstStyle xmlns:a="http://schemas.openxmlformats.org/drawingml/2006/main"/>
+          <a:p xmlns:a="http://schemas.openxmlformats.org/drawingml/2006/main">
+            <a:pPr algn="l">
+              <a:lnSpc>
+                <a:spcPct val="115000"/>
+              </a:lnSpc>
+              <a:buNone/>
+              <a:defRPr sz="1013" b="0">
+                <a:solidFill>
+                  <a:srgbClr val="6D7C73"/>
+                </a:solidFill>
+                <a:latin typeface="PingFang SC"/>
+                <a:ea typeface="PingFang SC"/>
+                <a:cs typeface="PingFang SC"/>
+              </a:defRPr>
+            </a:pPr>
+            <a:r>
+              <a:rPr sz="1013" b="0">
+                <a:solidFill>
+                  <a:srgbClr val="6D7C73"/>
+                </a:solidFill>
+                <a:latin typeface="PingFang SC"/>
+                <a:ea typeface="PingFang SC"/>
+                <a:cs typeface="PingFang SC"/>
+              </a:rPr>
+              <a:t>任务 · 材料 · 练习 · 复习</a:t>
+            </a:r>
+          </a:p>
+        </p:txBody>
+      </p:sp>
+      <p:sp>
+        <p:nvSpPr>
+          <p:cNvPr id="73" name="mode-plan">
+            <a:extLst xmlns:a="http://schemas.openxmlformats.org/drawingml/2006/main">
+              <a:ext uri="{FF2B5EF4-FFF2-40B4-BE49-F238E27FC236}">
+                <a16:creationId xmlns:a16="http://schemas.microsoft.com/office/drawing/2014/main" id="{D9C8399A-C777-4825-8736-081449F66C65}"/>
+              </a:ext>
+            </a:extLst>
+          </p:cNvPr>
+          <p:cNvSpPr>
+            <a:spLocks xmlns:a="http://schemas.openxmlformats.org/drawingml/2006/main" noGrp="1"/>
+          </p:cNvSpPr>
+          <p:nvPr/>
+        </p:nvSpPr>
+        <p:spPr>
+          <a:xfrm xmlns:a="http://schemas.openxmlformats.org/drawingml/2006/main">
+            <a:off x="8905875" y="1466850"/>
+            <a:ext cx="2638425" cy="666750"/>
+          </a:xfrm>
+          <a:prstGeom xmlns:a="http://schemas.openxmlformats.org/drawingml/2006/main" prst="roundRect">
             <a:avLst>
-              <a:gd name="adj1" fmla="val 50000"/>
+              <a:gd name="adj" fmla="val 17143"/>
             </a:avLst>
           </a:prstGeom>
-          <a:ln xmlns:a="http://schemas.openxmlformats.org/drawingml/2006/main" w="20955">
+          <a:noFill xmlns:a="http://schemas.openxmlformats.org/drawingml/2006/main"/>
+          <a:ln xmlns:a="http://schemas.openxmlformats.org/drawingml/2006/main" w="0">
+            <a:noFill/>
+            <a:prstDash val="solid"/>
+          </a:ln>
+        </p:spPr>
+      </p:sp>
+      <p:sp>
+        <p:nvSpPr>
+          <p:cNvPr id="74" name="">
+            <a:extLst xmlns:a="http://schemas.openxmlformats.org/drawingml/2006/main">
+              <a:ext uri="{FF2B5EF4-FFF2-40B4-BE49-F238E27FC236}">
+                <a16:creationId xmlns:a16="http://schemas.microsoft.com/office/drawing/2014/main" id="{6BE8C9AB-9267-4FDB-8A4D-5036A537CD47}"/>
+              </a:ext>
+            </a:extLst>
+          </p:cNvPr>
+          <p:cNvSpPr>
+            <a:spLocks xmlns:a="http://schemas.openxmlformats.org/drawingml/2006/main" noGrp="1"/>
+          </p:cNvSpPr>
+          <p:nvPr/>
+        </p:nvSpPr>
+        <p:spPr>
+          <a:xfrm xmlns:a="http://schemas.openxmlformats.org/drawingml/2006/main">
+            <a:off x="8905875" y="1466850"/>
+            <a:ext cx="2638425" cy="47625"/>
+          </a:xfrm>
+          <a:prstGeom xmlns:a="http://schemas.openxmlformats.org/drawingml/2006/main" prst="rect">
+            <a:avLst/>
+          </a:prstGeom>
+          <a:solidFill xmlns:a="http://schemas.openxmlformats.org/drawingml/2006/main">
+            <a:srgbClr val="64529B"/>
+          </a:solidFill>
+          <a:ln xmlns:a="http://schemas.openxmlformats.org/drawingml/2006/main" w="0">
+            <a:solidFill>
+              <a:srgbClr val="64529B"/>
+            </a:solidFill>
+            <a:prstDash val="solid"/>
+          </a:ln>
+        </p:spPr>
+      </p:sp>
+      <p:sp>
+        <p:nvSpPr>
+          <p:cNvPr id="75" name="">
+            <a:extLst xmlns:a="http://schemas.openxmlformats.org/drawingml/2006/main">
+              <a:ext uri="{FF2B5EF4-FFF2-40B4-BE49-F238E27FC236}">
+                <a16:creationId xmlns:a16="http://schemas.microsoft.com/office/drawing/2014/main" id="{E0AAB47C-7A01-4BC0-AB2B-A3B860C21348}"/>
+              </a:ext>
+            </a:extLst>
+          </p:cNvPr>
+          <p:cNvSpPr>
+            <a:spLocks xmlns:a="http://schemas.openxmlformats.org/drawingml/2006/main" noGrp="1"/>
+          </p:cNvSpPr>
+          <p:nvPr/>
+        </p:nvSpPr>
+        <p:spPr>
+          <a:xfrm xmlns:a="http://schemas.openxmlformats.org/drawingml/2006/main">
+            <a:off x="9058275" y="1600200"/>
+            <a:ext cx="742950" cy="190500"/>
+          </a:xfrm>
+          <a:prstGeom xmlns:a="http://schemas.openxmlformats.org/drawingml/2006/main" prst="rect">
+            <a:avLst/>
+          </a:prstGeom>
+          <a:noFill xmlns:a="http://schemas.openxmlformats.org/drawingml/2006/main"/>
+          <a:ln xmlns:a="http://schemas.openxmlformats.org/drawingml/2006/main" w="0">
+            <a:noFill/>
+            <a:prstDash val="solid"/>
+          </a:ln>
+        </p:spPr>
+        <p:txBody>
+          <a:bodyPr xmlns:a="http://schemas.openxmlformats.org/drawingml/2006/main" wrap="square" lIns="0" tIns="0" rIns="0" bIns="0" anchor="t">
+            <a:noAutofit/>
+          </a:bodyPr>
+          <a:lstStyle xmlns:a="http://schemas.openxmlformats.org/drawingml/2006/main"/>
+          <a:p xmlns:a="http://schemas.openxmlformats.org/drawingml/2006/main">
+            <a:pPr algn="l">
+              <a:lnSpc>
+                <a:spcPct val="115000"/>
+              </a:lnSpc>
+              <a:buNone/>
+              <a:defRPr sz="975" b="1">
+                <a:solidFill>
+                  <a:srgbClr val="64529B"/>
+                </a:solidFill>
+                <a:latin typeface="SFMono-Regular"/>
+                <a:ea typeface="SFMono-Regular"/>
+                <a:cs typeface="SFMono-Regular"/>
+              </a:defRPr>
+            </a:pPr>
+            <a:r>
+              <a:rPr sz="975" b="1">
+                <a:solidFill>
+                  <a:srgbClr val="64529B"/>
+                </a:solidFill>
+                <a:latin typeface="SFMono-Regular"/>
+                <a:ea typeface="SFMono-Regular"/>
+                <a:cs typeface="SFMono-Regular"/>
+              </a:rPr>
+              <a:t>PLAN</a:t>
+            </a:r>
+          </a:p>
+        </p:txBody>
+      </p:sp>
+      <p:sp>
+        <p:nvSpPr>
+          <p:cNvPr id="76" name="">
+            <a:extLst xmlns:a="http://schemas.openxmlformats.org/drawingml/2006/main">
+              <a:ext uri="{FF2B5EF4-FFF2-40B4-BE49-F238E27FC236}">
+                <a16:creationId xmlns:a16="http://schemas.microsoft.com/office/drawing/2014/main" id="{42A6ED54-282E-4575-B638-D64427BE8008}"/>
+              </a:ext>
+            </a:extLst>
+          </p:cNvPr>
+          <p:cNvSpPr>
+            <a:spLocks xmlns:a="http://schemas.openxmlformats.org/drawingml/2006/main" noGrp="1"/>
+          </p:cNvSpPr>
+          <p:nvPr/>
+        </p:nvSpPr>
+        <p:spPr>
+          <a:xfrm xmlns:a="http://schemas.openxmlformats.org/drawingml/2006/main">
+            <a:off x="9782175" y="1571625"/>
+            <a:ext cx="1524000" cy="247650"/>
+          </a:xfrm>
+          <a:prstGeom xmlns:a="http://schemas.openxmlformats.org/drawingml/2006/main" prst="rect">
+            <a:avLst/>
+          </a:prstGeom>
+          <a:noFill xmlns:a="http://schemas.openxmlformats.org/drawingml/2006/main"/>
+          <a:ln xmlns:a="http://schemas.openxmlformats.org/drawingml/2006/main" w="0">
+            <a:noFill/>
+            <a:prstDash val="solid"/>
+          </a:ln>
+        </p:spPr>
+        <p:txBody>
+          <a:bodyPr xmlns:a="http://schemas.openxmlformats.org/drawingml/2006/main" wrap="square" lIns="0" tIns="0" rIns="0" bIns="0" anchor="t">
+            <a:noAutofit/>
+          </a:bodyPr>
+          <a:lstStyle xmlns:a="http://schemas.openxmlformats.org/drawingml/2006/main"/>
+          <a:p xmlns:a="http://schemas.openxmlformats.org/drawingml/2006/main">
+            <a:pPr algn="l">
+              <a:lnSpc>
+                <a:spcPct val="115000"/>
+              </a:lnSpc>
+              <a:buNone/>
+              <a:defRPr sz="1425" b="1">
+                <a:solidFill>
+                  <a:srgbClr val="15221D"/>
+                </a:solidFill>
+                <a:latin typeface="PingFang SC"/>
+                <a:ea typeface="PingFang SC"/>
+                <a:cs typeface="PingFang SC"/>
+              </a:defRPr>
+            </a:pPr>
+            <a:r>
+              <a:rPr sz="1425" b="1">
+                <a:solidFill>
+                  <a:srgbClr val="15221D"/>
+                </a:solidFill>
+                <a:latin typeface="PingFang SC"/>
+                <a:ea typeface="PingFang SC"/>
+                <a:cs typeface="PingFang SC"/>
+              </a:rPr>
+              <a:t>学习规划</a:t>
+            </a:r>
+          </a:p>
+        </p:txBody>
+      </p:sp>
+      <p:sp>
+        <p:nvSpPr>
+          <p:cNvPr id="77" name="">
+            <a:extLst xmlns:a="http://schemas.openxmlformats.org/drawingml/2006/main">
+              <a:ext uri="{FF2B5EF4-FFF2-40B4-BE49-F238E27FC236}">
+                <a16:creationId xmlns:a16="http://schemas.microsoft.com/office/drawing/2014/main" id="{03050765-537B-44BB-B9B7-36C73A105585}"/>
+              </a:ext>
+            </a:extLst>
+          </p:cNvPr>
+          <p:cNvSpPr>
+            <a:spLocks xmlns:a="http://schemas.openxmlformats.org/drawingml/2006/main" noGrp="1"/>
+          </p:cNvSpPr>
+          <p:nvPr/>
+        </p:nvSpPr>
+        <p:spPr>
+          <a:xfrm xmlns:a="http://schemas.openxmlformats.org/drawingml/2006/main">
+            <a:off x="9058275" y="1857375"/>
+            <a:ext cx="2333625" cy="190500"/>
+          </a:xfrm>
+          <a:prstGeom xmlns:a="http://schemas.openxmlformats.org/drawingml/2006/main" prst="rect">
+            <a:avLst/>
+          </a:prstGeom>
+          <a:noFill xmlns:a="http://schemas.openxmlformats.org/drawingml/2006/main"/>
+          <a:ln xmlns:a="http://schemas.openxmlformats.org/drawingml/2006/main" w="0">
+            <a:noFill/>
+            <a:prstDash val="solid"/>
+          </a:ln>
+        </p:spPr>
+        <p:txBody>
+          <a:bodyPr xmlns:a="http://schemas.openxmlformats.org/drawingml/2006/main" wrap="square" lIns="0" tIns="0" rIns="0" bIns="0" anchor="t">
+            <a:noAutofit/>
+          </a:bodyPr>
+          <a:lstStyle xmlns:a="http://schemas.openxmlformats.org/drawingml/2006/main"/>
+          <a:p xmlns:a="http://schemas.openxmlformats.org/drawingml/2006/main">
+            <a:pPr algn="l">
+              <a:lnSpc>
+                <a:spcPct val="115000"/>
+              </a:lnSpc>
+              <a:buNone/>
+              <a:defRPr sz="1013" b="0">
+                <a:solidFill>
+                  <a:srgbClr val="6D7C73"/>
+                </a:solidFill>
+                <a:latin typeface="PingFang SC"/>
+                <a:ea typeface="PingFang SC"/>
+                <a:cs typeface="PingFang SC"/>
+              </a:defRPr>
+            </a:pPr>
+            <a:r>
+              <a:rPr sz="1013" b="0">
+                <a:solidFill>
+                  <a:srgbClr val="6D7C73"/>
+                </a:solidFill>
+                <a:latin typeface="PingFang SC"/>
+                <a:ea typeface="PingFang SC"/>
+                <a:cs typeface="PingFang SC"/>
+              </a:rPr>
+              <a:t>路径 · 项目 · 长期目标</a:t>
+            </a:r>
+          </a:p>
+        </p:txBody>
+      </p:sp>
+      <p:sp>
+        <p:nvSpPr>
+          <p:cNvPr id="78" name="">
+            <a:extLst xmlns:a="http://schemas.openxmlformats.org/drawingml/2006/main">
+              <a:ext uri="{FF2B5EF4-FFF2-40B4-BE49-F238E27FC236}">
+                <a16:creationId xmlns:a16="http://schemas.microsoft.com/office/drawing/2014/main" id="{0A57E29E-A904-4B91-B366-5CFE84C2FE11}"/>
+              </a:ext>
+            </a:extLst>
+          </p:cNvPr>
+          <p:cNvSpPr>
+            <a:spLocks xmlns:a="http://schemas.openxmlformats.org/drawingml/2006/main" noGrp="1"/>
+          </p:cNvSpPr>
+          <p:nvPr/>
+        </p:nvSpPr>
+        <p:spPr>
+          <a:xfrm xmlns:a="http://schemas.openxmlformats.org/drawingml/2006/main">
+            <a:off x="781050" y="2305050"/>
+            <a:ext cx="3295650" cy="209550"/>
+          </a:xfrm>
+          <a:prstGeom xmlns:a="http://schemas.openxmlformats.org/drawingml/2006/main" prst="rect">
+            <a:avLst/>
+          </a:prstGeom>
+          <a:noFill xmlns:a="http://schemas.openxmlformats.org/drawingml/2006/main"/>
+          <a:ln xmlns:a="http://schemas.openxmlformats.org/drawingml/2006/main" w="0">
+            <a:noFill/>
+            <a:prstDash val="solid"/>
+          </a:ln>
+        </p:spPr>
+        <p:txBody>
+          <a:bodyPr xmlns:a="http://schemas.openxmlformats.org/drawingml/2006/main" wrap="square" lIns="0" tIns="0" rIns="0" bIns="0" anchor="t">
+            <a:noAutofit/>
+          </a:bodyPr>
+          <a:lstStyle xmlns:a="http://schemas.openxmlformats.org/drawingml/2006/main"/>
+          <a:p xmlns:a="http://schemas.openxmlformats.org/drawingml/2006/main">
+            <a:pPr algn="l">
+              <a:lnSpc>
+                <a:spcPct val="115000"/>
+              </a:lnSpc>
+              <a:buNone/>
+              <a:defRPr sz="1013" b="1">
+                <a:solidFill>
+                  <a:srgbClr val="93A198"/>
+                </a:solidFill>
+                <a:latin typeface="PingFang SC"/>
+                <a:ea typeface="PingFang SC"/>
+                <a:cs typeface="PingFang SC"/>
+              </a:defRPr>
+            </a:pPr>
+            <a:r>
+              <a:rPr sz="1013" b="1">
+                <a:solidFill>
+                  <a:srgbClr val="93A198"/>
+                </a:solidFill>
+                <a:latin typeface="PingFang SC"/>
+                <a:ea typeface="PingFang SC"/>
+                <a:cs typeface="PingFang SC"/>
+              </a:rPr>
+              <a:t>当前工具</a:t>
+            </a:r>
+          </a:p>
+        </p:txBody>
+      </p:sp>
+      <p:sp>
+        <p:nvSpPr>
+          <p:cNvPr id="79" name="">
+            <a:extLst xmlns:a="http://schemas.openxmlformats.org/drawingml/2006/main">
+              <a:ext uri="{FF2B5EF4-FFF2-40B4-BE49-F238E27FC236}">
+                <a16:creationId xmlns:a16="http://schemas.microsoft.com/office/drawing/2014/main" id="{51BD5EB1-F4F6-4356-85AE-FC3E72E70F4B}"/>
+              </a:ext>
+            </a:extLst>
+          </p:cNvPr>
+          <p:cNvSpPr>
+            <a:spLocks xmlns:a="http://schemas.openxmlformats.org/drawingml/2006/main" noGrp="1"/>
+          </p:cNvSpPr>
+          <p:nvPr/>
+        </p:nvSpPr>
+        <p:spPr>
+          <a:xfrm xmlns:a="http://schemas.openxmlformats.org/drawingml/2006/main">
+            <a:off x="4343400" y="2305050"/>
+            <a:ext cx="1924050" cy="209550"/>
+          </a:xfrm>
+          <a:prstGeom xmlns:a="http://schemas.openxmlformats.org/drawingml/2006/main" prst="rect">
+            <a:avLst/>
+          </a:prstGeom>
+          <a:noFill xmlns:a="http://schemas.openxmlformats.org/drawingml/2006/main"/>
+          <a:ln xmlns:a="http://schemas.openxmlformats.org/drawingml/2006/main" w="0">
+            <a:noFill/>
+            <a:prstDash val="solid"/>
+          </a:ln>
+        </p:spPr>
+        <p:txBody>
+          <a:bodyPr xmlns:a="http://schemas.openxmlformats.org/drawingml/2006/main" wrap="square" lIns="0" tIns="0" rIns="0" bIns="0" anchor="t">
+            <a:noAutofit/>
+          </a:bodyPr>
+          <a:lstStyle xmlns:a="http://schemas.openxmlformats.org/drawingml/2006/main"/>
+          <a:p xmlns:a="http://schemas.openxmlformats.org/drawingml/2006/main">
+            <a:pPr algn="l">
+              <a:lnSpc>
+                <a:spcPct val="115000"/>
+              </a:lnSpc>
+              <a:buNone/>
+              <a:defRPr sz="1013" b="1">
+                <a:solidFill>
+                  <a:srgbClr val="93A198"/>
+                </a:solidFill>
+                <a:latin typeface="PingFang SC"/>
+                <a:ea typeface="PingFang SC"/>
+                <a:cs typeface="PingFang SC"/>
+              </a:defRPr>
+            </a:pPr>
+            <a:r>
+              <a:rPr sz="1013" b="1">
+                <a:solidFill>
+                  <a:srgbClr val="93A198"/>
+                </a:solidFill>
+                <a:latin typeface="PingFang SC"/>
+                <a:ea typeface="PingFang SC"/>
+                <a:cs typeface="PingFang SC"/>
+              </a:rPr>
+              <a:t>一般在什么场景</a:t>
+            </a:r>
+          </a:p>
+        </p:txBody>
+      </p:sp>
+      <p:sp>
+        <p:nvSpPr>
+          <p:cNvPr id="80" name="">
+            <a:extLst xmlns:a="http://schemas.openxmlformats.org/drawingml/2006/main">
+              <a:ext uri="{FF2B5EF4-FFF2-40B4-BE49-F238E27FC236}">
+                <a16:creationId xmlns:a16="http://schemas.microsoft.com/office/drawing/2014/main" id="{C7FE5980-88A1-4255-9766-3B9DE7376E9D}"/>
+              </a:ext>
+            </a:extLst>
+          </p:cNvPr>
+          <p:cNvSpPr>
+            <a:spLocks xmlns:a="http://schemas.openxmlformats.org/drawingml/2006/main" noGrp="1"/>
+          </p:cNvSpPr>
+          <p:nvPr/>
+        </p:nvSpPr>
+        <p:spPr>
+          <a:xfrm xmlns:a="http://schemas.openxmlformats.org/drawingml/2006/main">
+            <a:off x="6534150" y="2305050"/>
+            <a:ext cx="3162300" cy="209550"/>
+          </a:xfrm>
+          <a:prstGeom xmlns:a="http://schemas.openxmlformats.org/drawingml/2006/main" prst="rect">
+            <a:avLst/>
+          </a:prstGeom>
+          <a:noFill xmlns:a="http://schemas.openxmlformats.org/drawingml/2006/main"/>
+          <a:ln xmlns:a="http://schemas.openxmlformats.org/drawingml/2006/main" w="0">
+            <a:noFill/>
+            <a:prstDash val="solid"/>
+          </a:ln>
+        </p:spPr>
+        <p:txBody>
+          <a:bodyPr xmlns:a="http://schemas.openxmlformats.org/drawingml/2006/main" wrap="square" lIns="0" tIns="0" rIns="0" bIns="0" anchor="t">
+            <a:noAutofit/>
+          </a:bodyPr>
+          <a:lstStyle xmlns:a="http://schemas.openxmlformats.org/drawingml/2006/main"/>
+          <a:p xmlns:a="http://schemas.openxmlformats.org/drawingml/2006/main">
+            <a:pPr algn="l">
+              <a:lnSpc>
+                <a:spcPct val="115000"/>
+              </a:lnSpc>
+              <a:buNone/>
+              <a:defRPr sz="1013" b="1">
+                <a:solidFill>
+                  <a:srgbClr val="93A198"/>
+                </a:solidFill>
+                <a:latin typeface="PingFang SC"/>
+                <a:ea typeface="PingFang SC"/>
+                <a:cs typeface="PingFang SC"/>
+              </a:defRPr>
+            </a:pPr>
+            <a:r>
+              <a:rPr sz="1013" b="1">
+                <a:solidFill>
+                  <a:srgbClr val="93A198"/>
+                </a:solidFill>
+                <a:latin typeface="PingFang SC"/>
+                <a:ea typeface="PingFang SC"/>
+                <a:cs typeface="PingFang SC"/>
+              </a:rPr>
+              <a:t>连接的正式对象</a:t>
+            </a:r>
+          </a:p>
+        </p:txBody>
+      </p:sp>
+      <p:sp>
+        <p:nvSpPr>
+          <p:cNvPr id="81" name="">
+            <a:extLst xmlns:a="http://schemas.openxmlformats.org/drawingml/2006/main">
+              <a:ext uri="{FF2B5EF4-FFF2-40B4-BE49-F238E27FC236}">
+                <a16:creationId xmlns:a16="http://schemas.microsoft.com/office/drawing/2014/main" id="{FF67972D-7EB6-4487-A3BF-D14D11A3F64F}"/>
+              </a:ext>
+            </a:extLst>
+          </p:cNvPr>
+          <p:cNvSpPr>
+            <a:spLocks xmlns:a="http://schemas.openxmlformats.org/drawingml/2006/main" noGrp="1"/>
+          </p:cNvSpPr>
+          <p:nvPr/>
+        </p:nvSpPr>
+        <p:spPr>
+          <a:xfrm xmlns:a="http://schemas.openxmlformats.org/drawingml/2006/main">
+            <a:off x="9963150" y="2305050"/>
+            <a:ext cx="1447800" cy="209550"/>
+          </a:xfrm>
+          <a:prstGeom xmlns:a="http://schemas.openxmlformats.org/drawingml/2006/main" prst="rect">
+            <a:avLst/>
+          </a:prstGeom>
+          <a:noFill xmlns:a="http://schemas.openxmlformats.org/drawingml/2006/main"/>
+          <a:ln xmlns:a="http://schemas.openxmlformats.org/drawingml/2006/main" w="0">
+            <a:noFill/>
+            <a:prstDash val="solid"/>
+          </a:ln>
+        </p:spPr>
+        <p:txBody>
+          <a:bodyPr xmlns:a="http://schemas.openxmlformats.org/drawingml/2006/main" wrap="square" lIns="0" tIns="0" rIns="0" bIns="0" anchor="t">
+            <a:noAutofit/>
+          </a:bodyPr>
+          <a:lstStyle xmlns:a="http://schemas.openxmlformats.org/drawingml/2006/main"/>
+          <a:p xmlns:a="http://schemas.openxmlformats.org/drawingml/2006/main">
+            <a:pPr algn="l">
+              <a:lnSpc>
+                <a:spcPct val="115000"/>
+              </a:lnSpc>
+              <a:buNone/>
+              <a:defRPr sz="1013" b="1">
+                <a:solidFill>
+                  <a:srgbClr val="93A198"/>
+                </a:solidFill>
+                <a:latin typeface="PingFang SC"/>
+                <a:ea typeface="PingFang SC"/>
+                <a:cs typeface="PingFang SC"/>
+              </a:defRPr>
+            </a:pPr>
+            <a:r>
+              <a:rPr sz="1013" b="1">
+                <a:solidFill>
+                  <a:srgbClr val="93A198"/>
+                </a:solidFill>
+                <a:latin typeface="PingFang SC"/>
+                <a:ea typeface="PingFang SC"/>
+                <a:cs typeface="PingFang SC"/>
+              </a:rPr>
+              <a:t>进入哪个空间</a:t>
+            </a:r>
+          </a:p>
+        </p:txBody>
+      </p:sp>
+      <p:sp>
+        <p:nvSpPr>
+          <p:cNvPr id="82" name="">
+            <a:extLst xmlns:a="http://schemas.openxmlformats.org/drawingml/2006/main">
+              <a:ext uri="{FF2B5EF4-FFF2-40B4-BE49-F238E27FC236}">
+                <a16:creationId xmlns:a16="http://schemas.microsoft.com/office/drawing/2014/main" id="{5AC2A48A-73F7-441F-AA20-BEA5D1EA5FC2}"/>
+              </a:ext>
+            </a:extLst>
+          </p:cNvPr>
+          <p:cNvSpPr>
+            <a:spLocks xmlns:a="http://schemas.openxmlformats.org/drawingml/2006/main" noGrp="1"/>
+          </p:cNvSpPr>
+          <p:nvPr/>
+        </p:nvSpPr>
+        <p:spPr>
+          <a:xfrm xmlns:a="http://schemas.openxmlformats.org/drawingml/2006/main">
+            <a:off x="647700" y="2571750"/>
+            <a:ext cx="10896600" cy="9525"/>
+          </a:xfrm>
+          <a:prstGeom xmlns:a="http://schemas.openxmlformats.org/drawingml/2006/main" prst="line">
+            <a:avLst/>
+          </a:prstGeom>
+          <a:noFill xmlns:a="http://schemas.openxmlformats.org/drawingml/2006/main"/>
+          <a:ln xmlns:a="http://schemas.openxmlformats.org/drawingml/2006/main" w="9525">
+            <a:solidFill>
+              <a:srgbClr val="D9E2DC"/>
+            </a:solidFill>
+            <a:prstDash val="solid"/>
+          </a:ln>
+        </p:spPr>
+      </p:sp>
+      <p:sp>
+        <p:nvSpPr>
+          <p:cNvPr id="83" name="">
+            <a:extLst xmlns:a="http://schemas.openxmlformats.org/drawingml/2006/main">
+              <a:ext uri="{FF2B5EF4-FFF2-40B4-BE49-F238E27FC236}">
+                <a16:creationId xmlns:a16="http://schemas.microsoft.com/office/drawing/2014/main" id="{9F66CB02-80A8-47F2-B62A-3DBAFEFDC523}"/>
+              </a:ext>
+            </a:extLst>
+          </p:cNvPr>
+          <p:cNvSpPr>
+            <a:spLocks xmlns:a="http://schemas.openxmlformats.org/drawingml/2006/main" noGrp="1"/>
+          </p:cNvSpPr>
+          <p:nvPr/>
+        </p:nvSpPr>
+        <p:spPr>
+          <a:xfrm xmlns:a="http://schemas.openxmlformats.org/drawingml/2006/main">
+            <a:off x="647700" y="2609850"/>
+            <a:ext cx="10896600" cy="666750"/>
+          </a:xfrm>
+          <a:prstGeom xmlns:a="http://schemas.openxmlformats.org/drawingml/2006/main" prst="rect">
+            <a:avLst/>
+          </a:prstGeom>
+          <a:noFill xmlns:a="http://schemas.openxmlformats.org/drawingml/2006/main"/>
+          <a:ln xmlns:a="http://schemas.openxmlformats.org/drawingml/2006/main" w="0">
+            <a:noFill/>
+            <a:prstDash val="solid"/>
+          </a:ln>
+        </p:spPr>
+      </p:sp>
+      <p:sp>
+        <p:nvSpPr>
+          <p:cNvPr id="84" name="">
+            <a:extLst xmlns:a="http://schemas.openxmlformats.org/drawingml/2006/main">
+              <a:ext uri="{FF2B5EF4-FFF2-40B4-BE49-F238E27FC236}">
+                <a16:creationId xmlns:a16="http://schemas.microsoft.com/office/drawing/2014/main" id="{09A6DF9F-83E2-4C11-A40B-4E780E61B190}"/>
+              </a:ext>
+            </a:extLst>
+          </p:cNvPr>
+          <p:cNvSpPr>
+            <a:spLocks xmlns:a="http://schemas.openxmlformats.org/drawingml/2006/main" noGrp="1"/>
+          </p:cNvSpPr>
+          <p:nvPr/>
+        </p:nvSpPr>
+        <p:spPr>
+          <a:xfrm xmlns:a="http://schemas.openxmlformats.org/drawingml/2006/main">
+            <a:off x="647700" y="2609850"/>
+            <a:ext cx="47625" cy="666750"/>
+          </a:xfrm>
+          <a:prstGeom xmlns:a="http://schemas.openxmlformats.org/drawingml/2006/main" prst="rect">
+            <a:avLst/>
+          </a:prstGeom>
+          <a:solidFill xmlns:a="http://schemas.openxmlformats.org/drawingml/2006/main">
+            <a:srgbClr val="087A53"/>
+          </a:solidFill>
+          <a:ln xmlns:a="http://schemas.openxmlformats.org/drawingml/2006/main" w="0">
+            <a:solidFill>
+              <a:srgbClr val="087A53"/>
+            </a:solidFill>
+            <a:prstDash val="solid"/>
+          </a:ln>
+        </p:spPr>
+      </p:sp>
+      <p:sp>
+        <p:nvSpPr>
+          <p:cNvPr id="85" name="">
+            <a:extLst xmlns:a="http://schemas.openxmlformats.org/drawingml/2006/main">
+              <a:ext uri="{FF2B5EF4-FFF2-40B4-BE49-F238E27FC236}">
+                <a16:creationId xmlns:a16="http://schemas.microsoft.com/office/drawing/2014/main" id="{0068A5DB-A39D-4213-94DF-5D4E39FF5411}"/>
+              </a:ext>
+            </a:extLst>
+          </p:cNvPr>
+          <p:cNvSpPr>
+            <a:spLocks xmlns:a="http://schemas.openxmlformats.org/drawingml/2006/main" noGrp="1"/>
+          </p:cNvSpPr>
+          <p:nvPr/>
+        </p:nvSpPr>
+        <p:spPr>
+          <a:xfrm xmlns:a="http://schemas.openxmlformats.org/drawingml/2006/main">
+            <a:off x="800100" y="2695575"/>
+            <a:ext cx="3143250" cy="209550"/>
+          </a:xfrm>
+          <a:prstGeom xmlns:a="http://schemas.openxmlformats.org/drawingml/2006/main" prst="rect">
+            <a:avLst/>
+          </a:prstGeom>
+          <a:noFill xmlns:a="http://schemas.openxmlformats.org/drawingml/2006/main"/>
+          <a:ln xmlns:a="http://schemas.openxmlformats.org/drawingml/2006/main" w="0">
+            <a:noFill/>
+            <a:prstDash val="solid"/>
+          </a:ln>
+        </p:spPr>
+        <p:txBody>
+          <a:bodyPr xmlns:a="http://schemas.openxmlformats.org/drawingml/2006/main" wrap="square" lIns="0" tIns="0" rIns="0" bIns="0" anchor="t">
+            <a:noAutofit/>
+          </a:bodyPr>
+          <a:lstStyle xmlns:a="http://schemas.openxmlformats.org/drawingml/2006/main"/>
+          <a:p xmlns:a="http://schemas.openxmlformats.org/drawingml/2006/main">
+            <a:pPr algn="l">
+              <a:lnSpc>
+                <a:spcPct val="115000"/>
+              </a:lnSpc>
+              <a:buNone/>
+              <a:defRPr sz="1275" b="1">
+                <a:solidFill>
+                  <a:srgbClr val="15221D"/>
+                </a:solidFill>
+                <a:latin typeface="PingFang SC"/>
+                <a:ea typeface="PingFang SC"/>
+                <a:cs typeface="PingFang SC"/>
+              </a:defRPr>
+            </a:pPr>
+            <a:r>
+              <a:rPr sz="1275" b="1">
+                <a:solidFill>
+                  <a:srgbClr val="15221D"/>
+                </a:solidFill>
+                <a:latin typeface="PingFang SC"/>
+                <a:ea typeface="PingFang SC"/>
+                <a:cs typeface="PingFang SC"/>
+              </a:rPr>
+              <a:t>状态与学习上下文</a:t>
+            </a:r>
+          </a:p>
+        </p:txBody>
+      </p:sp>
+      <p:sp>
+        <p:nvSpPr>
+          <p:cNvPr id="86" name="">
+            <a:extLst xmlns:a="http://schemas.openxmlformats.org/drawingml/2006/main">
+              <a:ext uri="{FF2B5EF4-FFF2-40B4-BE49-F238E27FC236}">
+                <a16:creationId xmlns:a16="http://schemas.microsoft.com/office/drawing/2014/main" id="{5D538F10-C561-42B1-9415-BAE8E698E069}"/>
+              </a:ext>
+            </a:extLst>
+          </p:cNvPr>
+          <p:cNvSpPr>
+            <a:spLocks xmlns:a="http://schemas.openxmlformats.org/drawingml/2006/main" noGrp="1"/>
+          </p:cNvSpPr>
+          <p:nvPr/>
+        </p:nvSpPr>
+        <p:spPr>
+          <a:xfrm xmlns:a="http://schemas.openxmlformats.org/drawingml/2006/main">
+            <a:off x="800100" y="2924175"/>
+            <a:ext cx="3257550" cy="323850"/>
+          </a:xfrm>
+          <a:prstGeom xmlns:a="http://schemas.openxmlformats.org/drawingml/2006/main" prst="rect">
+            <a:avLst/>
+          </a:prstGeom>
+          <a:noFill xmlns:a="http://schemas.openxmlformats.org/drawingml/2006/main"/>
+          <a:ln xmlns:a="http://schemas.openxmlformats.org/drawingml/2006/main" w="0">
+            <a:noFill/>
+            <a:prstDash val="solid"/>
+          </a:ln>
+        </p:spPr>
+        <p:txBody>
+          <a:bodyPr xmlns:a="http://schemas.openxmlformats.org/drawingml/2006/main" wrap="square" lIns="0" tIns="0" rIns="0" bIns="0" anchor="t">
+            <a:noAutofit/>
+          </a:bodyPr>
+          <a:lstStyle xmlns:a="http://schemas.openxmlformats.org/drawingml/2006/main"/>
+          <a:p xmlns:a="http://schemas.openxmlformats.org/drawingml/2006/main">
+            <a:pPr algn="l">
+              <a:lnSpc>
+                <a:spcPct val="108000"/>
+              </a:lnSpc>
+              <a:buNone/>
+              <a:defRPr sz="840" b="0">
+                <a:solidFill>
+                  <a:srgbClr val="087A53"/>
+                </a:solidFill>
+                <a:latin typeface="SFMono-Regular"/>
+                <a:ea typeface="SFMono-Regular"/>
+                <a:cs typeface="SFMono-Regular"/>
+              </a:defRPr>
+            </a:pPr>
+            <a:r>
+              <a:rPr sz="840" b="0">
+                <a:solidFill>
+                  <a:srgbClr val="087A53"/>
+                </a:solidFill>
+                <a:latin typeface="SFMono-Regular"/>
+                <a:ea typeface="SFMono-Regular"/>
+                <a:cs typeface="SFMono-Regular"/>
+              </a:rPr>
+              <a:t>read_learner_context · read_learning_workspace</a:t>
+            </a:r>
+          </a:p>
+          <a:p xmlns:a="http://schemas.openxmlformats.org/drawingml/2006/main">
+            <a:pPr algn="l">
+              <a:lnSpc>
+                <a:spcPct val="108000"/>
+              </a:lnSpc>
+              <a:buNone/>
+              <a:defRPr sz="840" b="0">
+                <a:solidFill>
+                  <a:srgbClr val="087A53"/>
+                </a:solidFill>
+                <a:latin typeface="SFMono-Regular"/>
+                <a:ea typeface="SFMono-Regular"/>
+                <a:cs typeface="SFMono-Regular"/>
+              </a:defRPr>
+            </a:pPr>
+            <a:r>
+              <a:rPr sz="840" b="0">
+                <a:solidFill>
+                  <a:srgbClr val="087A53"/>
+                </a:solidFill>
+                <a:latin typeface="SFMono-Regular"/>
+                <a:ea typeface="SFMono-Regular"/>
+                <a:cs typeface="SFMono-Regular"/>
+              </a:rPr>
+              <a:t>read_review_context · read_learning_path</a:t>
+            </a:r>
+          </a:p>
+        </p:txBody>
+      </p:sp>
+      <p:sp>
+        <p:nvSpPr>
+          <p:cNvPr id="87" name="">
+            <a:extLst xmlns:a="http://schemas.openxmlformats.org/drawingml/2006/main">
+              <a:ext uri="{FF2B5EF4-FFF2-40B4-BE49-F238E27FC236}">
+                <a16:creationId xmlns:a16="http://schemas.microsoft.com/office/drawing/2014/main" id="{83AB1BEF-417B-4F4D-9F9E-A9B4D84E0843}"/>
+              </a:ext>
+            </a:extLst>
+          </p:cNvPr>
+          <p:cNvSpPr>
+            <a:spLocks xmlns:a="http://schemas.openxmlformats.org/drawingml/2006/main" noGrp="1"/>
+          </p:cNvSpPr>
+          <p:nvPr/>
+        </p:nvSpPr>
+        <p:spPr>
+          <a:xfrm xmlns:a="http://schemas.openxmlformats.org/drawingml/2006/main">
+            <a:off x="4343400" y="2705100"/>
+            <a:ext cx="1924050" cy="495300"/>
+          </a:xfrm>
+          <a:prstGeom xmlns:a="http://schemas.openxmlformats.org/drawingml/2006/main" prst="rect">
+            <a:avLst/>
+          </a:prstGeom>
+          <a:noFill xmlns:a="http://schemas.openxmlformats.org/drawingml/2006/main"/>
+          <a:ln xmlns:a="http://schemas.openxmlformats.org/drawingml/2006/main" w="0">
+            <a:noFill/>
+            <a:prstDash val="solid"/>
+          </a:ln>
+        </p:spPr>
+        <p:txBody>
+          <a:bodyPr xmlns:a="http://schemas.openxmlformats.org/drawingml/2006/main" wrap="square" lIns="0" tIns="0" rIns="0" bIns="0" anchor="t">
+            <a:noAutofit/>
+          </a:bodyPr>
+          <a:lstStyle xmlns:a="http://schemas.openxmlformats.org/drawingml/2006/main"/>
+          <a:p xmlns:a="http://schemas.openxmlformats.org/drawingml/2006/main">
+            <a:pPr algn="l">
+              <a:lnSpc>
+                <a:spcPct val="120000"/>
+              </a:lnSpc>
+              <a:buNone/>
+              <a:defRPr sz="1065" b="0">
+                <a:solidFill>
+                  <a:srgbClr val="6D7C73"/>
+                </a:solidFill>
+                <a:latin typeface="PingFang SC"/>
+                <a:ea typeface="PingFang SC"/>
+                <a:cs typeface="PingFang SC"/>
+              </a:defRPr>
+            </a:pPr>
+            <a:r>
+              <a:rPr sz="1065" b="0">
+                <a:solidFill>
+                  <a:srgbClr val="6D7C73"/>
+                </a:solidFill>
+                <a:latin typeface="PingFang SC"/>
+                <a:ea typeface="PingFang SC"/>
+                <a:cs typeface="PingFang SC"/>
+              </a:rPr>
+              <a:t>每轮先读；</a:t>
+            </a:r>
+          </a:p>
+          <a:p xmlns:a="http://schemas.openxmlformats.org/drawingml/2006/main">
+            <a:pPr algn="l">
+              <a:lnSpc>
+                <a:spcPct val="120000"/>
+              </a:lnSpc>
+              <a:buNone/>
+              <a:defRPr sz="1065" b="0">
+                <a:solidFill>
+                  <a:srgbClr val="6D7C73"/>
+                </a:solidFill>
+                <a:latin typeface="PingFang SC"/>
+                <a:ea typeface="PingFang SC"/>
+                <a:cs typeface="PingFang SC"/>
+              </a:defRPr>
+            </a:pPr>
+            <a:r>
+              <a:rPr sz="1065" b="0">
+                <a:solidFill>
+                  <a:srgbClr val="6D7C73"/>
+                </a:solidFill>
+                <a:latin typeface="PingFang SC"/>
+                <a:ea typeface="PingFang SC"/>
+                <a:cs typeface="PingFang SC"/>
+              </a:rPr>
+              <a:t>learn / plan 追加工作区观察</a:t>
+            </a:r>
+          </a:p>
+        </p:txBody>
+      </p:sp>
+      <p:sp>
+        <p:nvSpPr>
+          <p:cNvPr id="88" name="">
+            <a:extLst xmlns:a="http://schemas.openxmlformats.org/drawingml/2006/main">
+              <a:ext uri="{FF2B5EF4-FFF2-40B4-BE49-F238E27FC236}">
+                <a16:creationId xmlns:a16="http://schemas.microsoft.com/office/drawing/2014/main" id="{C13740DC-61C0-454C-B6E4-78519055915C}"/>
+              </a:ext>
+            </a:extLst>
+          </p:cNvPr>
+          <p:cNvSpPr>
+            <a:spLocks xmlns:a="http://schemas.openxmlformats.org/drawingml/2006/main" noGrp="1"/>
+          </p:cNvSpPr>
+          <p:nvPr/>
+        </p:nvSpPr>
+        <p:spPr>
+          <a:xfrm xmlns:a="http://schemas.openxmlformats.org/drawingml/2006/main">
+            <a:off x="6534150" y="2705100"/>
+            <a:ext cx="3162300" cy="495300"/>
+          </a:xfrm>
+          <a:prstGeom xmlns:a="http://schemas.openxmlformats.org/drawingml/2006/main" prst="rect">
+            <a:avLst/>
+          </a:prstGeom>
+          <a:noFill xmlns:a="http://schemas.openxmlformats.org/drawingml/2006/main"/>
+          <a:ln xmlns:a="http://schemas.openxmlformats.org/drawingml/2006/main" w="0">
+            <a:noFill/>
+            <a:prstDash val="solid"/>
+          </a:ln>
+        </p:spPr>
+        <p:txBody>
+          <a:bodyPr xmlns:a="http://schemas.openxmlformats.org/drawingml/2006/main" wrap="square" lIns="0" tIns="0" rIns="0" bIns="0" anchor="t">
+            <a:noAutofit/>
+          </a:bodyPr>
+          <a:lstStyle xmlns:a="http://schemas.openxmlformats.org/drawingml/2006/main"/>
+          <a:p xmlns:a="http://schemas.openxmlformats.org/drawingml/2006/main">
+            <a:pPr algn="l">
+              <a:lnSpc>
+                <a:spcPct val="116000"/>
+              </a:lnSpc>
+              <a:buNone/>
+              <a:defRPr sz="1058" b="0">
+                <a:solidFill>
+                  <a:srgbClr val="15221D"/>
+                </a:solidFill>
+                <a:latin typeface="SFMono-Regular"/>
+                <a:ea typeface="SFMono-Regular"/>
+                <a:cs typeface="SFMono-Regular"/>
+              </a:defRPr>
+            </a:pPr>
+            <a:r>
+              <a:rPr sz="1058" b="0">
+                <a:solidFill>
+                  <a:srgbClr val="15221D"/>
+                </a:solidFill>
+                <a:latin typeface="SFMono-Regular"/>
+                <a:ea typeface="SFMono-Regular"/>
+                <a:cs typeface="SFMono-Regular"/>
+              </a:rPr>
+              <a:t>KernelHead · Memory Graph · ContextPacket</a:t>
+            </a:r>
+          </a:p>
+          <a:p xmlns:a="http://schemas.openxmlformats.org/drawingml/2006/main">
+            <a:pPr algn="l">
+              <a:lnSpc>
+                <a:spcPct val="116000"/>
+              </a:lnSpc>
+              <a:buNone/>
+              <a:defRPr sz="1058" b="0">
+                <a:solidFill>
+                  <a:srgbClr val="15221D"/>
+                </a:solidFill>
+                <a:latin typeface="SFMono-Regular"/>
+                <a:ea typeface="SFMono-Regular"/>
+                <a:cs typeface="SFMono-Regular"/>
+              </a:defRPr>
+            </a:pPr>
+            <a:r>
+              <a:rPr sz="1058" b="0">
+                <a:solidFill>
+                  <a:srgbClr val="15221D"/>
+                </a:solidFill>
+                <a:latin typeface="SFMono-Regular"/>
+                <a:ea typeface="SFMono-Regular"/>
+                <a:cs typeface="SFMono-Regular"/>
+              </a:rPr>
+              <a:t>LearningTask · ReviewSchedule · DAG / Plan</a:t>
+            </a:r>
+          </a:p>
+        </p:txBody>
+      </p:sp>
+      <p:sp>
+        <p:nvSpPr>
+          <p:cNvPr id="89" name="">
+            <a:extLst xmlns:a="http://schemas.openxmlformats.org/drawingml/2006/main">
+              <a:ext uri="{FF2B5EF4-FFF2-40B4-BE49-F238E27FC236}">
+                <a16:creationId xmlns:a16="http://schemas.microsoft.com/office/drawing/2014/main" id="{A75E9563-5D35-450F-BB22-272AA10AAA0F}"/>
+              </a:ext>
+            </a:extLst>
+          </p:cNvPr>
+          <p:cNvSpPr>
+            <a:spLocks xmlns:a="http://schemas.openxmlformats.org/drawingml/2006/main" noGrp="1"/>
+          </p:cNvSpPr>
+          <p:nvPr/>
+        </p:nvSpPr>
+        <p:spPr>
+          <a:xfrm xmlns:a="http://schemas.openxmlformats.org/drawingml/2006/main">
+            <a:off x="9963150" y="2705100"/>
+            <a:ext cx="1428750" cy="495300"/>
+          </a:xfrm>
+          <a:prstGeom xmlns:a="http://schemas.openxmlformats.org/drawingml/2006/main" prst="rect">
+            <a:avLst/>
+          </a:prstGeom>
+          <a:noFill xmlns:a="http://schemas.openxmlformats.org/drawingml/2006/main"/>
+          <a:ln xmlns:a="http://schemas.openxmlformats.org/drawingml/2006/main" w="0">
+            <a:noFill/>
+            <a:prstDash val="solid"/>
+          </a:ln>
+        </p:spPr>
+        <p:txBody>
+          <a:bodyPr xmlns:a="http://schemas.openxmlformats.org/drawingml/2006/main" wrap="square" lIns="0" tIns="0" rIns="0" bIns="0" anchor="t">
+            <a:noAutofit/>
+          </a:bodyPr>
+          <a:lstStyle xmlns:a="http://schemas.openxmlformats.org/drawingml/2006/main"/>
+          <a:p xmlns:a="http://schemas.openxmlformats.org/drawingml/2006/main">
+            <a:pPr algn="l">
+              <a:lnSpc>
+                <a:spcPct val="120000"/>
+              </a:lnSpc>
+              <a:buNone/>
+              <a:defRPr sz="1065" b="1">
+                <a:solidFill>
+                  <a:srgbClr val="087A53"/>
+                </a:solidFill>
+                <a:latin typeface="PingFang SC"/>
+                <a:ea typeface="PingFang SC"/>
+                <a:cs typeface="PingFang SC"/>
+              </a:defRPr>
+            </a:pPr>
+            <a:r>
+              <a:rPr sz="1065" b="1">
+                <a:solidFill>
+                  <a:srgbClr val="087A53"/>
+                </a:solidFill>
+                <a:latin typeface="PingFang SC"/>
+                <a:ea typeface="PingFang SC"/>
+                <a:cs typeface="PingFang SC"/>
+              </a:rPr>
+              <a:t>对话 / 任务</a:t>
+            </a:r>
+          </a:p>
+          <a:p xmlns:a="http://schemas.openxmlformats.org/drawingml/2006/main">
+            <a:pPr algn="l">
+              <a:lnSpc>
+                <a:spcPct val="120000"/>
+              </a:lnSpc>
+              <a:buNone/>
+              <a:defRPr sz="1065" b="1">
+                <a:solidFill>
+                  <a:srgbClr val="087A53"/>
+                </a:solidFill>
+                <a:latin typeface="PingFang SC"/>
+                <a:ea typeface="PingFang SC"/>
+                <a:cs typeface="PingFang SC"/>
+              </a:defRPr>
+            </a:pPr>
+            <a:r>
+              <a:rPr sz="1065" b="1">
+                <a:solidFill>
+                  <a:srgbClr val="087A53"/>
+                </a:solidFill>
+                <a:latin typeface="PingFang SC"/>
+                <a:ea typeface="PingFang SC"/>
+                <a:cs typeface="PingFang SC"/>
+              </a:rPr>
+              <a:t>复习 / 路径</a:t>
+            </a:r>
+          </a:p>
+        </p:txBody>
+      </p:sp>
+      <p:sp>
+        <p:nvSpPr>
+          <p:cNvPr id="90" name="">
+            <a:extLst xmlns:a="http://schemas.openxmlformats.org/drawingml/2006/main">
+              <a:ext uri="{FF2B5EF4-FFF2-40B4-BE49-F238E27FC236}">
+                <a16:creationId xmlns:a16="http://schemas.microsoft.com/office/drawing/2014/main" id="{BFA439D3-661A-4359-BFA4-16D463D5822D}"/>
+              </a:ext>
+            </a:extLst>
+          </p:cNvPr>
+          <p:cNvSpPr>
+            <a:spLocks xmlns:a="http://schemas.openxmlformats.org/drawingml/2006/main" noGrp="1"/>
+          </p:cNvSpPr>
+          <p:nvPr/>
+        </p:nvSpPr>
+        <p:spPr>
+          <a:xfrm xmlns:a="http://schemas.openxmlformats.org/drawingml/2006/main">
+            <a:off x="647700" y="3276600"/>
+            <a:ext cx="10896600" cy="9525"/>
+          </a:xfrm>
+          <a:prstGeom xmlns:a="http://schemas.openxmlformats.org/drawingml/2006/main" prst="line">
+            <a:avLst/>
+          </a:prstGeom>
+          <a:noFill xmlns:a="http://schemas.openxmlformats.org/drawingml/2006/main"/>
+          <a:ln xmlns:a="http://schemas.openxmlformats.org/drawingml/2006/main" w="7620">
+            <a:solidFill>
+              <a:srgbClr val="D9E2DC"/>
+            </a:solidFill>
+            <a:prstDash val="solid"/>
+          </a:ln>
+        </p:spPr>
+      </p:sp>
+      <p:sp>
+        <p:nvSpPr>
+          <p:cNvPr id="91" name="">
+            <a:extLst xmlns:a="http://schemas.openxmlformats.org/drawingml/2006/main">
+              <a:ext uri="{FF2B5EF4-FFF2-40B4-BE49-F238E27FC236}">
+                <a16:creationId xmlns:a16="http://schemas.microsoft.com/office/drawing/2014/main" id="{869F6D07-9A82-4BE6-9B52-B15B5EDACE4F}"/>
+              </a:ext>
+            </a:extLst>
+          </p:cNvPr>
+          <p:cNvSpPr>
+            <a:spLocks xmlns:a="http://schemas.openxmlformats.org/drawingml/2006/main" noGrp="1"/>
+          </p:cNvSpPr>
+          <p:nvPr/>
+        </p:nvSpPr>
+        <p:spPr>
+          <a:xfrm xmlns:a="http://schemas.openxmlformats.org/drawingml/2006/main">
+            <a:off x="647700" y="3276600"/>
+            <a:ext cx="10896600" cy="609600"/>
+          </a:xfrm>
+          <a:prstGeom xmlns:a="http://schemas.openxmlformats.org/drawingml/2006/main" prst="rect">
+            <a:avLst/>
+          </a:prstGeom>
+          <a:noFill xmlns:a="http://schemas.openxmlformats.org/drawingml/2006/main"/>
+          <a:ln xmlns:a="http://schemas.openxmlformats.org/drawingml/2006/main" w="0">
+            <a:noFill/>
+            <a:prstDash val="solid"/>
+          </a:ln>
+        </p:spPr>
+      </p:sp>
+      <p:sp>
+        <p:nvSpPr>
+          <p:cNvPr id="92" name="">
+            <a:extLst xmlns:a="http://schemas.openxmlformats.org/drawingml/2006/main">
+              <a:ext uri="{FF2B5EF4-FFF2-40B4-BE49-F238E27FC236}">
+                <a16:creationId xmlns:a16="http://schemas.microsoft.com/office/drawing/2014/main" id="{9ED51B8C-E432-4171-BB83-E21BB63DE035}"/>
+              </a:ext>
+            </a:extLst>
+          </p:cNvPr>
+          <p:cNvSpPr>
+            <a:spLocks xmlns:a="http://schemas.openxmlformats.org/drawingml/2006/main" noGrp="1"/>
+          </p:cNvSpPr>
+          <p:nvPr/>
+        </p:nvSpPr>
+        <p:spPr>
+          <a:xfrm xmlns:a="http://schemas.openxmlformats.org/drawingml/2006/main">
+            <a:off x="647700" y="3276600"/>
+            <a:ext cx="47625" cy="609600"/>
+          </a:xfrm>
+          <a:prstGeom xmlns:a="http://schemas.openxmlformats.org/drawingml/2006/main" prst="rect">
+            <a:avLst/>
+          </a:prstGeom>
+          <a:solidFill xmlns:a="http://schemas.openxmlformats.org/drawingml/2006/main">
+            <a:srgbClr val="9B6D12"/>
+          </a:solidFill>
+          <a:ln xmlns:a="http://schemas.openxmlformats.org/drawingml/2006/main" w="0">
             <a:solidFill>
               <a:srgbClr val="9B6D12"/>
             </a:solidFill>
             <a:prstDash val="solid"/>
-            <a:headEnd type="none" w="med" len="med"/>
-            <a:tailEnd type="arrow" w="med" len="med"/>
-          </a:ln>
-        </p:spPr>
-      </p:cxnSp>
-      <p:sp>
-        <p:nvSpPr>
-          <p:cNvPr id="17" name="state-learn">
-            <a:extLst xmlns:a="http://schemas.openxmlformats.org/drawingml/2006/main">
-              <a:ext uri="{FF2B5EF4-FFF2-40B4-BE49-F238E27FC236}">
-                <a16:creationId xmlns:a16="http://schemas.microsoft.com/office/drawing/2014/main" id="{20FE89EB-25AA-4965-83FF-1A986240912A}"/>
-              </a:ext>
-            </a:extLst>
-          </p:cNvPr>
-          <p:cNvSpPr>
-            <a:spLocks xmlns:a="http://schemas.openxmlformats.org/drawingml/2006/main" noGrp="1"/>
-          </p:cNvSpPr>
-          <p:nvPr/>
-        </p:nvSpPr>
-        <p:spPr>
-          <a:xfrm xmlns:a="http://schemas.openxmlformats.org/drawingml/2006/main">
-            <a:off x="4286250" y="2352675"/>
-            <a:ext cx="3143250" cy="742950"/>
-          </a:xfrm>
-          <a:prstGeom xmlns:a="http://schemas.openxmlformats.org/drawingml/2006/main" prst="roundRect">
-            <a:avLst>
-              <a:gd name="adj" fmla="val 20513"/>
-            </a:avLst>
+          </a:ln>
+        </p:spPr>
+      </p:sp>
+      <p:sp>
+        <p:nvSpPr>
+          <p:cNvPr id="93" name="">
+            <a:extLst xmlns:a="http://schemas.openxmlformats.org/drawingml/2006/main">
+              <a:ext uri="{FF2B5EF4-FFF2-40B4-BE49-F238E27FC236}">
+                <a16:creationId xmlns:a16="http://schemas.microsoft.com/office/drawing/2014/main" id="{C7B7068B-5B6D-4DB1-8E08-395C090C9100}"/>
+              </a:ext>
+            </a:extLst>
+          </p:cNvPr>
+          <p:cNvSpPr>
+            <a:spLocks xmlns:a="http://schemas.openxmlformats.org/drawingml/2006/main" noGrp="1"/>
+          </p:cNvSpPr>
+          <p:nvPr/>
+        </p:nvSpPr>
+        <p:spPr>
+          <a:xfrm xmlns:a="http://schemas.openxmlformats.org/drawingml/2006/main">
+            <a:off x="800100" y="3362325"/>
+            <a:ext cx="3143250" cy="209550"/>
+          </a:xfrm>
+          <a:prstGeom xmlns:a="http://schemas.openxmlformats.org/drawingml/2006/main" prst="rect">
+            <a:avLst/>
+          </a:prstGeom>
+          <a:noFill xmlns:a="http://schemas.openxmlformats.org/drawingml/2006/main"/>
+          <a:ln xmlns:a="http://schemas.openxmlformats.org/drawingml/2006/main" w="0">
+            <a:noFill/>
+            <a:prstDash val="solid"/>
+          </a:ln>
+        </p:spPr>
+        <p:txBody>
+          <a:bodyPr xmlns:a="http://schemas.openxmlformats.org/drawingml/2006/main" wrap="square" lIns="0" tIns="0" rIns="0" bIns="0" anchor="t">
+            <a:noAutofit/>
+          </a:bodyPr>
+          <a:lstStyle xmlns:a="http://schemas.openxmlformats.org/drawingml/2006/main"/>
+          <a:p xmlns:a="http://schemas.openxmlformats.org/drawingml/2006/main">
+            <a:pPr algn="l">
+              <a:lnSpc>
+                <a:spcPct val="115000"/>
+              </a:lnSpc>
+              <a:buNone/>
+              <a:defRPr sz="1275" b="1">
+                <a:solidFill>
+                  <a:srgbClr val="15221D"/>
+                </a:solidFill>
+                <a:latin typeface="PingFang SC"/>
+                <a:ea typeface="PingFang SC"/>
+                <a:cs typeface="PingFang SC"/>
+              </a:defRPr>
+            </a:pPr>
+            <a:r>
+              <a:rPr sz="1275" b="1">
+                <a:solidFill>
+                  <a:srgbClr val="15221D"/>
+                </a:solidFill>
+                <a:latin typeface="PingFang SC"/>
+                <a:ea typeface="PingFang SC"/>
+                <a:cs typeface="PingFang SC"/>
+              </a:rPr>
+              <a:t>资料与联网检索</a:t>
+            </a:r>
+          </a:p>
+        </p:txBody>
+      </p:sp>
+      <p:sp>
+        <p:nvSpPr>
+          <p:cNvPr id="94" name="">
+            <a:extLst xmlns:a="http://schemas.openxmlformats.org/drawingml/2006/main">
+              <a:ext uri="{FF2B5EF4-FFF2-40B4-BE49-F238E27FC236}">
+                <a16:creationId xmlns:a16="http://schemas.microsoft.com/office/drawing/2014/main" id="{7D7FDE6F-8208-4B9F-9208-69AD6622DA0B}"/>
+              </a:ext>
+            </a:extLst>
+          </p:cNvPr>
+          <p:cNvSpPr>
+            <a:spLocks xmlns:a="http://schemas.openxmlformats.org/drawingml/2006/main" noGrp="1"/>
+          </p:cNvSpPr>
+          <p:nvPr/>
+        </p:nvSpPr>
+        <p:spPr>
+          <a:xfrm xmlns:a="http://schemas.openxmlformats.org/drawingml/2006/main">
+            <a:off x="800100" y="3590925"/>
+            <a:ext cx="3257550" cy="266700"/>
+          </a:xfrm>
+          <a:prstGeom xmlns:a="http://schemas.openxmlformats.org/drawingml/2006/main" prst="rect">
+            <a:avLst/>
+          </a:prstGeom>
+          <a:noFill xmlns:a="http://schemas.openxmlformats.org/drawingml/2006/main"/>
+          <a:ln xmlns:a="http://schemas.openxmlformats.org/drawingml/2006/main" w="0">
+            <a:noFill/>
+            <a:prstDash val="solid"/>
+          </a:ln>
+        </p:spPr>
+        <p:txBody>
+          <a:bodyPr xmlns:a="http://schemas.openxmlformats.org/drawingml/2006/main" wrap="square" lIns="0" tIns="0" rIns="0" bIns="0" anchor="t">
+            <a:noAutofit/>
+          </a:bodyPr>
+          <a:lstStyle xmlns:a="http://schemas.openxmlformats.org/drawingml/2006/main"/>
+          <a:p xmlns:a="http://schemas.openxmlformats.org/drawingml/2006/main">
+            <a:pPr algn="l">
+              <a:lnSpc>
+                <a:spcPct val="108000"/>
+              </a:lnSpc>
+              <a:buNone/>
+              <a:defRPr sz="840" b="0">
+                <a:solidFill>
+                  <a:srgbClr val="9B6D12"/>
+                </a:solidFill>
+                <a:latin typeface="SFMono-Regular"/>
+                <a:ea typeface="SFMono-Regular"/>
+                <a:cs typeface="SFMono-Regular"/>
+              </a:defRPr>
+            </a:pPr>
+            <a:r>
+              <a:rPr sz="840" b="0">
+                <a:solidFill>
+                  <a:srgbClr val="9B6D12"/>
+                </a:solidFill>
+                <a:latin typeface="SFMono-Regular"/>
+                <a:ea typeface="SFMono-Regular"/>
+                <a:cs typeface="SFMono-Regular"/>
+              </a:rPr>
+              <a:t>read_domain_knowledge</a:t>
+            </a:r>
+          </a:p>
+          <a:p xmlns:a="http://schemas.openxmlformats.org/drawingml/2006/main">
+            <a:pPr algn="l">
+              <a:lnSpc>
+                <a:spcPct val="108000"/>
+              </a:lnSpc>
+              <a:buNone/>
+              <a:defRPr sz="840" b="0">
+                <a:solidFill>
+                  <a:srgbClr val="9B6D12"/>
+                </a:solidFill>
+                <a:latin typeface="SFMono-Regular"/>
+                <a:ea typeface="SFMono-Regular"/>
+                <a:cs typeface="SFMono-Regular"/>
+              </a:defRPr>
+            </a:pPr>
+            <a:r>
+              <a:rPr sz="840" b="0">
+                <a:solidFill>
+                  <a:srgbClr val="9B6D12"/>
+                </a:solidFill>
+                <a:latin typeface="SFMono-Regular"/>
+                <a:ea typeface="SFMono-Regular"/>
+                <a:cs typeface="SFMono-Regular"/>
+              </a:rPr>
+              <a:t>search_computer_knowledge</a:t>
+            </a:r>
+          </a:p>
+        </p:txBody>
+      </p:sp>
+      <p:sp>
+        <p:nvSpPr>
+          <p:cNvPr id="95" name="">
+            <a:extLst xmlns:a="http://schemas.openxmlformats.org/drawingml/2006/main">
+              <a:ext uri="{FF2B5EF4-FFF2-40B4-BE49-F238E27FC236}">
+                <a16:creationId xmlns:a16="http://schemas.microsoft.com/office/drawing/2014/main" id="{0FC1AB8F-7E57-4281-B693-664B8C89135A}"/>
+              </a:ext>
+            </a:extLst>
+          </p:cNvPr>
+          <p:cNvSpPr>
+            <a:spLocks xmlns:a="http://schemas.openxmlformats.org/drawingml/2006/main" noGrp="1"/>
+          </p:cNvSpPr>
+          <p:nvPr/>
+        </p:nvSpPr>
+        <p:spPr>
+          <a:xfrm xmlns:a="http://schemas.openxmlformats.org/drawingml/2006/main">
+            <a:off x="4343400" y="3371850"/>
+            <a:ext cx="1924050" cy="438150"/>
+          </a:xfrm>
+          <a:prstGeom xmlns:a="http://schemas.openxmlformats.org/drawingml/2006/main" prst="rect">
+            <a:avLst/>
+          </a:prstGeom>
+          <a:noFill xmlns:a="http://schemas.openxmlformats.org/drawingml/2006/main"/>
+          <a:ln xmlns:a="http://schemas.openxmlformats.org/drawingml/2006/main" w="0">
+            <a:noFill/>
+            <a:prstDash val="solid"/>
+          </a:ln>
+        </p:spPr>
+        <p:txBody>
+          <a:bodyPr xmlns:a="http://schemas.openxmlformats.org/drawingml/2006/main" wrap="square" lIns="0" tIns="0" rIns="0" bIns="0" anchor="t">
+            <a:noAutofit/>
+          </a:bodyPr>
+          <a:lstStyle xmlns:a="http://schemas.openxmlformats.org/drawingml/2006/main"/>
+          <a:p xmlns:a="http://schemas.openxmlformats.org/drawingml/2006/main">
+            <a:pPr algn="l">
+              <a:lnSpc>
+                <a:spcPct val="120000"/>
+              </a:lnSpc>
+              <a:buNone/>
+              <a:defRPr sz="1065" b="0">
+                <a:solidFill>
+                  <a:srgbClr val="6D7C73"/>
+                </a:solidFill>
+                <a:latin typeface="PingFang SC"/>
+                <a:ea typeface="PingFang SC"/>
+                <a:cs typeface="PingFang SC"/>
+              </a:defRPr>
+            </a:pPr>
+            <a:r>
+              <a:rPr sz="1065" b="0">
+                <a:solidFill>
+                  <a:srgbClr val="6D7C73"/>
+                </a:solidFill>
+                <a:latin typeface="PingFang SC"/>
+                <a:ea typeface="PingFang SC"/>
+                <a:cs typeface="PingFang SC"/>
+              </a:rPr>
+              <a:t>解释、排错；</a:t>
+            </a:r>
+          </a:p>
+          <a:p xmlns:a="http://schemas.openxmlformats.org/drawingml/2006/main">
+            <a:pPr algn="l">
+              <a:lnSpc>
+                <a:spcPct val="120000"/>
+              </a:lnSpc>
+              <a:buNone/>
+              <a:defRPr sz="1065" b="0">
+                <a:solidFill>
+                  <a:srgbClr val="6D7C73"/>
+                </a:solidFill>
+                <a:latin typeface="PingFang SC"/>
+                <a:ea typeface="PingFang SC"/>
+                <a:cs typeface="PingFang SC"/>
+              </a:defRPr>
+            </a:pPr>
+            <a:r>
+              <a:rPr sz="1065" b="0">
+                <a:solidFill>
+                  <a:srgbClr val="6D7C73"/>
+                </a:solidFill>
+                <a:latin typeface="PingFang SC"/>
+                <a:ea typeface="PingFang SC"/>
+                <a:cs typeface="PingFang SC"/>
+              </a:rPr>
+              <a:t>需要来源或路径补缺</a:t>
+            </a:r>
+          </a:p>
+        </p:txBody>
+      </p:sp>
+      <p:sp>
+        <p:nvSpPr>
+          <p:cNvPr id="96" name="">
+            <a:extLst xmlns:a="http://schemas.openxmlformats.org/drawingml/2006/main">
+              <a:ext uri="{FF2B5EF4-FFF2-40B4-BE49-F238E27FC236}">
+                <a16:creationId xmlns:a16="http://schemas.microsoft.com/office/drawing/2014/main" id="{A81E7550-B49D-45E9-88C8-3E8273A53687}"/>
+              </a:ext>
+            </a:extLst>
+          </p:cNvPr>
+          <p:cNvSpPr>
+            <a:spLocks xmlns:a="http://schemas.openxmlformats.org/drawingml/2006/main" noGrp="1"/>
+          </p:cNvSpPr>
+          <p:nvPr/>
+        </p:nvSpPr>
+        <p:spPr>
+          <a:xfrm xmlns:a="http://schemas.openxmlformats.org/drawingml/2006/main">
+            <a:off x="6534150" y="3371850"/>
+            <a:ext cx="3162300" cy="438150"/>
+          </a:xfrm>
+          <a:prstGeom xmlns:a="http://schemas.openxmlformats.org/drawingml/2006/main" prst="rect">
+            <a:avLst/>
+          </a:prstGeom>
+          <a:noFill xmlns:a="http://schemas.openxmlformats.org/drawingml/2006/main"/>
+          <a:ln xmlns:a="http://schemas.openxmlformats.org/drawingml/2006/main" w="0">
+            <a:noFill/>
+            <a:prstDash val="solid"/>
+          </a:ln>
+        </p:spPr>
+        <p:txBody>
+          <a:bodyPr xmlns:a="http://schemas.openxmlformats.org/drawingml/2006/main" wrap="square" lIns="0" tIns="0" rIns="0" bIns="0" anchor="t">
+            <a:noAutofit/>
+          </a:bodyPr>
+          <a:lstStyle xmlns:a="http://schemas.openxmlformats.org/drawingml/2006/main"/>
+          <a:p xmlns:a="http://schemas.openxmlformats.org/drawingml/2006/main">
+            <a:pPr algn="l">
+              <a:lnSpc>
+                <a:spcPct val="116000"/>
+              </a:lnSpc>
+              <a:buNone/>
+              <a:defRPr sz="1058" b="0">
+                <a:solidFill>
+                  <a:srgbClr val="15221D"/>
+                </a:solidFill>
+                <a:latin typeface="SFMono-Regular"/>
+                <a:ea typeface="SFMono-Regular"/>
+                <a:cs typeface="SFMono-Regular"/>
+              </a:defRPr>
+            </a:pPr>
+            <a:r>
+              <a:rPr sz="1058" b="0">
+                <a:solidFill>
+                  <a:srgbClr val="15221D"/>
+                </a:solidFill>
+                <a:latin typeface="SFMono-Regular"/>
+                <a:ea typeface="SFMono-Regular"/>
+                <a:cs typeface="SFMono-Regular"/>
+              </a:rPr>
+              <a:t>Source · Chunk</a:t>
+            </a:r>
+          </a:p>
+          <a:p xmlns:a="http://schemas.openxmlformats.org/drawingml/2006/main">
+            <a:pPr algn="l">
+              <a:lnSpc>
+                <a:spcPct val="116000"/>
+              </a:lnSpc>
+              <a:buNone/>
+              <a:defRPr sz="1058" b="0">
+                <a:solidFill>
+                  <a:srgbClr val="15221D"/>
+                </a:solidFill>
+                <a:latin typeface="SFMono-Regular"/>
+                <a:ea typeface="SFMono-Regular"/>
+                <a:cs typeface="SFMono-Regular"/>
+              </a:defRPr>
+            </a:pPr>
+            <a:r>
+              <a:rPr sz="1058" b="0">
+                <a:solidFill>
+                  <a:srgbClr val="15221D"/>
+                </a:solidFill>
+                <a:latin typeface="SFMono-Regular"/>
+                <a:ea typeface="SFMono-Regular"/>
+                <a:cs typeface="SFMono-Regular"/>
+              </a:rPr>
+              <a:t>Evidence Bundle</a:t>
+            </a:r>
+          </a:p>
+        </p:txBody>
+      </p:sp>
+      <p:sp>
+        <p:nvSpPr>
+          <p:cNvPr id="97" name="">
+            <a:extLst xmlns:a="http://schemas.openxmlformats.org/drawingml/2006/main">
+              <a:ext uri="{FF2B5EF4-FFF2-40B4-BE49-F238E27FC236}">
+                <a16:creationId xmlns:a16="http://schemas.microsoft.com/office/drawing/2014/main" id="{1CCEEF72-D346-42FB-9123-4A15204B57CB}"/>
+              </a:ext>
+            </a:extLst>
+          </p:cNvPr>
+          <p:cNvSpPr>
+            <a:spLocks xmlns:a="http://schemas.openxmlformats.org/drawingml/2006/main" noGrp="1"/>
+          </p:cNvSpPr>
+          <p:nvPr/>
+        </p:nvSpPr>
+        <p:spPr>
+          <a:xfrm xmlns:a="http://schemas.openxmlformats.org/drawingml/2006/main">
+            <a:off x="9963150" y="3371850"/>
+            <a:ext cx="1428750" cy="438150"/>
+          </a:xfrm>
+          <a:prstGeom xmlns:a="http://schemas.openxmlformats.org/drawingml/2006/main" prst="rect">
+            <a:avLst/>
+          </a:prstGeom>
+          <a:noFill xmlns:a="http://schemas.openxmlformats.org/drawingml/2006/main"/>
+          <a:ln xmlns:a="http://schemas.openxmlformats.org/drawingml/2006/main" w="0">
+            <a:noFill/>
+            <a:prstDash val="solid"/>
+          </a:ln>
+        </p:spPr>
+        <p:txBody>
+          <a:bodyPr xmlns:a="http://schemas.openxmlformats.org/drawingml/2006/main" wrap="square" lIns="0" tIns="0" rIns="0" bIns="0" anchor="t">
+            <a:noAutofit/>
+          </a:bodyPr>
+          <a:lstStyle xmlns:a="http://schemas.openxmlformats.org/drawingml/2006/main"/>
+          <a:p xmlns:a="http://schemas.openxmlformats.org/drawingml/2006/main">
+            <a:pPr algn="l">
+              <a:lnSpc>
+                <a:spcPct val="120000"/>
+              </a:lnSpc>
+              <a:buNone/>
+              <a:defRPr sz="1065" b="1">
+                <a:solidFill>
+                  <a:srgbClr val="9B6D12"/>
+                </a:solidFill>
+                <a:latin typeface="PingFang SC"/>
+                <a:ea typeface="PingFang SC"/>
+                <a:cs typeface="PingFang SC"/>
+              </a:defRPr>
+            </a:pPr>
+            <a:r>
+              <a:rPr sz="1065" b="1">
+                <a:solidFill>
+                  <a:srgbClr val="9B6D12"/>
+                </a:solidFill>
+                <a:latin typeface="PingFang SC"/>
+                <a:ea typeface="PingFang SC"/>
+                <a:cs typeface="PingFang SC"/>
+              </a:rPr>
+              <a:t>对话资料</a:t>
+            </a:r>
+          </a:p>
+          <a:p xmlns:a="http://schemas.openxmlformats.org/drawingml/2006/main">
+            <a:pPr algn="l">
+              <a:lnSpc>
+                <a:spcPct val="120000"/>
+              </a:lnSpc>
+              <a:buNone/>
+              <a:defRPr sz="1065" b="1">
+                <a:solidFill>
+                  <a:srgbClr val="9B6D12"/>
+                </a:solidFill>
+                <a:latin typeface="PingFang SC"/>
+                <a:ea typeface="PingFang SC"/>
+                <a:cs typeface="PingFang SC"/>
+              </a:defRPr>
+            </a:pPr>
+            <a:r>
+              <a:rPr sz="1065" b="1">
+                <a:solidFill>
+                  <a:srgbClr val="9B6D12"/>
+                </a:solidFill>
+                <a:latin typeface="PingFang SC"/>
+                <a:ea typeface="PingFang SC"/>
+                <a:cs typeface="PingFang SC"/>
+              </a:rPr>
+              <a:t>文件系统</a:t>
+            </a:r>
+          </a:p>
+        </p:txBody>
+      </p:sp>
+      <p:sp>
+        <p:nvSpPr>
+          <p:cNvPr id="98" name="">
+            <a:extLst xmlns:a="http://schemas.openxmlformats.org/drawingml/2006/main">
+              <a:ext uri="{FF2B5EF4-FFF2-40B4-BE49-F238E27FC236}">
+                <a16:creationId xmlns:a16="http://schemas.microsoft.com/office/drawing/2014/main" id="{9060B15D-69BC-4C38-BA9A-C5BF90EC5B13}"/>
+              </a:ext>
+            </a:extLst>
+          </p:cNvPr>
+          <p:cNvSpPr>
+            <a:spLocks xmlns:a="http://schemas.openxmlformats.org/drawingml/2006/main" noGrp="1"/>
+          </p:cNvSpPr>
+          <p:nvPr/>
+        </p:nvSpPr>
+        <p:spPr>
+          <a:xfrm xmlns:a="http://schemas.openxmlformats.org/drawingml/2006/main">
+            <a:off x="647700" y="3886200"/>
+            <a:ext cx="10896600" cy="9525"/>
+          </a:xfrm>
+          <a:prstGeom xmlns:a="http://schemas.openxmlformats.org/drawingml/2006/main" prst="line">
+            <a:avLst/>
+          </a:prstGeom>
+          <a:noFill xmlns:a="http://schemas.openxmlformats.org/drawingml/2006/main"/>
+          <a:ln xmlns:a="http://schemas.openxmlformats.org/drawingml/2006/main" w="7620">
+            <a:solidFill>
+              <a:srgbClr val="D9E2DC"/>
+            </a:solidFill>
+            <a:prstDash val="solid"/>
+          </a:ln>
+        </p:spPr>
+      </p:sp>
+      <p:sp>
+        <p:nvSpPr>
+          <p:cNvPr id="99" name="">
+            <a:extLst xmlns:a="http://schemas.openxmlformats.org/drawingml/2006/main">
+              <a:ext uri="{FF2B5EF4-FFF2-40B4-BE49-F238E27FC236}">
+                <a16:creationId xmlns:a16="http://schemas.microsoft.com/office/drawing/2014/main" id="{A13573B5-CCBB-44D9-B62B-6EB670385601}"/>
+              </a:ext>
+            </a:extLst>
+          </p:cNvPr>
+          <p:cNvSpPr>
+            <a:spLocks xmlns:a="http://schemas.openxmlformats.org/drawingml/2006/main" noGrp="1"/>
+          </p:cNvSpPr>
+          <p:nvPr/>
+        </p:nvSpPr>
+        <p:spPr>
+          <a:xfrm xmlns:a="http://schemas.openxmlformats.org/drawingml/2006/main">
+            <a:off x="647700" y="3886200"/>
+            <a:ext cx="10896600" cy="571500"/>
+          </a:xfrm>
+          <a:prstGeom xmlns:a="http://schemas.openxmlformats.org/drawingml/2006/main" prst="rect">
+            <a:avLst/>
+          </a:prstGeom>
+          <a:noFill xmlns:a="http://schemas.openxmlformats.org/drawingml/2006/main"/>
+          <a:ln xmlns:a="http://schemas.openxmlformats.org/drawingml/2006/main" w="0">
+            <a:noFill/>
+            <a:prstDash val="solid"/>
+          </a:ln>
+        </p:spPr>
+      </p:sp>
+      <p:sp>
+        <p:nvSpPr>
+          <p:cNvPr id="100" name="">
+            <a:extLst xmlns:a="http://schemas.openxmlformats.org/drawingml/2006/main">
+              <a:ext uri="{FF2B5EF4-FFF2-40B4-BE49-F238E27FC236}">
+                <a16:creationId xmlns:a16="http://schemas.microsoft.com/office/drawing/2014/main" id="{A78DEF93-DDB4-4590-84EB-4ECFE796F46B}"/>
+              </a:ext>
+            </a:extLst>
+          </p:cNvPr>
+          <p:cNvSpPr>
+            <a:spLocks xmlns:a="http://schemas.openxmlformats.org/drawingml/2006/main" noGrp="1"/>
+          </p:cNvSpPr>
+          <p:nvPr/>
+        </p:nvSpPr>
+        <p:spPr>
+          <a:xfrm xmlns:a="http://schemas.openxmlformats.org/drawingml/2006/main">
+            <a:off x="647700" y="3886200"/>
+            <a:ext cx="47625" cy="571500"/>
+          </a:xfrm>
+          <a:prstGeom xmlns:a="http://schemas.openxmlformats.org/drawingml/2006/main" prst="rect">
+            <a:avLst/>
           </a:prstGeom>
           <a:solidFill xmlns:a="http://schemas.openxmlformats.org/drawingml/2006/main">
-            <a:srgbClr val="E7F0FF"/>
+            <a:srgbClr val="167A78"/>
           </a:solidFill>
-          <a:ln xmlns:a="http://schemas.openxmlformats.org/drawingml/2006/main" w="11430">
+          <a:ln xmlns:a="http://schemas.openxmlformats.org/drawingml/2006/main" w="0">
+            <a:solidFill>
+              <a:srgbClr val="167A78"/>
+            </a:solidFill>
+            <a:prstDash val="solid"/>
+          </a:ln>
+        </p:spPr>
+      </p:sp>
+      <p:sp>
+        <p:nvSpPr>
+          <p:cNvPr id="101" name="">
+            <a:extLst xmlns:a="http://schemas.openxmlformats.org/drawingml/2006/main">
+              <a:ext uri="{FF2B5EF4-FFF2-40B4-BE49-F238E27FC236}">
+                <a16:creationId xmlns:a16="http://schemas.microsoft.com/office/drawing/2014/main" id="{E3E1A9CE-A9A8-43F0-A935-FF5B3474ABCB}"/>
+              </a:ext>
+            </a:extLst>
+          </p:cNvPr>
+          <p:cNvSpPr>
+            <a:spLocks xmlns:a="http://schemas.openxmlformats.org/drawingml/2006/main" noGrp="1"/>
+          </p:cNvSpPr>
+          <p:nvPr/>
+        </p:nvSpPr>
+        <p:spPr>
+          <a:xfrm xmlns:a="http://schemas.openxmlformats.org/drawingml/2006/main">
+            <a:off x="800100" y="3971925"/>
+            <a:ext cx="3143250" cy="209550"/>
+          </a:xfrm>
+          <a:prstGeom xmlns:a="http://schemas.openxmlformats.org/drawingml/2006/main" prst="rect">
+            <a:avLst/>
+          </a:prstGeom>
+          <a:noFill xmlns:a="http://schemas.openxmlformats.org/drawingml/2006/main"/>
+          <a:ln xmlns:a="http://schemas.openxmlformats.org/drawingml/2006/main" w="0">
+            <a:noFill/>
+            <a:prstDash val="solid"/>
+          </a:ln>
+        </p:spPr>
+        <p:txBody>
+          <a:bodyPr xmlns:a="http://schemas.openxmlformats.org/drawingml/2006/main" wrap="square" lIns="0" tIns="0" rIns="0" bIns="0" anchor="t">
+            <a:noAutofit/>
+          </a:bodyPr>
+          <a:lstStyle xmlns:a="http://schemas.openxmlformats.org/drawingml/2006/main"/>
+          <a:p xmlns:a="http://schemas.openxmlformats.org/drawingml/2006/main">
+            <a:pPr algn="l">
+              <a:lnSpc>
+                <a:spcPct val="115000"/>
+              </a:lnSpc>
+              <a:buNone/>
+              <a:defRPr sz="1275" b="1">
+                <a:solidFill>
+                  <a:srgbClr val="15221D"/>
+                </a:solidFill>
+                <a:latin typeface="PingFang SC"/>
+                <a:ea typeface="PingFang SC"/>
+                <a:cs typeface="PingFang SC"/>
+              </a:defRPr>
+            </a:pPr>
+            <a:r>
+              <a:rPr sz="1275" b="1">
+                <a:solidFill>
+                  <a:srgbClr val="15221D"/>
+                </a:solidFill>
+                <a:latin typeface="PingFang SC"/>
+                <a:ea typeface="PingFang SC"/>
+                <a:cs typeface="PingFang SC"/>
+              </a:rPr>
+              <a:t>图解与动画</a:t>
+            </a:r>
+          </a:p>
+        </p:txBody>
+      </p:sp>
+      <p:sp>
+        <p:nvSpPr>
+          <p:cNvPr id="102" name="">
+            <a:extLst xmlns:a="http://schemas.openxmlformats.org/drawingml/2006/main">
+              <a:ext uri="{FF2B5EF4-FFF2-40B4-BE49-F238E27FC236}">
+                <a16:creationId xmlns:a16="http://schemas.microsoft.com/office/drawing/2014/main" id="{20799572-EB69-447B-9AA1-E6387E77BC9A}"/>
+              </a:ext>
+            </a:extLst>
+          </p:cNvPr>
+          <p:cNvSpPr>
+            <a:spLocks xmlns:a="http://schemas.openxmlformats.org/drawingml/2006/main" noGrp="1"/>
+          </p:cNvSpPr>
+          <p:nvPr/>
+        </p:nvSpPr>
+        <p:spPr>
+          <a:xfrm xmlns:a="http://schemas.openxmlformats.org/drawingml/2006/main">
+            <a:off x="800100" y="4200525"/>
+            <a:ext cx="3257550" cy="228600"/>
+          </a:xfrm>
+          <a:prstGeom xmlns:a="http://schemas.openxmlformats.org/drawingml/2006/main" prst="rect">
+            <a:avLst/>
+          </a:prstGeom>
+          <a:noFill xmlns:a="http://schemas.openxmlformats.org/drawingml/2006/main"/>
+          <a:ln xmlns:a="http://schemas.openxmlformats.org/drawingml/2006/main" w="0">
+            <a:noFill/>
+            <a:prstDash val="solid"/>
+          </a:ln>
+        </p:spPr>
+        <p:txBody>
+          <a:bodyPr xmlns:a="http://schemas.openxmlformats.org/drawingml/2006/main" wrap="square" lIns="0" tIns="0" rIns="0" bIns="0" anchor="t">
+            <a:noAutofit/>
+          </a:bodyPr>
+          <a:lstStyle xmlns:a="http://schemas.openxmlformats.org/drawingml/2006/main"/>
+          <a:p xmlns:a="http://schemas.openxmlformats.org/drawingml/2006/main">
+            <a:pPr algn="l">
+              <a:lnSpc>
+                <a:spcPct val="108000"/>
+              </a:lnSpc>
+              <a:buNone/>
+              <a:defRPr sz="840" b="0">
+                <a:solidFill>
+                  <a:srgbClr val="167A78"/>
+                </a:solidFill>
+                <a:latin typeface="SFMono-Regular"/>
+                <a:ea typeface="SFMono-Regular"/>
+                <a:cs typeface="SFMono-Regular"/>
+              </a:defRPr>
+            </a:pPr>
+            <a:r>
+              <a:rPr sz="840" b="0">
+                <a:solidFill>
+                  <a:srgbClr val="167A78"/>
+                </a:solidFill>
+                <a:latin typeface="SFMono-Regular"/>
+                <a:ea typeface="SFMono-Regular"/>
+                <a:cs typeface="SFMono-Regular"/>
+              </a:rPr>
+              <a:t>generate_learning_visual</a:t>
+            </a:r>
+          </a:p>
+        </p:txBody>
+      </p:sp>
+      <p:sp>
+        <p:nvSpPr>
+          <p:cNvPr id="103" name="">
+            <a:extLst xmlns:a="http://schemas.openxmlformats.org/drawingml/2006/main">
+              <a:ext uri="{FF2B5EF4-FFF2-40B4-BE49-F238E27FC236}">
+                <a16:creationId xmlns:a16="http://schemas.microsoft.com/office/drawing/2014/main" id="{2454E285-EEF2-4F98-AEED-12BEB4E854EA}"/>
+              </a:ext>
+            </a:extLst>
+          </p:cNvPr>
+          <p:cNvSpPr>
+            <a:spLocks xmlns:a="http://schemas.openxmlformats.org/drawingml/2006/main" noGrp="1"/>
+          </p:cNvSpPr>
+          <p:nvPr/>
+        </p:nvSpPr>
+        <p:spPr>
+          <a:xfrm xmlns:a="http://schemas.openxmlformats.org/drawingml/2006/main">
+            <a:off x="4343400" y="3981450"/>
+            <a:ext cx="1924050" cy="400050"/>
+          </a:xfrm>
+          <a:prstGeom xmlns:a="http://schemas.openxmlformats.org/drawingml/2006/main" prst="rect">
+            <a:avLst/>
+          </a:prstGeom>
+          <a:noFill xmlns:a="http://schemas.openxmlformats.org/drawingml/2006/main"/>
+          <a:ln xmlns:a="http://schemas.openxmlformats.org/drawingml/2006/main" w="0">
+            <a:noFill/>
+            <a:prstDash val="solid"/>
+          </a:ln>
+        </p:spPr>
+        <p:txBody>
+          <a:bodyPr xmlns:a="http://schemas.openxmlformats.org/drawingml/2006/main" wrap="square" lIns="0" tIns="0" rIns="0" bIns="0" anchor="t">
+            <a:noAutofit/>
+          </a:bodyPr>
+          <a:lstStyle xmlns:a="http://schemas.openxmlformats.org/drawingml/2006/main"/>
+          <a:p xmlns:a="http://schemas.openxmlformats.org/drawingml/2006/main">
+            <a:pPr algn="l">
+              <a:lnSpc>
+                <a:spcPct val="120000"/>
+              </a:lnSpc>
+              <a:buNone/>
+              <a:defRPr sz="1065" b="0">
+                <a:solidFill>
+                  <a:srgbClr val="6D7C73"/>
+                </a:solidFill>
+                <a:latin typeface="PingFang SC"/>
+                <a:ea typeface="PingFang SC"/>
+                <a:cs typeface="PingFang SC"/>
+              </a:defRPr>
+            </a:pPr>
+            <a:r>
+              <a:rPr sz="1065" b="0">
+                <a:solidFill>
+                  <a:srgbClr val="6D7C73"/>
+                </a:solidFill>
+                <a:latin typeface="PingFang SC"/>
+                <a:ea typeface="PingFang SC"/>
+                <a:cs typeface="PingFang SC"/>
+              </a:rPr>
+              <a:t>机制、结构、过程</a:t>
+            </a:r>
+          </a:p>
+          <a:p xmlns:a="http://schemas.openxmlformats.org/drawingml/2006/main">
+            <a:pPr algn="l">
+              <a:lnSpc>
+                <a:spcPct val="120000"/>
+              </a:lnSpc>
+              <a:buNone/>
+              <a:defRPr sz="1065" b="0">
+                <a:solidFill>
+                  <a:srgbClr val="6D7C73"/>
+                </a:solidFill>
+                <a:latin typeface="PingFang SC"/>
+                <a:ea typeface="PingFang SC"/>
+                <a:cs typeface="PingFang SC"/>
+              </a:defRPr>
+            </a:pPr>
+            <a:r>
+              <a:rPr sz="1065" b="0">
+                <a:solidFill>
+                  <a:srgbClr val="6D7C73"/>
+                </a:solidFill>
+                <a:latin typeface="PingFang SC"/>
+                <a:ea typeface="PingFang SC"/>
+                <a:cs typeface="PingFang SC"/>
+              </a:rPr>
+              <a:t>不适合只用文字</a:t>
+            </a:r>
+          </a:p>
+        </p:txBody>
+      </p:sp>
+      <p:sp>
+        <p:nvSpPr>
+          <p:cNvPr id="104" name="">
+            <a:extLst xmlns:a="http://schemas.openxmlformats.org/drawingml/2006/main">
+              <a:ext uri="{FF2B5EF4-FFF2-40B4-BE49-F238E27FC236}">
+                <a16:creationId xmlns:a16="http://schemas.microsoft.com/office/drawing/2014/main" id="{DB097F07-54AA-4F35-A566-2BE68F1DA929}"/>
+              </a:ext>
+            </a:extLst>
+          </p:cNvPr>
+          <p:cNvSpPr>
+            <a:spLocks xmlns:a="http://schemas.openxmlformats.org/drawingml/2006/main" noGrp="1"/>
+          </p:cNvSpPr>
+          <p:nvPr/>
+        </p:nvSpPr>
+        <p:spPr>
+          <a:xfrm xmlns:a="http://schemas.openxmlformats.org/drawingml/2006/main">
+            <a:off x="6534150" y="3981450"/>
+            <a:ext cx="3162300" cy="400050"/>
+          </a:xfrm>
+          <a:prstGeom xmlns:a="http://schemas.openxmlformats.org/drawingml/2006/main" prst="rect">
+            <a:avLst/>
+          </a:prstGeom>
+          <a:noFill xmlns:a="http://schemas.openxmlformats.org/drawingml/2006/main"/>
+          <a:ln xmlns:a="http://schemas.openxmlformats.org/drawingml/2006/main" w="0">
+            <a:noFill/>
+            <a:prstDash val="solid"/>
+          </a:ln>
+        </p:spPr>
+        <p:txBody>
+          <a:bodyPr xmlns:a="http://schemas.openxmlformats.org/drawingml/2006/main" wrap="square" lIns="0" tIns="0" rIns="0" bIns="0" anchor="t">
+            <a:noAutofit/>
+          </a:bodyPr>
+          <a:lstStyle xmlns:a="http://schemas.openxmlformats.org/drawingml/2006/main"/>
+          <a:p xmlns:a="http://schemas.openxmlformats.org/drawingml/2006/main">
+            <a:pPr algn="l">
+              <a:lnSpc>
+                <a:spcPct val="116000"/>
+              </a:lnSpc>
+              <a:buNone/>
+              <a:defRPr sz="1058" b="0">
+                <a:solidFill>
+                  <a:srgbClr val="15221D"/>
+                </a:solidFill>
+                <a:latin typeface="SFMono-Regular"/>
+                <a:ea typeface="SFMono-Regular"/>
+                <a:cs typeface="SFMono-Regular"/>
+              </a:defRPr>
+            </a:pPr>
+            <a:r>
+              <a:rPr sz="1058" b="0">
+                <a:solidFill>
+                  <a:srgbClr val="15221D"/>
+                </a:solidFill>
+                <a:latin typeface="SFMono-Regular"/>
+                <a:ea typeface="SFMono-Regular"/>
+                <a:cs typeface="SFMono-Regular"/>
+              </a:rPr>
+              <a:t>validated SVG · frames</a:t>
+            </a:r>
+          </a:p>
+          <a:p xmlns:a="http://schemas.openxmlformats.org/drawingml/2006/main">
+            <a:pPr algn="l">
+              <a:lnSpc>
+                <a:spcPct val="116000"/>
+              </a:lnSpc>
+              <a:buNone/>
+              <a:defRPr sz="1058" b="0">
+                <a:solidFill>
+                  <a:srgbClr val="15221D"/>
+                </a:solidFill>
+                <a:latin typeface="SFMono-Regular"/>
+                <a:ea typeface="SFMono-Regular"/>
+                <a:cs typeface="SFMono-Regular"/>
+              </a:defRPr>
+            </a:pPr>
+            <a:r>
+              <a:rPr sz="1058" b="0">
+                <a:solidFill>
+                  <a:srgbClr val="15221D"/>
+                </a:solidFill>
+                <a:latin typeface="SFMono-Regular"/>
+                <a:ea typeface="SFMono-Regular"/>
+                <a:cs typeface="SFMono-Regular"/>
+              </a:rPr>
+              <a:t>VisualArtifact</a:t>
+            </a:r>
+          </a:p>
+        </p:txBody>
+      </p:sp>
+      <p:sp>
+        <p:nvSpPr>
+          <p:cNvPr id="105" name="">
+            <a:extLst xmlns:a="http://schemas.openxmlformats.org/drawingml/2006/main">
+              <a:ext uri="{FF2B5EF4-FFF2-40B4-BE49-F238E27FC236}">
+                <a16:creationId xmlns:a16="http://schemas.microsoft.com/office/drawing/2014/main" id="{49937436-1A89-42D3-9B0B-0D717B27728D}"/>
+              </a:ext>
+            </a:extLst>
+          </p:cNvPr>
+          <p:cNvSpPr>
+            <a:spLocks xmlns:a="http://schemas.openxmlformats.org/drawingml/2006/main" noGrp="1"/>
+          </p:cNvSpPr>
+          <p:nvPr/>
+        </p:nvSpPr>
+        <p:spPr>
+          <a:xfrm xmlns:a="http://schemas.openxmlformats.org/drawingml/2006/main">
+            <a:off x="9963150" y="3981450"/>
+            <a:ext cx="1428750" cy="400050"/>
+          </a:xfrm>
+          <a:prstGeom xmlns:a="http://schemas.openxmlformats.org/drawingml/2006/main" prst="rect">
+            <a:avLst/>
+          </a:prstGeom>
+          <a:noFill xmlns:a="http://schemas.openxmlformats.org/drawingml/2006/main"/>
+          <a:ln xmlns:a="http://schemas.openxmlformats.org/drawingml/2006/main" w="0">
+            <a:noFill/>
+            <a:prstDash val="solid"/>
+          </a:ln>
+        </p:spPr>
+        <p:txBody>
+          <a:bodyPr xmlns:a="http://schemas.openxmlformats.org/drawingml/2006/main" wrap="square" lIns="0" tIns="0" rIns="0" bIns="0" anchor="t">
+            <a:noAutofit/>
+          </a:bodyPr>
+          <a:lstStyle xmlns:a="http://schemas.openxmlformats.org/drawingml/2006/main"/>
+          <a:p xmlns:a="http://schemas.openxmlformats.org/drawingml/2006/main">
+            <a:pPr algn="l">
+              <a:lnSpc>
+                <a:spcPct val="120000"/>
+              </a:lnSpc>
+              <a:buNone/>
+              <a:defRPr sz="1065" b="1">
+                <a:solidFill>
+                  <a:srgbClr val="167A78"/>
+                </a:solidFill>
+                <a:latin typeface="PingFang SC"/>
+                <a:ea typeface="PingFang SC"/>
+                <a:cs typeface="PingFang SC"/>
+              </a:defRPr>
+            </a:pPr>
+            <a:r>
+              <a:rPr sz="1065" b="1">
+                <a:solidFill>
+                  <a:srgbClr val="167A78"/>
+                </a:solidFill>
+                <a:latin typeface="PingFang SC"/>
+                <a:ea typeface="PingFang SC"/>
+                <a:cs typeface="PingFang SC"/>
+              </a:rPr>
+              <a:t>对话纸张</a:t>
+            </a:r>
+          </a:p>
+          <a:p xmlns:a="http://schemas.openxmlformats.org/drawingml/2006/main">
+            <a:pPr algn="l">
+              <a:lnSpc>
+                <a:spcPct val="120000"/>
+              </a:lnSpc>
+              <a:buNone/>
+              <a:defRPr sz="1065" b="1">
+                <a:solidFill>
+                  <a:srgbClr val="167A78"/>
+                </a:solidFill>
+                <a:latin typeface="PingFang SC"/>
+                <a:ea typeface="PingFang SC"/>
+                <a:cs typeface="PingFang SC"/>
+              </a:defRPr>
+            </a:pPr>
+            <a:r>
+              <a:rPr sz="1065" b="1">
+                <a:solidFill>
+                  <a:srgbClr val="167A78"/>
+                </a:solidFill>
+                <a:latin typeface="PingFang SC"/>
+                <a:ea typeface="PingFang SC"/>
+                <a:cs typeface="PingFang SC"/>
+              </a:rPr>
+              <a:t>学习文件</a:t>
+            </a:r>
+          </a:p>
+        </p:txBody>
+      </p:sp>
+      <p:sp>
+        <p:nvSpPr>
+          <p:cNvPr id="106" name="">
+            <a:extLst xmlns:a="http://schemas.openxmlformats.org/drawingml/2006/main">
+              <a:ext uri="{FF2B5EF4-FFF2-40B4-BE49-F238E27FC236}">
+                <a16:creationId xmlns:a16="http://schemas.microsoft.com/office/drawing/2014/main" id="{7A35572C-0A74-4129-A28B-0FDC3F7A074C}"/>
+              </a:ext>
+            </a:extLst>
+          </p:cNvPr>
+          <p:cNvSpPr>
+            <a:spLocks xmlns:a="http://schemas.openxmlformats.org/drawingml/2006/main" noGrp="1"/>
+          </p:cNvSpPr>
+          <p:nvPr/>
+        </p:nvSpPr>
+        <p:spPr>
+          <a:xfrm xmlns:a="http://schemas.openxmlformats.org/drawingml/2006/main">
+            <a:off x="647700" y="4457700"/>
+            <a:ext cx="10896600" cy="9525"/>
+          </a:xfrm>
+          <a:prstGeom xmlns:a="http://schemas.openxmlformats.org/drawingml/2006/main" prst="line">
+            <a:avLst/>
+          </a:prstGeom>
+          <a:noFill xmlns:a="http://schemas.openxmlformats.org/drawingml/2006/main"/>
+          <a:ln xmlns:a="http://schemas.openxmlformats.org/drawingml/2006/main" w="7620">
+            <a:solidFill>
+              <a:srgbClr val="D9E2DC"/>
+            </a:solidFill>
+            <a:prstDash val="solid"/>
+          </a:ln>
+        </p:spPr>
+      </p:sp>
+      <p:sp>
+        <p:nvSpPr>
+          <p:cNvPr id="107" name="">
+            <a:extLst xmlns:a="http://schemas.openxmlformats.org/drawingml/2006/main">
+              <a:ext uri="{FF2B5EF4-FFF2-40B4-BE49-F238E27FC236}">
+                <a16:creationId xmlns:a16="http://schemas.microsoft.com/office/drawing/2014/main" id="{E2B03F0C-1229-40B5-A8E8-915F1C68F3ED}"/>
+              </a:ext>
+            </a:extLst>
+          </p:cNvPr>
+          <p:cNvSpPr>
+            <a:spLocks xmlns:a="http://schemas.openxmlformats.org/drawingml/2006/main" noGrp="1"/>
+          </p:cNvSpPr>
+          <p:nvPr/>
+        </p:nvSpPr>
+        <p:spPr>
+          <a:xfrm xmlns:a="http://schemas.openxmlformats.org/drawingml/2006/main">
+            <a:off x="647700" y="4457700"/>
+            <a:ext cx="10896600" cy="723900"/>
+          </a:xfrm>
+          <a:prstGeom xmlns:a="http://schemas.openxmlformats.org/drawingml/2006/main" prst="rect">
+            <a:avLst/>
+          </a:prstGeom>
+          <a:noFill xmlns:a="http://schemas.openxmlformats.org/drawingml/2006/main"/>
+          <a:ln xmlns:a="http://schemas.openxmlformats.org/drawingml/2006/main" w="0">
+            <a:noFill/>
+            <a:prstDash val="solid"/>
+          </a:ln>
+        </p:spPr>
+      </p:sp>
+      <p:sp>
+        <p:nvSpPr>
+          <p:cNvPr id="108" name="">
+            <a:extLst xmlns:a="http://schemas.openxmlformats.org/drawingml/2006/main">
+              <a:ext uri="{FF2B5EF4-FFF2-40B4-BE49-F238E27FC236}">
+                <a16:creationId xmlns:a16="http://schemas.microsoft.com/office/drawing/2014/main" id="{4E7C9839-12C3-4DD2-BC36-61A4F39FA26E}"/>
+              </a:ext>
+            </a:extLst>
+          </p:cNvPr>
+          <p:cNvSpPr>
+            <a:spLocks xmlns:a="http://schemas.openxmlformats.org/drawingml/2006/main" noGrp="1"/>
+          </p:cNvSpPr>
+          <p:nvPr/>
+        </p:nvSpPr>
+        <p:spPr>
+          <a:xfrm xmlns:a="http://schemas.openxmlformats.org/drawingml/2006/main">
+            <a:off x="647700" y="4457700"/>
+            <a:ext cx="47625" cy="723900"/>
+          </a:xfrm>
+          <a:prstGeom xmlns:a="http://schemas.openxmlformats.org/drawingml/2006/main" prst="rect">
+            <a:avLst/>
+          </a:prstGeom>
+          <a:solidFill xmlns:a="http://schemas.openxmlformats.org/drawingml/2006/main">
+            <a:srgbClr val="315E9D"/>
+          </a:solidFill>
+          <a:ln xmlns:a="http://schemas.openxmlformats.org/drawingml/2006/main" w="0">
             <a:solidFill>
               <a:srgbClr val="315E9D"/>
             </a:solidFill>
@@ -5205,22 +7373,22 @@
       </p:sp>
       <p:sp>
         <p:nvSpPr>
-          <p:cNvPr id="18" name="">
-            <a:extLst xmlns:a="http://schemas.openxmlformats.org/drawingml/2006/main">
-              <a:ext uri="{FF2B5EF4-FFF2-40B4-BE49-F238E27FC236}">
-                <a16:creationId xmlns:a16="http://schemas.microsoft.com/office/drawing/2014/main" id="{2AD279B5-1282-450C-B53E-51BE518C639D}"/>
-              </a:ext>
-            </a:extLst>
-          </p:cNvPr>
-          <p:cNvSpPr>
-            <a:spLocks xmlns:a="http://schemas.openxmlformats.org/drawingml/2006/main" noGrp="1"/>
-          </p:cNvSpPr>
-          <p:nvPr/>
-        </p:nvSpPr>
-        <p:spPr>
-          <a:xfrm xmlns:a="http://schemas.openxmlformats.org/drawingml/2006/main">
-            <a:off x="4457700" y="2476500"/>
-            <a:ext cx="819150" cy="238125"/>
+          <p:cNvPr id="109" name="">
+            <a:extLst xmlns:a="http://schemas.openxmlformats.org/drawingml/2006/main">
+              <a:ext uri="{FF2B5EF4-FFF2-40B4-BE49-F238E27FC236}">
+                <a16:creationId xmlns:a16="http://schemas.microsoft.com/office/drawing/2014/main" id="{1BB70FE6-0478-4EDA-858A-414240ED161A}"/>
+              </a:ext>
+            </a:extLst>
+          </p:cNvPr>
+          <p:cNvSpPr>
+            <a:spLocks xmlns:a="http://schemas.openxmlformats.org/drawingml/2006/main" noGrp="1"/>
+          </p:cNvSpPr>
+          <p:nvPr/>
+        </p:nvSpPr>
+        <p:spPr>
+          <a:xfrm xmlns:a="http://schemas.openxmlformats.org/drawingml/2006/main">
+            <a:off x="800100" y="4543425"/>
+            <a:ext cx="3143250" cy="209550"/>
           </a:xfrm>
           <a:prstGeom xmlns:a="http://schemas.openxmlformats.org/drawingml/2006/main" prst="rect">
             <a:avLst/>
@@ -5243,6 +7411,68 @@
               </a:lnSpc>
               <a:buNone/>
               <a:defRPr sz="1275" b="1">
+                <a:solidFill>
+                  <a:srgbClr val="15221D"/>
+                </a:solidFill>
+                <a:latin typeface="PingFang SC"/>
+                <a:ea typeface="PingFang SC"/>
+                <a:cs typeface="PingFang SC"/>
+              </a:defRPr>
+            </a:pPr>
+            <a:r>
+              <a:rPr sz="1275" b="1">
+                <a:solidFill>
+                  <a:srgbClr val="15221D"/>
+                </a:solidFill>
+                <a:latin typeface="PingFang SC"/>
+                <a:ea typeface="PingFang SC"/>
+                <a:cs typeface="PingFang SC"/>
+              </a:rPr>
+              <a:t>项目内感知</a:t>
+            </a:r>
+          </a:p>
+        </p:txBody>
+      </p:sp>
+      <p:sp>
+        <p:nvSpPr>
+          <p:cNvPr id="110" name="">
+            <a:extLst xmlns:a="http://schemas.openxmlformats.org/drawingml/2006/main">
+              <a:ext uri="{FF2B5EF4-FFF2-40B4-BE49-F238E27FC236}">
+                <a16:creationId xmlns:a16="http://schemas.microsoft.com/office/drawing/2014/main" id="{2A2739E4-D513-4A74-BBA2-893747BD9FFA}"/>
+              </a:ext>
+            </a:extLst>
+          </p:cNvPr>
+          <p:cNvSpPr>
+            <a:spLocks xmlns:a="http://schemas.openxmlformats.org/drawingml/2006/main" noGrp="1"/>
+          </p:cNvSpPr>
+          <p:nvPr/>
+        </p:nvSpPr>
+        <p:spPr>
+          <a:xfrm xmlns:a="http://schemas.openxmlformats.org/drawingml/2006/main">
+            <a:off x="800100" y="4772025"/>
+            <a:ext cx="3257550" cy="381000"/>
+          </a:xfrm>
+          <a:prstGeom xmlns:a="http://schemas.openxmlformats.org/drawingml/2006/main" prst="rect">
+            <a:avLst/>
+          </a:prstGeom>
+          <a:noFill xmlns:a="http://schemas.openxmlformats.org/drawingml/2006/main"/>
+          <a:ln xmlns:a="http://schemas.openxmlformats.org/drawingml/2006/main" w="0">
+            <a:noFill/>
+            <a:prstDash val="solid"/>
+          </a:ln>
+        </p:spPr>
+        <p:txBody>
+          <a:bodyPr xmlns:a="http://schemas.openxmlformats.org/drawingml/2006/main" wrap="square" lIns="0" tIns="0" rIns="0" bIns="0" anchor="t">
+            <a:noAutofit/>
+          </a:bodyPr>
+          <a:lstStyle xmlns:a="http://schemas.openxmlformats.org/drawingml/2006/main"/>
+          <a:p xmlns:a="http://schemas.openxmlformats.org/drawingml/2006/main">
+            <a:pPr algn="l">
+              <a:lnSpc>
+                <a:spcPct val="108000"/>
+              </a:lnSpc>
+              <a:buNone/>
+              <a:defRPr sz="840" b="0">
                 <a:solidFill>
                   <a:srgbClr val="315E9D"/>
                 </a:solidFill>
@@ -5252,7 +7482,7 @@
               </a:defRPr>
             </a:pPr>
             <a:r>
-              <a:rPr sz="1275" b="1">
+              <a:rPr sz="840" b="0">
                 <a:solidFill>
                   <a:srgbClr val="315E9D"/>
                 </a:solidFill>
@@ -5260,29 +7490,56 @@
                 <a:ea typeface="SFMono-Regular"/>
                 <a:cs typeface="SFMono-Regular"/>
               </a:rPr>
-              <a:t>learn</a:t>
-            </a:r>
-          </a:p>
-        </p:txBody>
-      </p:sp>
-      <p:sp>
-        <p:nvSpPr>
-          <p:cNvPr id="19" name="">
-            <a:extLst xmlns:a="http://schemas.openxmlformats.org/drawingml/2006/main">
-              <a:ext uri="{FF2B5EF4-FFF2-40B4-BE49-F238E27FC236}">
-                <a16:creationId xmlns:a16="http://schemas.microsoft.com/office/drawing/2014/main" id="{DE7327DB-B426-4EA1-8915-D08C54308618}"/>
-              </a:ext>
-            </a:extLst>
-          </p:cNvPr>
-          <p:cNvSpPr>
-            <a:spLocks xmlns:a="http://schemas.openxmlformats.org/drawingml/2006/main" noGrp="1"/>
-          </p:cNvSpPr>
-          <p:nvPr/>
-        </p:nvSpPr>
-        <p:spPr>
-          <a:xfrm xmlns:a="http://schemas.openxmlformats.org/drawingml/2006/main">
-            <a:off x="5286375" y="2457450"/>
-            <a:ext cx="1809750" cy="266700"/>
+              <a:t>read_project_workspace · read_project_roadmap</a:t>
+            </a:r>
+          </a:p>
+          <a:p xmlns:a="http://schemas.openxmlformats.org/drawingml/2006/main">
+            <a:pPr algn="l">
+              <a:lnSpc>
+                <a:spcPct val="108000"/>
+              </a:lnSpc>
+              <a:buNone/>
+              <a:defRPr sz="840" b="0">
+                <a:solidFill>
+                  <a:srgbClr val="315E9D"/>
+                </a:solidFill>
+                <a:latin typeface="SFMono-Regular"/>
+                <a:ea typeface="SFMono-Regular"/>
+                <a:cs typeface="SFMono-Regular"/>
+              </a:defRPr>
+            </a:pPr>
+            <a:r>
+              <a:rPr sz="840" b="0">
+                <a:solidFill>
+                  <a:srgbClr val="315E9D"/>
+                </a:solidFill>
+                <a:latin typeface="SFMono-Regular"/>
+                <a:ea typeface="SFMono-Regular"/>
+                <a:cs typeface="SFMono-Regular"/>
+              </a:rPr>
+              <a:t>read_project_sources · read_project_learning_file</a:t>
+            </a:r>
+          </a:p>
+        </p:txBody>
+      </p:sp>
+      <p:sp>
+        <p:nvSpPr>
+          <p:cNvPr id="111" name="">
+            <a:extLst xmlns:a="http://schemas.openxmlformats.org/drawingml/2006/main">
+              <a:ext uri="{FF2B5EF4-FFF2-40B4-BE49-F238E27FC236}">
+                <a16:creationId xmlns:a16="http://schemas.microsoft.com/office/drawing/2014/main" id="{3FC13BAC-8849-4BD5-8995-FFB991F8D96D}"/>
+              </a:ext>
+            </a:extLst>
+          </p:cNvPr>
+          <p:cNvSpPr>
+            <a:spLocks xmlns:a="http://schemas.openxmlformats.org/drawingml/2006/main" noGrp="1"/>
+          </p:cNvSpPr>
+          <p:nvPr/>
+        </p:nvSpPr>
+        <p:spPr>
+          <a:xfrm xmlns:a="http://schemas.openxmlformats.org/drawingml/2006/main">
+            <a:off x="4343400" y="4552950"/>
+            <a:ext cx="1924050" cy="552450"/>
           </a:xfrm>
           <a:prstGeom xmlns:a="http://schemas.openxmlformats.org/drawingml/2006/main" prst="rect">
             <a:avLst/>
@@ -5301,50 +7558,166 @@
           <a:p xmlns:a="http://schemas.openxmlformats.org/drawingml/2006/main">
             <a:pPr algn="l">
               <a:lnSpc>
-                <a:spcPct val="115000"/>
-              </a:lnSpc>
-              <a:buNone/>
-              <a:defRPr sz="1650" b="1">
+                <a:spcPct val="120000"/>
+              </a:lnSpc>
+              <a:buNone/>
+              <a:defRPr sz="1065" b="0">
+                <a:solidFill>
+                  <a:srgbClr val="6D7C73"/>
+                </a:solidFill>
+                <a:latin typeface="PingFang SC"/>
+                <a:ea typeface="PingFang SC"/>
+                <a:cs typeface="PingFang SC"/>
+              </a:defRPr>
+            </a:pPr>
+            <a:r>
+              <a:rPr sz="1065" b="0">
+                <a:solidFill>
+                  <a:srgbClr val="6D7C73"/>
+                </a:solidFill>
+                <a:latin typeface="PingFang SC"/>
+                <a:ea typeface="PingFang SC"/>
+                <a:cs typeface="PingFang SC"/>
+              </a:rPr>
+              <a:t>进入 project scope；</a:t>
+            </a:r>
+          </a:p>
+          <a:p xmlns:a="http://schemas.openxmlformats.org/drawingml/2006/main">
+            <a:pPr algn="l">
+              <a:lnSpc>
+                <a:spcPct val="120000"/>
+              </a:lnSpc>
+              <a:buNone/>
+              <a:defRPr sz="1065" b="0">
+                <a:solidFill>
+                  <a:srgbClr val="6D7C73"/>
+                </a:solidFill>
+                <a:latin typeface="PingFang SC"/>
+                <a:ea typeface="PingFang SC"/>
+                <a:cs typeface="PingFang SC"/>
+              </a:defRPr>
+            </a:pPr>
+            <a:r>
+              <a:rPr sz="1065" b="0">
+                <a:solidFill>
+                  <a:srgbClr val="6D7C73"/>
+                </a:solidFill>
+                <a:latin typeface="PingFang SC"/>
+                <a:ea typeface="PingFang SC"/>
+                <a:cs typeface="PingFang SC"/>
+              </a:rPr>
+              <a:t>项目规划或关卡学习</a:t>
+            </a:r>
+          </a:p>
+        </p:txBody>
+      </p:sp>
+      <p:sp>
+        <p:nvSpPr>
+          <p:cNvPr id="112" name="">
+            <a:extLst xmlns:a="http://schemas.openxmlformats.org/drawingml/2006/main">
+              <a:ext uri="{FF2B5EF4-FFF2-40B4-BE49-F238E27FC236}">
+                <a16:creationId xmlns:a16="http://schemas.microsoft.com/office/drawing/2014/main" id="{1CDF153E-7F54-4B70-B7B0-C27E60F0C36D}"/>
+              </a:ext>
+            </a:extLst>
+          </p:cNvPr>
+          <p:cNvSpPr>
+            <a:spLocks xmlns:a="http://schemas.openxmlformats.org/drawingml/2006/main" noGrp="1"/>
+          </p:cNvSpPr>
+          <p:nvPr/>
+        </p:nvSpPr>
+        <p:spPr>
+          <a:xfrm xmlns:a="http://schemas.openxmlformats.org/drawingml/2006/main">
+            <a:off x="6534150" y="4552950"/>
+            <a:ext cx="3162300" cy="552450"/>
+          </a:xfrm>
+          <a:prstGeom xmlns:a="http://schemas.openxmlformats.org/drawingml/2006/main" prst="rect">
+            <a:avLst/>
+          </a:prstGeom>
+          <a:noFill xmlns:a="http://schemas.openxmlformats.org/drawingml/2006/main"/>
+          <a:ln xmlns:a="http://schemas.openxmlformats.org/drawingml/2006/main" w="0">
+            <a:noFill/>
+            <a:prstDash val="solid"/>
+          </a:ln>
+        </p:spPr>
+        <p:txBody>
+          <a:bodyPr xmlns:a="http://schemas.openxmlformats.org/drawingml/2006/main" wrap="square" lIns="0" tIns="0" rIns="0" bIns="0" anchor="t">
+            <a:noAutofit/>
+          </a:bodyPr>
+          <a:lstStyle xmlns:a="http://schemas.openxmlformats.org/drawingml/2006/main"/>
+          <a:p xmlns:a="http://schemas.openxmlformats.org/drawingml/2006/main">
+            <a:pPr algn="l">
+              <a:lnSpc>
+                <a:spcPct val="116000"/>
+              </a:lnSpc>
+              <a:buNone/>
+              <a:defRPr sz="1058" b="0">
                 <a:solidFill>
                   <a:srgbClr val="15221D"/>
                 </a:solidFill>
-                <a:latin typeface="PingFang SC"/>
-                <a:ea typeface="PingFang SC"/>
-                <a:cs typeface="PingFang SC"/>
-              </a:defRPr>
-            </a:pPr>
-            <a:r>
-              <a:rPr sz="1650" b="1">
+                <a:latin typeface="SFMono-Regular"/>
+                <a:ea typeface="SFMono-Regular"/>
+                <a:cs typeface="SFMono-Regular"/>
+              </a:defRPr>
+            </a:pPr>
+            <a:r>
+              <a:rPr sz="1058" b="0">
                 <a:solidFill>
                   <a:srgbClr val="15221D"/>
                 </a:solidFill>
-                <a:latin typeface="PingFang SC"/>
-                <a:ea typeface="PingFang SC"/>
-                <a:cs typeface="PingFang SC"/>
-              </a:rPr>
-              <a:t>学习任务</a:t>
-            </a:r>
-          </a:p>
-        </p:txBody>
-      </p:sp>
-      <p:sp>
-        <p:nvSpPr>
-          <p:cNvPr id="20" name="">
-            <a:extLst xmlns:a="http://schemas.openxmlformats.org/drawingml/2006/main">
-              <a:ext uri="{FF2B5EF4-FFF2-40B4-BE49-F238E27FC236}">
-                <a16:creationId xmlns:a16="http://schemas.microsoft.com/office/drawing/2014/main" id="{8E0AFDE6-8493-4F2D-81B0-E6735094BB5C}"/>
-              </a:ext>
-            </a:extLst>
-          </p:cNvPr>
-          <p:cNvSpPr>
-            <a:spLocks xmlns:a="http://schemas.openxmlformats.org/drawingml/2006/main" noGrp="1"/>
-          </p:cNvSpPr>
-          <p:nvPr/>
-        </p:nvSpPr>
-        <p:spPr>
-          <a:xfrm xmlns:a="http://schemas.openxmlformats.org/drawingml/2006/main">
-            <a:off x="4457700" y="2790825"/>
-            <a:ext cx="1952625" cy="190500"/>
+                <a:latin typeface="SFMono-Regular"/>
+                <a:ea typeface="SFMono-Regular"/>
+                <a:cs typeface="SFMono-Regular"/>
+              </a:rPr>
+              <a:t>Project · Roadmap · Checkpoint</a:t>
+            </a:r>
+          </a:p>
+          <a:p xmlns:a="http://schemas.openxmlformats.org/drawingml/2006/main">
+            <a:pPr algn="l">
+              <a:lnSpc>
+                <a:spcPct val="116000"/>
+              </a:lnSpc>
+              <a:buNone/>
+              <a:defRPr sz="1058" b="0">
+                <a:solidFill>
+                  <a:srgbClr val="15221D"/>
+                </a:solidFill>
+                <a:latin typeface="SFMono-Regular"/>
+                <a:ea typeface="SFMono-Regular"/>
+                <a:cs typeface="SFMono-Regular"/>
+              </a:defRPr>
+            </a:pPr>
+            <a:r>
+              <a:rPr sz="1058" b="0">
+                <a:solidFill>
+                  <a:srgbClr val="15221D"/>
+                </a:solidFill>
+                <a:latin typeface="SFMono-Regular"/>
+                <a:ea typeface="SFMono-Regular"/>
+                <a:cs typeface="SFMono-Regular"/>
+              </a:rPr>
+              <a:t>Source · Lecture · Exercise</a:t>
+            </a:r>
+          </a:p>
+        </p:txBody>
+      </p:sp>
+      <p:sp>
+        <p:nvSpPr>
+          <p:cNvPr id="113" name="">
+            <a:extLst xmlns:a="http://schemas.openxmlformats.org/drawingml/2006/main">
+              <a:ext uri="{FF2B5EF4-FFF2-40B4-BE49-F238E27FC236}">
+                <a16:creationId xmlns:a16="http://schemas.microsoft.com/office/drawing/2014/main" id="{F2247BC0-FB66-43CA-8D0F-3C63A614703F}"/>
+              </a:ext>
+            </a:extLst>
+          </p:cNvPr>
+          <p:cNvSpPr>
+            <a:spLocks xmlns:a="http://schemas.openxmlformats.org/drawingml/2006/main" noGrp="1"/>
+          </p:cNvSpPr>
+          <p:nvPr/>
+        </p:nvSpPr>
+        <p:spPr>
+          <a:xfrm xmlns:a="http://schemas.openxmlformats.org/drawingml/2006/main">
+            <a:off x="9963150" y="4552950"/>
+            <a:ext cx="1428750" cy="552450"/>
           </a:xfrm>
           <a:prstGeom xmlns:a="http://schemas.openxmlformats.org/drawingml/2006/main" prst="rect">
             <a:avLst/>
@@ -5363,72 +7736,10 @@
           <a:p xmlns:a="http://schemas.openxmlformats.org/drawingml/2006/main">
             <a:pPr algn="l">
               <a:lnSpc>
-                <a:spcPct val="115000"/>
-              </a:lnSpc>
-              <a:buNone/>
-              <a:defRPr sz="1050" b="0">
-                <a:solidFill>
-                  <a:srgbClr val="6D7C73"/>
-                </a:solidFill>
-                <a:latin typeface="PingFang SC"/>
-                <a:ea typeface="PingFang SC"/>
-                <a:cs typeface="PingFang SC"/>
-              </a:defRPr>
-            </a:pPr>
-            <a:r>
-              <a:rPr sz="1050" b="0">
-                <a:solidFill>
-                  <a:srgbClr val="6D7C73"/>
-                </a:solidFill>
-                <a:latin typeface="PingFang SC"/>
-                <a:ea typeface="PingFang SC"/>
-                <a:cs typeface="PingFang SC"/>
-              </a:rPr>
-              <a:t>原子目标 · 已有任务</a:t>
-            </a:r>
-          </a:p>
-        </p:txBody>
-      </p:sp>
-      <p:sp>
-        <p:nvSpPr>
-          <p:cNvPr id="21" name="">
-            <a:extLst xmlns:a="http://schemas.openxmlformats.org/drawingml/2006/main">
-              <a:ext uri="{FF2B5EF4-FFF2-40B4-BE49-F238E27FC236}">
-                <a16:creationId xmlns:a16="http://schemas.microsoft.com/office/drawing/2014/main" id="{415CEE0B-9B7C-4122-81D0-3D637B482EBB}"/>
-              </a:ext>
-            </a:extLst>
-          </p:cNvPr>
-          <p:cNvSpPr>
-            <a:spLocks xmlns:a="http://schemas.openxmlformats.org/drawingml/2006/main" noGrp="1"/>
-          </p:cNvSpPr>
-          <p:nvPr/>
-        </p:nvSpPr>
-        <p:spPr>
-          <a:xfrm xmlns:a="http://schemas.openxmlformats.org/drawingml/2006/main">
-            <a:off x="6315075" y="2790825"/>
-            <a:ext cx="914400" cy="190500"/>
-          </a:xfrm>
-          <a:prstGeom xmlns:a="http://schemas.openxmlformats.org/drawingml/2006/main" prst="rect">
-            <a:avLst/>
-          </a:prstGeom>
-          <a:noFill xmlns:a="http://schemas.openxmlformats.org/drawingml/2006/main"/>
-          <a:ln xmlns:a="http://schemas.openxmlformats.org/drawingml/2006/main" w="0">
-            <a:noFill/>
-            <a:prstDash val="solid"/>
-          </a:ln>
-        </p:spPr>
-        <p:txBody>
-          <a:bodyPr xmlns:a="http://schemas.openxmlformats.org/drawingml/2006/main" wrap="square" lIns="0" tIns="0" rIns="0" bIns="0" anchor="t">
-            <a:noAutofit/>
-          </a:bodyPr>
-          <a:lstStyle xmlns:a="http://schemas.openxmlformats.org/drawingml/2006/main"/>
-          <a:p xmlns:a="http://schemas.openxmlformats.org/drawingml/2006/main">
-            <a:pPr algn="r">
-              <a:lnSpc>
-                <a:spcPct val="115000"/>
-              </a:lnSpc>
-              <a:buNone/>
-              <a:defRPr sz="975" b="1">
+                <a:spcPct val="120000"/>
+              </a:lnSpc>
+              <a:buNone/>
+              <a:defRPr sz="1065" b="1">
                 <a:solidFill>
                   <a:srgbClr val="315E9D"/>
                 </a:solidFill>
@@ -5438,7 +7749,7 @@
               </a:defRPr>
             </a:pPr>
             <a:r>
-              <a:rPr sz="975" b="1">
+              <a:rPr sz="1065" b="1">
                 <a:solidFill>
                   <a:srgbClr val="315E9D"/>
                 </a:solidFill>
@@ -5446,68 +7757,124 @@
                 <a:ea typeface="PingFang SC"/>
                 <a:cs typeface="PingFang SC"/>
               </a:rPr>
-              <a:t>验证 / 退出</a:t>
-            </a:r>
-          </a:p>
-        </p:txBody>
-      </p:sp>
-      <p:cxnSp>
-        <p:nvCxnSpPr>
-          <p:cNvPr id="78" name=""/>
-          <p:cNvCxnSpPr>
-            <a:stCxn xmlns:a="http://schemas.openxmlformats.org/drawingml/2006/main" id="6" idx="3"/>
-            <a:endCxn xmlns:a="http://schemas.openxmlformats.org/drawingml/2006/main" id="17" idx="1"/>
-          </p:cNvCxnSpPr>
-          <p:nvPr/>
-        </p:nvCxnSpPr>
-        <p:spPr>
-          <a:xfrm xmlns:a="http://schemas.openxmlformats.org/drawingml/2006/main" flipV="1">
-            <a:off x="3371850" y="2724150"/>
-            <a:ext cx="914400" cy="23813"/>
-          </a:xfrm>
-          <a:prstGeom xmlns:a="http://schemas.openxmlformats.org/drawingml/2006/main" prst="bentConnector3">
-            <a:avLst>
-              <a:gd name="adj1" fmla="val 50000"/>
-            </a:avLst>
-          </a:prstGeom>
-          <a:ln xmlns:a="http://schemas.openxmlformats.org/drawingml/2006/main" w="20955">
+              <a:t>项目 / 关卡</a:t>
+            </a:r>
+          </a:p>
+          <a:p xmlns:a="http://schemas.openxmlformats.org/drawingml/2006/main">
+            <a:pPr algn="l">
+              <a:lnSpc>
+                <a:spcPct val="120000"/>
+              </a:lnSpc>
+              <a:buNone/>
+              <a:defRPr sz="1065" b="1">
+                <a:solidFill>
+                  <a:srgbClr val="315E9D"/>
+                </a:solidFill>
+                <a:latin typeface="PingFang SC"/>
+                <a:ea typeface="PingFang SC"/>
+                <a:cs typeface="PingFang SC"/>
+              </a:defRPr>
+            </a:pPr>
+            <a:r>
+              <a:rPr sz="1065" b="1">
+                <a:solidFill>
+                  <a:srgbClr val="315E9D"/>
+                </a:solidFill>
+                <a:latin typeface="PingFang SC"/>
+                <a:ea typeface="PingFang SC"/>
+                <a:cs typeface="PingFang SC"/>
+              </a:rPr>
+              <a:t>文件系统</a:t>
+            </a:r>
+          </a:p>
+        </p:txBody>
+      </p:sp>
+      <p:sp>
+        <p:nvSpPr>
+          <p:cNvPr id="114" name="">
+            <a:extLst xmlns:a="http://schemas.openxmlformats.org/drawingml/2006/main">
+              <a:ext uri="{FF2B5EF4-FFF2-40B4-BE49-F238E27FC236}">
+                <a16:creationId xmlns:a16="http://schemas.microsoft.com/office/drawing/2014/main" id="{E9863DC3-D724-47FD-B9E0-5718BABE521B}"/>
+              </a:ext>
+            </a:extLst>
+          </p:cNvPr>
+          <p:cNvSpPr>
+            <a:spLocks xmlns:a="http://schemas.openxmlformats.org/drawingml/2006/main" noGrp="1"/>
+          </p:cNvSpPr>
+          <p:nvPr/>
+        </p:nvSpPr>
+        <p:spPr>
+          <a:xfrm xmlns:a="http://schemas.openxmlformats.org/drawingml/2006/main">
+            <a:off x="647700" y="5181600"/>
+            <a:ext cx="10896600" cy="9525"/>
+          </a:xfrm>
+          <a:prstGeom xmlns:a="http://schemas.openxmlformats.org/drawingml/2006/main" prst="line">
+            <a:avLst/>
+          </a:prstGeom>
+          <a:noFill xmlns:a="http://schemas.openxmlformats.org/drawingml/2006/main"/>
+          <a:ln xmlns:a="http://schemas.openxmlformats.org/drawingml/2006/main" w="7620">
             <a:solidFill>
-              <a:srgbClr val="315E9D"/>
+              <a:srgbClr val="D9E2DC"/>
             </a:solidFill>
             <a:prstDash val="solid"/>
-            <a:headEnd type="none" w="med" len="med"/>
-            <a:tailEnd type="arrow" w="med" len="med"/>
-          </a:ln>
-        </p:spPr>
-      </p:cxnSp>
-      <p:sp>
-        <p:nvSpPr>
-          <p:cNvPr id="23" name="state-plan">
-            <a:extLst xmlns:a="http://schemas.openxmlformats.org/drawingml/2006/main">
-              <a:ext uri="{FF2B5EF4-FFF2-40B4-BE49-F238E27FC236}">
-                <a16:creationId xmlns:a16="http://schemas.microsoft.com/office/drawing/2014/main" id="{922F3633-11BA-42DD-A015-C62B93E3E9B2}"/>
-              </a:ext>
-            </a:extLst>
-          </p:cNvPr>
-          <p:cNvSpPr>
-            <a:spLocks xmlns:a="http://schemas.openxmlformats.org/drawingml/2006/main" noGrp="1"/>
-          </p:cNvSpPr>
-          <p:nvPr/>
-        </p:nvSpPr>
-        <p:spPr>
-          <a:xfrm xmlns:a="http://schemas.openxmlformats.org/drawingml/2006/main">
-            <a:off x="4286250" y="3238500"/>
-            <a:ext cx="3143250" cy="742950"/>
-          </a:xfrm>
-          <a:prstGeom xmlns:a="http://schemas.openxmlformats.org/drawingml/2006/main" prst="roundRect">
-            <a:avLst>
-              <a:gd name="adj" fmla="val 20513"/>
-            </a:avLst>
+          </a:ln>
+        </p:spPr>
+      </p:sp>
+      <p:sp>
+        <p:nvSpPr>
+          <p:cNvPr id="115" name="">
+            <a:extLst xmlns:a="http://schemas.openxmlformats.org/drawingml/2006/main">
+              <a:ext uri="{FF2B5EF4-FFF2-40B4-BE49-F238E27FC236}">
+                <a16:creationId xmlns:a16="http://schemas.microsoft.com/office/drawing/2014/main" id="{47B545C3-22ED-4DC4-BDE6-8516637B1F45}"/>
+              </a:ext>
+            </a:extLst>
+          </p:cNvPr>
+          <p:cNvSpPr>
+            <a:spLocks xmlns:a="http://schemas.openxmlformats.org/drawingml/2006/main" noGrp="1"/>
+          </p:cNvSpPr>
+          <p:nvPr/>
+        </p:nvSpPr>
+        <p:spPr>
+          <a:xfrm xmlns:a="http://schemas.openxmlformats.org/drawingml/2006/main">
+            <a:off x="647700" y="5181600"/>
+            <a:ext cx="10896600" cy="685800"/>
+          </a:xfrm>
+          <a:prstGeom xmlns:a="http://schemas.openxmlformats.org/drawingml/2006/main" prst="rect">
+            <a:avLst/>
+          </a:prstGeom>
+          <a:noFill xmlns:a="http://schemas.openxmlformats.org/drawingml/2006/main"/>
+          <a:ln xmlns:a="http://schemas.openxmlformats.org/drawingml/2006/main" w="0">
+            <a:noFill/>
+            <a:prstDash val="solid"/>
+          </a:ln>
+        </p:spPr>
+      </p:sp>
+      <p:sp>
+        <p:nvSpPr>
+          <p:cNvPr id="116" name="">
+            <a:extLst xmlns:a="http://schemas.openxmlformats.org/drawingml/2006/main">
+              <a:ext uri="{FF2B5EF4-FFF2-40B4-BE49-F238E27FC236}">
+                <a16:creationId xmlns:a16="http://schemas.microsoft.com/office/drawing/2014/main" id="{160F6D1E-E734-4D4F-9F17-EE34FC95240D}"/>
+              </a:ext>
+            </a:extLst>
+          </p:cNvPr>
+          <p:cNvSpPr>
+            <a:spLocks xmlns:a="http://schemas.openxmlformats.org/drawingml/2006/main" noGrp="1"/>
+          </p:cNvSpPr>
+          <p:nvPr/>
+        </p:nvSpPr>
+        <p:spPr>
+          <a:xfrm xmlns:a="http://schemas.openxmlformats.org/drawingml/2006/main">
+            <a:off x="647700" y="5181600"/>
+            <a:ext cx="47625" cy="685800"/>
+          </a:xfrm>
+          <a:prstGeom xmlns:a="http://schemas.openxmlformats.org/drawingml/2006/main" prst="rect">
+            <a:avLst/>
           </a:prstGeom>
           <a:solidFill xmlns:a="http://schemas.openxmlformats.org/drawingml/2006/main">
-            <a:srgbClr val="F1EEFE"/>
+            <a:srgbClr val="64529B"/>
           </a:solidFill>
-          <a:ln xmlns:a="http://schemas.openxmlformats.org/drawingml/2006/main" w="11430">
+          <a:ln xmlns:a="http://schemas.openxmlformats.org/drawingml/2006/main" w="0">
             <a:solidFill>
               <a:srgbClr val="64529B"/>
             </a:solidFill>
@@ -5517,22 +7884,22 @@
       </p:sp>
       <p:sp>
         <p:nvSpPr>
-          <p:cNvPr id="24" name="">
-            <a:extLst xmlns:a="http://schemas.openxmlformats.org/drawingml/2006/main">
-              <a:ext uri="{FF2B5EF4-FFF2-40B4-BE49-F238E27FC236}">
-                <a16:creationId xmlns:a16="http://schemas.microsoft.com/office/drawing/2014/main" id="{DFB40624-75CB-4E82-803A-C9EF364202E1}"/>
-              </a:ext>
-            </a:extLst>
-          </p:cNvPr>
-          <p:cNvSpPr>
-            <a:spLocks xmlns:a="http://schemas.openxmlformats.org/drawingml/2006/main" noGrp="1"/>
-          </p:cNvSpPr>
-          <p:nvPr/>
-        </p:nvSpPr>
-        <p:spPr>
-          <a:xfrm xmlns:a="http://schemas.openxmlformats.org/drawingml/2006/main">
-            <a:off x="4457700" y="3362325"/>
-            <a:ext cx="819150" cy="238125"/>
+          <p:cNvPr id="117" name="">
+            <a:extLst xmlns:a="http://schemas.openxmlformats.org/drawingml/2006/main">
+              <a:ext uri="{FF2B5EF4-FFF2-40B4-BE49-F238E27FC236}">
+                <a16:creationId xmlns:a16="http://schemas.microsoft.com/office/drawing/2014/main" id="{0B36C1B4-FBF2-47FD-A363-802BC8021884}"/>
+              </a:ext>
+            </a:extLst>
+          </p:cNvPr>
+          <p:cNvSpPr>
+            <a:spLocks xmlns:a="http://schemas.openxmlformats.org/drawingml/2006/main" noGrp="1"/>
+          </p:cNvSpPr>
+          <p:nvPr/>
+        </p:nvSpPr>
+        <p:spPr>
+          <a:xfrm xmlns:a="http://schemas.openxmlformats.org/drawingml/2006/main">
+            <a:off x="800100" y="5267325"/>
+            <a:ext cx="3143250" cy="209550"/>
           </a:xfrm>
           <a:prstGeom xmlns:a="http://schemas.openxmlformats.org/drawingml/2006/main" prst="rect">
             <a:avLst/>
@@ -5555,6 +7922,68 @@
               </a:lnSpc>
               <a:buNone/>
               <a:defRPr sz="1275" b="1">
+                <a:solidFill>
+                  <a:srgbClr val="15221D"/>
+                </a:solidFill>
+                <a:latin typeface="PingFang SC"/>
+                <a:ea typeface="PingFang SC"/>
+                <a:cs typeface="PingFang SC"/>
+              </a:defRPr>
+            </a:pPr>
+            <a:r>
+              <a:rPr sz="1275" b="1">
+                <a:solidFill>
+                  <a:srgbClr val="15221D"/>
+                </a:solidFill>
+                <a:latin typeface="PingFang SC"/>
+                <a:ea typeface="PingFang SC"/>
+                <a:cs typeface="PingFang SC"/>
+              </a:rPr>
+              <a:t>项目内提案</a:t>
+            </a:r>
+          </a:p>
+        </p:txBody>
+      </p:sp>
+      <p:sp>
+        <p:nvSpPr>
+          <p:cNvPr id="118" name="">
+            <a:extLst xmlns:a="http://schemas.openxmlformats.org/drawingml/2006/main">
+              <a:ext uri="{FF2B5EF4-FFF2-40B4-BE49-F238E27FC236}">
+                <a16:creationId xmlns:a16="http://schemas.microsoft.com/office/drawing/2014/main" id="{F6F61B88-AD1C-4A69-A9F8-D204437488F0}"/>
+              </a:ext>
+            </a:extLst>
+          </p:cNvPr>
+          <p:cNvSpPr>
+            <a:spLocks xmlns:a="http://schemas.openxmlformats.org/drawingml/2006/main" noGrp="1"/>
+          </p:cNvSpPr>
+          <p:nvPr/>
+        </p:nvSpPr>
+        <p:spPr>
+          <a:xfrm xmlns:a="http://schemas.openxmlformats.org/drawingml/2006/main">
+            <a:off x="800100" y="5495925"/>
+            <a:ext cx="3257550" cy="342900"/>
+          </a:xfrm>
+          <a:prstGeom xmlns:a="http://schemas.openxmlformats.org/drawingml/2006/main" prst="rect">
+            <a:avLst/>
+          </a:prstGeom>
+          <a:noFill xmlns:a="http://schemas.openxmlformats.org/drawingml/2006/main"/>
+          <a:ln xmlns:a="http://schemas.openxmlformats.org/drawingml/2006/main" w="0">
+            <a:noFill/>
+            <a:prstDash val="solid"/>
+          </a:ln>
+        </p:spPr>
+        <p:txBody>
+          <a:bodyPr xmlns:a="http://schemas.openxmlformats.org/drawingml/2006/main" wrap="square" lIns="0" tIns="0" rIns="0" bIns="0" anchor="t">
+            <a:noAutofit/>
+          </a:bodyPr>
+          <a:lstStyle xmlns:a="http://schemas.openxmlformats.org/drawingml/2006/main"/>
+          <a:p xmlns:a="http://schemas.openxmlformats.org/drawingml/2006/main">
+            <a:pPr algn="l">
+              <a:lnSpc>
+                <a:spcPct val="108000"/>
+              </a:lnSpc>
+              <a:buNone/>
+              <a:defRPr sz="840" b="0">
                 <a:solidFill>
                   <a:srgbClr val="64529B"/>
                 </a:solidFill>
@@ -5564,7 +7993,7 @@
               </a:defRPr>
             </a:pPr>
             <a:r>
-              <a:rPr sz="1275" b="1">
+              <a:rPr sz="840" b="0">
                 <a:solidFill>
                   <a:srgbClr val="64529B"/>
                 </a:solidFill>
@@ -5572,398 +8001,18 @@
                 <a:ea typeface="SFMono-Regular"/>
                 <a:cs typeface="SFMono-Regular"/>
               </a:rPr>
-              <a:t>plan</a:t>
-            </a:r>
-          </a:p>
-        </p:txBody>
-      </p:sp>
-      <p:sp>
-        <p:nvSpPr>
-          <p:cNvPr id="25" name="">
-            <a:extLst xmlns:a="http://schemas.openxmlformats.org/drawingml/2006/main">
-              <a:ext uri="{FF2B5EF4-FFF2-40B4-BE49-F238E27FC236}">
-                <a16:creationId xmlns:a16="http://schemas.microsoft.com/office/drawing/2014/main" id="{1405D536-4621-4D21-BB16-EC264BB9ACCD}"/>
-              </a:ext>
-            </a:extLst>
-          </p:cNvPr>
-          <p:cNvSpPr>
-            <a:spLocks xmlns:a="http://schemas.openxmlformats.org/drawingml/2006/main" noGrp="1"/>
-          </p:cNvSpPr>
-          <p:nvPr/>
-        </p:nvSpPr>
-        <p:spPr>
-          <a:xfrm xmlns:a="http://schemas.openxmlformats.org/drawingml/2006/main">
-            <a:off x="5286375" y="3343275"/>
-            <a:ext cx="1809750" cy="266700"/>
-          </a:xfrm>
-          <a:prstGeom xmlns:a="http://schemas.openxmlformats.org/drawingml/2006/main" prst="rect">
-            <a:avLst/>
-          </a:prstGeom>
-          <a:noFill xmlns:a="http://schemas.openxmlformats.org/drawingml/2006/main"/>
-          <a:ln xmlns:a="http://schemas.openxmlformats.org/drawingml/2006/main" w="0">
-            <a:noFill/>
-            <a:prstDash val="solid"/>
-          </a:ln>
-        </p:spPr>
-        <p:txBody>
-          <a:bodyPr xmlns:a="http://schemas.openxmlformats.org/drawingml/2006/main" wrap="square" lIns="0" tIns="0" rIns="0" bIns="0" anchor="t">
-            <a:noAutofit/>
-          </a:bodyPr>
-          <a:lstStyle xmlns:a="http://schemas.openxmlformats.org/drawingml/2006/main"/>
-          <a:p xmlns:a="http://schemas.openxmlformats.org/drawingml/2006/main">
-            <a:pPr algn="l">
-              <a:lnSpc>
-                <a:spcPct val="115000"/>
-              </a:lnSpc>
-              <a:buNone/>
-              <a:defRPr sz="1650" b="1">
-                <a:solidFill>
-                  <a:srgbClr val="15221D"/>
-                </a:solidFill>
-                <a:latin typeface="PingFang SC"/>
-                <a:ea typeface="PingFang SC"/>
-                <a:cs typeface="PingFang SC"/>
-              </a:defRPr>
-            </a:pPr>
-            <a:r>
-              <a:rPr sz="1650" b="1">
-                <a:solidFill>
-                  <a:srgbClr val="15221D"/>
-                </a:solidFill>
-                <a:latin typeface="PingFang SC"/>
-                <a:ea typeface="PingFang SC"/>
-                <a:cs typeface="PingFang SC"/>
-              </a:rPr>
-              <a:t>学习规划</a:t>
-            </a:r>
-          </a:p>
-        </p:txBody>
-      </p:sp>
-      <p:sp>
-        <p:nvSpPr>
-          <p:cNvPr id="26" name="">
-            <a:extLst xmlns:a="http://schemas.openxmlformats.org/drawingml/2006/main">
-              <a:ext uri="{FF2B5EF4-FFF2-40B4-BE49-F238E27FC236}">
-                <a16:creationId xmlns:a16="http://schemas.microsoft.com/office/drawing/2014/main" id="{3EF00832-50CF-4852-A375-EFFE74AF9EBD}"/>
-              </a:ext>
-            </a:extLst>
-          </p:cNvPr>
-          <p:cNvSpPr>
-            <a:spLocks xmlns:a="http://schemas.openxmlformats.org/drawingml/2006/main" noGrp="1"/>
-          </p:cNvSpPr>
-          <p:nvPr/>
-        </p:nvSpPr>
-        <p:spPr>
-          <a:xfrm xmlns:a="http://schemas.openxmlformats.org/drawingml/2006/main">
-            <a:off x="4457700" y="3676650"/>
-            <a:ext cx="1952625" cy="190500"/>
-          </a:xfrm>
-          <a:prstGeom xmlns:a="http://schemas.openxmlformats.org/drawingml/2006/main" prst="rect">
-            <a:avLst/>
-          </a:prstGeom>
-          <a:noFill xmlns:a="http://schemas.openxmlformats.org/drawingml/2006/main"/>
-          <a:ln xmlns:a="http://schemas.openxmlformats.org/drawingml/2006/main" w="0">
-            <a:noFill/>
-            <a:prstDash val="solid"/>
-          </a:ln>
-        </p:spPr>
-        <p:txBody>
-          <a:bodyPr xmlns:a="http://schemas.openxmlformats.org/drawingml/2006/main" wrap="square" lIns="0" tIns="0" rIns="0" bIns="0" anchor="t">
-            <a:noAutofit/>
-          </a:bodyPr>
-          <a:lstStyle xmlns:a="http://schemas.openxmlformats.org/drawingml/2006/main"/>
-          <a:p xmlns:a="http://schemas.openxmlformats.org/drawingml/2006/main">
-            <a:pPr algn="l">
-              <a:lnSpc>
-                <a:spcPct val="115000"/>
-              </a:lnSpc>
-              <a:buNone/>
-              <a:defRPr sz="1050" b="0">
-                <a:solidFill>
-                  <a:srgbClr val="6D7C73"/>
-                </a:solidFill>
-                <a:latin typeface="PingFang SC"/>
-                <a:ea typeface="PingFang SC"/>
-                <a:cs typeface="PingFang SC"/>
-              </a:defRPr>
-            </a:pPr>
-            <a:r>
-              <a:rPr sz="1050" b="0">
-                <a:solidFill>
-                  <a:srgbClr val="6D7C73"/>
-                </a:solidFill>
-                <a:latin typeface="PingFang SC"/>
-                <a:ea typeface="PingFang SC"/>
-                <a:cs typeface="PingFang SC"/>
-              </a:rPr>
-              <a:t>多任务 · 项目 · 长期目标</a:t>
-            </a:r>
-          </a:p>
-        </p:txBody>
-      </p:sp>
-      <p:sp>
-        <p:nvSpPr>
-          <p:cNvPr id="27" name="">
-            <a:extLst xmlns:a="http://schemas.openxmlformats.org/drawingml/2006/main">
-              <a:ext uri="{FF2B5EF4-FFF2-40B4-BE49-F238E27FC236}">
-                <a16:creationId xmlns:a16="http://schemas.microsoft.com/office/drawing/2014/main" id="{B8392BA3-256E-429E-9040-D22FC013A594}"/>
-              </a:ext>
-            </a:extLst>
-          </p:cNvPr>
-          <p:cNvSpPr>
-            <a:spLocks xmlns:a="http://schemas.openxmlformats.org/drawingml/2006/main" noGrp="1"/>
-          </p:cNvSpPr>
-          <p:nvPr/>
-        </p:nvSpPr>
-        <p:spPr>
-          <a:xfrm xmlns:a="http://schemas.openxmlformats.org/drawingml/2006/main">
-            <a:off x="6315075" y="3676650"/>
-            <a:ext cx="914400" cy="190500"/>
-          </a:xfrm>
-          <a:prstGeom xmlns:a="http://schemas.openxmlformats.org/drawingml/2006/main" prst="rect">
-            <a:avLst/>
-          </a:prstGeom>
-          <a:noFill xmlns:a="http://schemas.openxmlformats.org/drawingml/2006/main"/>
-          <a:ln xmlns:a="http://schemas.openxmlformats.org/drawingml/2006/main" w="0">
-            <a:noFill/>
-            <a:prstDash val="solid"/>
-          </a:ln>
-        </p:spPr>
-        <p:txBody>
-          <a:bodyPr xmlns:a="http://schemas.openxmlformats.org/drawingml/2006/main" wrap="square" lIns="0" tIns="0" rIns="0" bIns="0" anchor="t">
-            <a:noAutofit/>
-          </a:bodyPr>
-          <a:lstStyle xmlns:a="http://schemas.openxmlformats.org/drawingml/2006/main"/>
-          <a:p xmlns:a="http://schemas.openxmlformats.org/drawingml/2006/main">
-            <a:pPr algn="r">
-              <a:lnSpc>
-                <a:spcPct val="115000"/>
-              </a:lnSpc>
-              <a:buNone/>
-              <a:defRPr sz="975" b="1">
+              <a:t>propose_project_roadmap</a:t>
+            </a:r>
+          </a:p>
+          <a:p xmlns:a="http://schemas.openxmlformats.org/drawingml/2006/main">
+            <a:pPr algn="l">
+              <a:lnSpc>
+                <a:spcPct val="108000"/>
+              </a:lnSpc>
+              <a:buNone/>
+              <a:defRPr sz="840" b="0">
                 <a:solidFill>
                   <a:srgbClr val="64529B"/>
-                </a:solidFill>
-                <a:latin typeface="PingFang SC"/>
-                <a:ea typeface="PingFang SC"/>
-                <a:cs typeface="PingFang SC"/>
-              </a:defRPr>
-            </a:pPr>
-            <a:r>
-              <a:rPr sz="975" b="1">
-                <a:solidFill>
-                  <a:srgbClr val="64529B"/>
-                </a:solidFill>
-                <a:latin typeface="PingFang SC"/>
-                <a:ea typeface="PingFang SC"/>
-                <a:cs typeface="PingFang SC"/>
-              </a:rPr>
-              <a:t>提案后返回</a:t>
-            </a:r>
-          </a:p>
-        </p:txBody>
-      </p:sp>
-      <p:cxnSp>
-        <p:nvCxnSpPr>
-          <p:cNvPr id="84" name=""/>
-          <p:cNvCxnSpPr>
-            <a:stCxn xmlns:a="http://schemas.openxmlformats.org/drawingml/2006/main" id="6" idx="3"/>
-            <a:endCxn xmlns:a="http://schemas.openxmlformats.org/drawingml/2006/main" id="23" idx="1"/>
-          </p:cNvCxnSpPr>
-          <p:nvPr/>
-        </p:nvCxnSpPr>
-        <p:spPr>
-          <a:xfrm xmlns:a="http://schemas.openxmlformats.org/drawingml/2006/main">
-            <a:off x="3371850" y="2747963"/>
-            <a:ext cx="914400" cy="862013"/>
-          </a:xfrm>
-          <a:prstGeom xmlns:a="http://schemas.openxmlformats.org/drawingml/2006/main" prst="bentConnector3">
-            <a:avLst>
-              <a:gd name="adj1" fmla="val 50000"/>
-            </a:avLst>
-          </a:prstGeom>
-          <a:ln xmlns:a="http://schemas.openxmlformats.org/drawingml/2006/main" w="20955">
-            <a:solidFill>
-              <a:srgbClr val="64529B"/>
-            </a:solidFill>
-            <a:prstDash val="solid"/>
-            <a:headEnd type="none" w="med" len="med"/>
-            <a:tailEnd type="arrow" w="med" len="med"/>
-          </a:ln>
-        </p:spPr>
-      </p:cxnSp>
-      <p:sp>
-        <p:nvSpPr>
-          <p:cNvPr id="29" name="">
-            <a:extLst xmlns:a="http://schemas.openxmlformats.org/drawingml/2006/main">
-              <a:ext uri="{FF2B5EF4-FFF2-40B4-BE49-F238E27FC236}">
-                <a16:creationId xmlns:a16="http://schemas.microsoft.com/office/drawing/2014/main" id="{BF1C15A8-A82C-4958-BCF9-E06AD2D18DC0}"/>
-              </a:ext>
-            </a:extLst>
-          </p:cNvPr>
-          <p:cNvSpPr>
-            <a:spLocks xmlns:a="http://schemas.openxmlformats.org/drawingml/2006/main" noGrp="1"/>
-          </p:cNvSpPr>
-          <p:nvPr/>
-        </p:nvSpPr>
-        <p:spPr>
-          <a:xfrm xmlns:a="http://schemas.openxmlformats.org/drawingml/2006/main">
-            <a:off x="7867650" y="1466850"/>
-            <a:ext cx="3676650" cy="742950"/>
-          </a:xfrm>
-          <a:prstGeom xmlns:a="http://schemas.openxmlformats.org/drawingml/2006/main" prst="roundRect">
-            <a:avLst>
-              <a:gd name="adj" fmla="val 20513"/>
-            </a:avLst>
-          </a:prstGeom>
-          <a:solidFill xmlns:a="http://schemas.openxmlformats.org/drawingml/2006/main">
-            <a:srgbClr val="FFFFFF"/>
-          </a:solidFill>
-          <a:ln xmlns:a="http://schemas.openxmlformats.org/drawingml/2006/main" w="10478">
-            <a:solidFill>
-              <a:srgbClr val="9B6D12"/>
-            </a:solidFill>
-            <a:prstDash val="solid"/>
-          </a:ln>
-        </p:spPr>
-      </p:sp>
-      <p:sp>
-        <p:nvSpPr>
-          <p:cNvPr id="30" name="">
-            <a:extLst xmlns:a="http://schemas.openxmlformats.org/drawingml/2006/main">
-              <a:ext uri="{FF2B5EF4-FFF2-40B4-BE49-F238E27FC236}">
-                <a16:creationId xmlns:a16="http://schemas.microsoft.com/office/drawing/2014/main" id="{3AFF2915-B789-403E-BED8-57F9418E1CDA}"/>
-              </a:ext>
-            </a:extLst>
-          </p:cNvPr>
-          <p:cNvSpPr>
-            <a:spLocks xmlns:a="http://schemas.openxmlformats.org/drawingml/2006/main" noGrp="1"/>
-          </p:cNvSpPr>
-          <p:nvPr/>
-        </p:nvSpPr>
-        <p:spPr>
-          <a:xfrm xmlns:a="http://schemas.openxmlformats.org/drawingml/2006/main">
-            <a:off x="7867650" y="1466850"/>
-            <a:ext cx="66675" cy="742950"/>
-          </a:xfrm>
-          <a:prstGeom xmlns:a="http://schemas.openxmlformats.org/drawingml/2006/main" prst="rect">
-            <a:avLst/>
-          </a:prstGeom>
-          <a:solidFill xmlns:a="http://schemas.openxmlformats.org/drawingml/2006/main">
-            <a:srgbClr val="9B6D12"/>
-          </a:solidFill>
-          <a:ln xmlns:a="http://schemas.openxmlformats.org/drawingml/2006/main" w="0">
-            <a:solidFill>
-              <a:srgbClr val="9B6D12"/>
-            </a:solidFill>
-            <a:prstDash val="solid"/>
-          </a:ln>
-        </p:spPr>
-      </p:sp>
-      <p:sp>
-        <p:nvSpPr>
-          <p:cNvPr id="31" name="">
-            <a:extLst xmlns:a="http://schemas.openxmlformats.org/drawingml/2006/main">
-              <a:ext uri="{FF2B5EF4-FFF2-40B4-BE49-F238E27FC236}">
-                <a16:creationId xmlns:a16="http://schemas.microsoft.com/office/drawing/2014/main" id="{7342387A-EE30-44F1-BBE0-BA6A09E8D31B}"/>
-              </a:ext>
-            </a:extLst>
-          </p:cNvPr>
-          <p:cNvSpPr>
-            <a:spLocks xmlns:a="http://schemas.openxmlformats.org/drawingml/2006/main" noGrp="1"/>
-          </p:cNvSpPr>
-          <p:nvPr/>
-        </p:nvSpPr>
-        <p:spPr>
-          <a:xfrm xmlns:a="http://schemas.openxmlformats.org/drawingml/2006/main">
-            <a:off x="8058150" y="1571625"/>
-            <a:ext cx="1752600" cy="238125"/>
-          </a:xfrm>
-          <a:prstGeom xmlns:a="http://schemas.openxmlformats.org/drawingml/2006/main" prst="rect">
-            <a:avLst/>
-          </a:prstGeom>
-          <a:noFill xmlns:a="http://schemas.openxmlformats.org/drawingml/2006/main"/>
-          <a:ln xmlns:a="http://schemas.openxmlformats.org/drawingml/2006/main" w="0">
-            <a:noFill/>
-            <a:prstDash val="solid"/>
-          </a:ln>
-        </p:spPr>
-        <p:txBody>
-          <a:bodyPr xmlns:a="http://schemas.openxmlformats.org/drawingml/2006/main" wrap="square" lIns="0" tIns="0" rIns="0" bIns="0" anchor="t">
-            <a:noAutofit/>
-          </a:bodyPr>
-          <a:lstStyle xmlns:a="http://schemas.openxmlformats.org/drawingml/2006/main"/>
-          <a:p xmlns:a="http://schemas.openxmlformats.org/drawingml/2006/main">
-            <a:pPr algn="l">
-              <a:lnSpc>
-                <a:spcPct val="115000"/>
-              </a:lnSpc>
-              <a:buNone/>
-              <a:defRPr sz="1200" b="1">
-                <a:solidFill>
-                  <a:srgbClr val="15221D"/>
-                </a:solidFill>
-                <a:latin typeface="PingFang SC"/>
-                <a:ea typeface="PingFang SC"/>
-                <a:cs typeface="PingFang SC"/>
-              </a:defRPr>
-            </a:pPr>
-            <a:r>
-              <a:rPr sz="1200" b="1">
-                <a:solidFill>
-                  <a:srgbClr val="15221D"/>
-                </a:solidFill>
-                <a:latin typeface="PingFang SC"/>
-                <a:ea typeface="PingFang SC"/>
-                <a:cs typeface="PingFang SC"/>
-              </a:rPr>
-              <a:t>资料 / 搜索 / 图解</a:t>
-            </a:r>
-          </a:p>
-        </p:txBody>
-      </p:sp>
-      <p:sp>
-        <p:nvSpPr>
-          <p:cNvPr id="32" name="">
-            <a:extLst xmlns:a="http://schemas.openxmlformats.org/drawingml/2006/main">
-              <a:ext uri="{FF2B5EF4-FFF2-40B4-BE49-F238E27FC236}">
-                <a16:creationId xmlns:a16="http://schemas.microsoft.com/office/drawing/2014/main" id="{BB6B7592-713E-4BF4-B40F-9A2C0DDAAD17}"/>
-              </a:ext>
-            </a:extLst>
-          </p:cNvPr>
-          <p:cNvSpPr>
-            <a:spLocks xmlns:a="http://schemas.openxmlformats.org/drawingml/2006/main" noGrp="1"/>
-          </p:cNvSpPr>
-          <p:nvPr/>
-        </p:nvSpPr>
-        <p:spPr>
-          <a:xfrm xmlns:a="http://schemas.openxmlformats.org/drawingml/2006/main">
-            <a:off x="8058150" y="1885950"/>
-            <a:ext cx="1752600" cy="171450"/>
-          </a:xfrm>
-          <a:prstGeom xmlns:a="http://schemas.openxmlformats.org/drawingml/2006/main" prst="rect">
-            <a:avLst/>
-          </a:prstGeom>
-          <a:noFill xmlns:a="http://schemas.openxmlformats.org/drawingml/2006/main"/>
-          <a:ln xmlns:a="http://schemas.openxmlformats.org/drawingml/2006/main" w="0">
-            <a:noFill/>
-            <a:prstDash val="solid"/>
-          </a:ln>
-        </p:spPr>
-        <p:txBody>
-          <a:bodyPr xmlns:a="http://schemas.openxmlformats.org/drawingml/2006/main" wrap="square" lIns="0" tIns="0" rIns="0" bIns="0" anchor="t">
-            <a:noAutofit/>
-          </a:bodyPr>
-          <a:lstStyle xmlns:a="http://schemas.openxmlformats.org/drawingml/2006/main"/>
-          <a:p xmlns:a="http://schemas.openxmlformats.org/drawingml/2006/main">
-            <a:pPr algn="l">
-              <a:lnSpc>
-                <a:spcPct val="115000"/>
-              </a:lnSpc>
-              <a:buNone/>
-              <a:defRPr sz="825" b="0">
-                <a:solidFill>
-                  <a:srgbClr val="9B6D12"/>
                 </a:solidFill>
                 <a:latin typeface="SFMono-Regular"/>
                 <a:ea typeface="SFMono-Regular"/>
@@ -5971,37 +8020,37 @@
               </a:defRPr>
             </a:pPr>
             <a:r>
-              <a:rPr sz="825" b="0">
-                <a:solidFill>
-                  <a:srgbClr val="9B6D12"/>
+              <a:rPr sz="840" b="0">
+                <a:solidFill>
+                  <a:srgbClr val="64529B"/>
                 </a:solidFill>
                 <a:latin typeface="SFMono-Regular"/>
                 <a:ea typeface="SFMono-Regular"/>
                 <a:cs typeface="SFMono-Regular"/>
               </a:rPr>
-              <a:t>domain reader · search · visual</a:t>
-            </a:r>
-          </a:p>
-        </p:txBody>
-      </p:sp>
-      <p:sp>
-        <p:nvSpPr>
-          <p:cNvPr id="33" name="">
-            <a:extLst xmlns:a="http://schemas.openxmlformats.org/drawingml/2006/main">
-              <a:ext uri="{FF2B5EF4-FFF2-40B4-BE49-F238E27FC236}">
-                <a16:creationId xmlns:a16="http://schemas.microsoft.com/office/drawing/2014/main" id="{112EBA56-C78E-456D-B2D4-3BD37CBD62D1}"/>
-              </a:ext>
-            </a:extLst>
-          </p:cNvPr>
-          <p:cNvSpPr>
-            <a:spLocks xmlns:a="http://schemas.openxmlformats.org/drawingml/2006/main" noGrp="1"/>
-          </p:cNvSpPr>
-          <p:nvPr/>
-        </p:nvSpPr>
-        <p:spPr>
-          <a:xfrm xmlns:a="http://schemas.openxmlformats.org/drawingml/2006/main">
-            <a:off x="9801225" y="1676400"/>
-            <a:ext cx="304800" cy="285750"/>
+              <a:t>propose_project_learning_files</a:t>
+            </a:r>
+          </a:p>
+        </p:txBody>
+      </p:sp>
+      <p:sp>
+        <p:nvSpPr>
+          <p:cNvPr id="119" name="">
+            <a:extLst xmlns:a="http://schemas.openxmlformats.org/drawingml/2006/main">
+              <a:ext uri="{FF2B5EF4-FFF2-40B4-BE49-F238E27FC236}">
+                <a16:creationId xmlns:a16="http://schemas.microsoft.com/office/drawing/2014/main" id="{EBB1BA6C-1EFC-4118-9B7A-39D7389B974C}"/>
+              </a:ext>
+            </a:extLst>
+          </p:cNvPr>
+          <p:cNvSpPr>
+            <a:spLocks xmlns:a="http://schemas.openxmlformats.org/drawingml/2006/main" noGrp="1"/>
+          </p:cNvSpPr>
+          <p:nvPr/>
+        </p:nvSpPr>
+        <p:spPr>
+          <a:xfrm xmlns:a="http://schemas.openxmlformats.org/drawingml/2006/main">
+            <a:off x="4343400" y="5276850"/>
+            <a:ext cx="1924050" cy="514350"/>
           </a:xfrm>
           <a:prstGeom xmlns:a="http://schemas.openxmlformats.org/drawingml/2006/main" prst="rect">
             <a:avLst/>
@@ -6018,52 +8067,79 @@
           </a:bodyPr>
           <a:lstStyle xmlns:a="http://schemas.openxmlformats.org/drawingml/2006/main"/>
           <a:p xmlns:a="http://schemas.openxmlformats.org/drawingml/2006/main">
-            <a:pPr algn="ctr">
-              <a:lnSpc>
-                <a:spcPct val="115000"/>
-              </a:lnSpc>
-              <a:buNone/>
-              <a:defRPr sz="1650" b="1">
-                <a:solidFill>
-                  <a:srgbClr val="9B6D12"/>
-                </a:solidFill>
-                <a:latin typeface="PingFang SC"/>
-                <a:ea typeface="PingFang SC"/>
-                <a:cs typeface="PingFang SC"/>
-              </a:defRPr>
-            </a:pPr>
-            <a:r>
-              <a:rPr sz="1650" b="1">
-                <a:solidFill>
-                  <a:srgbClr val="9B6D12"/>
-                </a:solidFill>
-                <a:latin typeface="PingFang SC"/>
-                <a:ea typeface="PingFang SC"/>
-                <a:cs typeface="PingFang SC"/>
-              </a:rPr>
-              <a:t>→</a:t>
-            </a:r>
-          </a:p>
-        </p:txBody>
-      </p:sp>
-      <p:sp>
-        <p:nvSpPr>
-          <p:cNvPr id="34" name="">
-            <a:extLst xmlns:a="http://schemas.openxmlformats.org/drawingml/2006/main">
-              <a:ext uri="{FF2B5EF4-FFF2-40B4-BE49-F238E27FC236}">
-                <a16:creationId xmlns:a16="http://schemas.microsoft.com/office/drawing/2014/main" id="{BC9E6933-EB8D-4DE5-874E-767D29553311}"/>
-              </a:ext>
-            </a:extLst>
-          </p:cNvPr>
-          <p:cNvSpPr>
-            <a:spLocks xmlns:a="http://schemas.openxmlformats.org/drawingml/2006/main" noGrp="1"/>
-          </p:cNvSpPr>
-          <p:nvPr/>
-        </p:nvSpPr>
-        <p:spPr>
-          <a:xfrm xmlns:a="http://schemas.openxmlformats.org/drawingml/2006/main">
-            <a:off x="10172700" y="1562100"/>
-            <a:ext cx="1219200" cy="523875"/>
+            <a:pPr algn="l">
+              <a:lnSpc>
+                <a:spcPct val="120000"/>
+              </a:lnSpc>
+              <a:buNone/>
+              <a:defRPr sz="1065" b="0">
+                <a:solidFill>
+                  <a:srgbClr val="6D7C73"/>
+                </a:solidFill>
+                <a:latin typeface="PingFang SC"/>
+                <a:ea typeface="PingFang SC"/>
+                <a:cs typeface="PingFang SC"/>
+              </a:defRPr>
+            </a:pPr>
+            <a:r>
+              <a:rPr sz="1065" b="0">
+                <a:solidFill>
+                  <a:srgbClr val="6D7C73"/>
+                </a:solidFill>
+                <a:latin typeface="PingFang SC"/>
+                <a:ea typeface="PingFang SC"/>
+                <a:cs typeface="PingFang SC"/>
+              </a:rPr>
+              <a:t>plan 修订路线；</a:t>
+            </a:r>
+          </a:p>
+          <a:p xmlns:a="http://schemas.openxmlformats.org/drawingml/2006/main">
+            <a:pPr algn="l">
+              <a:lnSpc>
+                <a:spcPct val="120000"/>
+              </a:lnSpc>
+              <a:buNone/>
+              <a:defRPr sz="1065" b="0">
+                <a:solidFill>
+                  <a:srgbClr val="6D7C73"/>
+                </a:solidFill>
+                <a:latin typeface="PingFang SC"/>
+                <a:ea typeface="PingFang SC"/>
+                <a:cs typeface="PingFang SC"/>
+              </a:defRPr>
+            </a:pPr>
+            <a:r>
+              <a:rPr sz="1065" b="0">
+                <a:solidFill>
+                  <a:srgbClr val="6D7C73"/>
+                </a:solidFill>
+                <a:latin typeface="PingFang SC"/>
+                <a:ea typeface="PingFang SC"/>
+                <a:cs typeface="PingFang SC"/>
+              </a:rPr>
+              <a:t>learn 申请讲义 / 练习</a:t>
+            </a:r>
+          </a:p>
+        </p:txBody>
+      </p:sp>
+      <p:sp>
+        <p:nvSpPr>
+          <p:cNvPr id="120" name="">
+            <a:extLst xmlns:a="http://schemas.openxmlformats.org/drawingml/2006/main">
+              <a:ext uri="{FF2B5EF4-FFF2-40B4-BE49-F238E27FC236}">
+                <a16:creationId xmlns:a16="http://schemas.microsoft.com/office/drawing/2014/main" id="{E55632F0-8136-4FDE-ADB7-2A6E52E58125}"/>
+              </a:ext>
+            </a:extLst>
+          </p:cNvPr>
+          <p:cNvSpPr>
+            <a:spLocks xmlns:a="http://schemas.openxmlformats.org/drawingml/2006/main" noGrp="1"/>
+          </p:cNvSpPr>
+          <p:nvPr/>
+        </p:nvSpPr>
+        <p:spPr>
+          <a:xfrm xmlns:a="http://schemas.openxmlformats.org/drawingml/2006/main">
+            <a:off x="6534150" y="5276850"/>
+            <a:ext cx="3162300" cy="514350"/>
           </a:xfrm>
           <a:prstGeom xmlns:a="http://schemas.openxmlformats.org/drawingml/2006/main" prst="rect">
             <a:avLst/>
@@ -6085,228 +8161,9 @@
                 <a:spcPct val="116000"/>
               </a:lnSpc>
               <a:buNone/>
-              <a:defRPr sz="1013" b="1">
-                <a:solidFill>
-                  <a:srgbClr val="6D7C73"/>
-                </a:solidFill>
-                <a:latin typeface="PingFang SC"/>
-                <a:ea typeface="PingFang SC"/>
-                <a:cs typeface="PingFang SC"/>
-              </a:defRPr>
-            </a:pPr>
-            <a:r>
-              <a:rPr sz="1013" b="1">
-                <a:solidFill>
-                  <a:srgbClr val="6D7C73"/>
-                </a:solidFill>
-                <a:latin typeface="PingFang SC"/>
-                <a:ea typeface="PingFang SC"/>
-                <a:cs typeface="PingFang SC"/>
-              </a:rPr>
-              <a:t>Source · Chunk</a:t>
-            </a:r>
-          </a:p>
-          <a:p xmlns:a="http://schemas.openxmlformats.org/drawingml/2006/main">
-            <a:pPr algn="l">
-              <a:lnSpc>
-                <a:spcPct val="116000"/>
-              </a:lnSpc>
-              <a:buNone/>
-              <a:defRPr sz="1013" b="1">
-                <a:solidFill>
-                  <a:srgbClr val="6D7C73"/>
-                </a:solidFill>
-                <a:latin typeface="PingFang SC"/>
-                <a:ea typeface="PingFang SC"/>
-                <a:cs typeface="PingFang SC"/>
-              </a:defRPr>
-            </a:pPr>
-            <a:r>
-              <a:rPr sz="1013" b="1">
-                <a:solidFill>
-                  <a:srgbClr val="6D7C73"/>
-                </a:solidFill>
-                <a:latin typeface="PingFang SC"/>
-                <a:ea typeface="PingFang SC"/>
-                <a:cs typeface="PingFang SC"/>
-              </a:rPr>
-              <a:t>Evidence · SVG</a:t>
-            </a:r>
-          </a:p>
-        </p:txBody>
-      </p:sp>
-      <p:sp>
-        <p:nvSpPr>
-          <p:cNvPr id="35" name="">
-            <a:extLst xmlns:a="http://schemas.openxmlformats.org/drawingml/2006/main">
-              <a:ext uri="{FF2B5EF4-FFF2-40B4-BE49-F238E27FC236}">
-                <a16:creationId xmlns:a16="http://schemas.microsoft.com/office/drawing/2014/main" id="{C468DB4A-880D-44B5-B5BC-07EDAB7B9199}"/>
-              </a:ext>
-            </a:extLst>
-          </p:cNvPr>
-          <p:cNvSpPr>
-            <a:spLocks xmlns:a="http://schemas.openxmlformats.org/drawingml/2006/main" noGrp="1"/>
-          </p:cNvSpPr>
-          <p:nvPr/>
-        </p:nvSpPr>
-        <p:spPr>
-          <a:xfrm xmlns:a="http://schemas.openxmlformats.org/drawingml/2006/main">
-            <a:off x="7867650" y="2352675"/>
-            <a:ext cx="3676650" cy="742950"/>
-          </a:xfrm>
-          <a:prstGeom xmlns:a="http://schemas.openxmlformats.org/drawingml/2006/main" prst="roundRect">
-            <a:avLst>
-              <a:gd name="adj" fmla="val 20513"/>
-            </a:avLst>
-          </a:prstGeom>
-          <a:solidFill xmlns:a="http://schemas.openxmlformats.org/drawingml/2006/main">
-            <a:srgbClr val="FFFFFF"/>
-          </a:solidFill>
-          <a:ln xmlns:a="http://schemas.openxmlformats.org/drawingml/2006/main" w="10478">
-            <a:solidFill>
-              <a:srgbClr val="315E9D"/>
-            </a:solidFill>
-            <a:prstDash val="solid"/>
-          </a:ln>
-        </p:spPr>
-      </p:sp>
-      <p:sp>
-        <p:nvSpPr>
-          <p:cNvPr id="36" name="">
-            <a:extLst xmlns:a="http://schemas.openxmlformats.org/drawingml/2006/main">
-              <a:ext uri="{FF2B5EF4-FFF2-40B4-BE49-F238E27FC236}">
-                <a16:creationId xmlns:a16="http://schemas.microsoft.com/office/drawing/2014/main" id="{F43E21B4-45B4-4514-A6AC-04D681F23978}"/>
-              </a:ext>
-            </a:extLst>
-          </p:cNvPr>
-          <p:cNvSpPr>
-            <a:spLocks xmlns:a="http://schemas.openxmlformats.org/drawingml/2006/main" noGrp="1"/>
-          </p:cNvSpPr>
-          <p:nvPr/>
-        </p:nvSpPr>
-        <p:spPr>
-          <a:xfrm xmlns:a="http://schemas.openxmlformats.org/drawingml/2006/main">
-            <a:off x="7867650" y="2352675"/>
-            <a:ext cx="66675" cy="742950"/>
-          </a:xfrm>
-          <a:prstGeom xmlns:a="http://schemas.openxmlformats.org/drawingml/2006/main" prst="rect">
-            <a:avLst/>
-          </a:prstGeom>
-          <a:solidFill xmlns:a="http://schemas.openxmlformats.org/drawingml/2006/main">
-            <a:srgbClr val="315E9D"/>
-          </a:solidFill>
-          <a:ln xmlns:a="http://schemas.openxmlformats.org/drawingml/2006/main" w="0">
-            <a:solidFill>
-              <a:srgbClr val="315E9D"/>
-            </a:solidFill>
-            <a:prstDash val="solid"/>
-          </a:ln>
-        </p:spPr>
-      </p:sp>
-      <p:sp>
-        <p:nvSpPr>
-          <p:cNvPr id="37" name="">
-            <a:extLst xmlns:a="http://schemas.openxmlformats.org/drawingml/2006/main">
-              <a:ext uri="{FF2B5EF4-FFF2-40B4-BE49-F238E27FC236}">
-                <a16:creationId xmlns:a16="http://schemas.microsoft.com/office/drawing/2014/main" id="{AFCF6177-57E5-438D-928A-6CA3CA28527E}"/>
-              </a:ext>
-            </a:extLst>
-          </p:cNvPr>
-          <p:cNvSpPr>
-            <a:spLocks xmlns:a="http://schemas.openxmlformats.org/drawingml/2006/main" noGrp="1"/>
-          </p:cNvSpPr>
-          <p:nvPr/>
-        </p:nvSpPr>
-        <p:spPr>
-          <a:xfrm xmlns:a="http://schemas.openxmlformats.org/drawingml/2006/main">
-            <a:off x="8058150" y="2457450"/>
-            <a:ext cx="1752600" cy="238125"/>
-          </a:xfrm>
-          <a:prstGeom xmlns:a="http://schemas.openxmlformats.org/drawingml/2006/main" prst="rect">
-            <a:avLst/>
-          </a:prstGeom>
-          <a:noFill xmlns:a="http://schemas.openxmlformats.org/drawingml/2006/main"/>
-          <a:ln xmlns:a="http://schemas.openxmlformats.org/drawingml/2006/main" w="0">
-            <a:noFill/>
-            <a:prstDash val="solid"/>
-          </a:ln>
-        </p:spPr>
-        <p:txBody>
-          <a:bodyPr xmlns:a="http://schemas.openxmlformats.org/drawingml/2006/main" wrap="square" lIns="0" tIns="0" rIns="0" bIns="0" anchor="t">
-            <a:noAutofit/>
-          </a:bodyPr>
-          <a:lstStyle xmlns:a="http://schemas.openxmlformats.org/drawingml/2006/main"/>
-          <a:p xmlns:a="http://schemas.openxmlformats.org/drawingml/2006/main">
-            <a:pPr algn="l">
-              <a:lnSpc>
-                <a:spcPct val="115000"/>
-              </a:lnSpc>
-              <a:buNone/>
-              <a:defRPr sz="1200" b="1">
+              <a:defRPr sz="1058" b="0">
                 <a:solidFill>
                   <a:srgbClr val="15221D"/>
-                </a:solidFill>
-                <a:latin typeface="PingFang SC"/>
-                <a:ea typeface="PingFang SC"/>
-                <a:cs typeface="PingFang SC"/>
-              </a:defRPr>
-            </a:pPr>
-            <a:r>
-              <a:rPr sz="1200" b="1">
-                <a:solidFill>
-                  <a:srgbClr val="15221D"/>
-                </a:solidFill>
-                <a:latin typeface="PingFang SC"/>
-                <a:ea typeface="PingFang SC"/>
-                <a:cs typeface="PingFang SC"/>
-              </a:rPr>
-              <a:t>任务 / 复习 / 文件</a:t>
-            </a:r>
-          </a:p>
-        </p:txBody>
-      </p:sp>
-      <p:sp>
-        <p:nvSpPr>
-          <p:cNvPr id="38" name="">
-            <a:extLst xmlns:a="http://schemas.openxmlformats.org/drawingml/2006/main">
-              <a:ext uri="{FF2B5EF4-FFF2-40B4-BE49-F238E27FC236}">
-                <a16:creationId xmlns:a16="http://schemas.microsoft.com/office/drawing/2014/main" id="{09BA5DAD-65C8-40E8-B1DE-3EF1AF750CF2}"/>
-              </a:ext>
-            </a:extLst>
-          </p:cNvPr>
-          <p:cNvSpPr>
-            <a:spLocks xmlns:a="http://schemas.openxmlformats.org/drawingml/2006/main" noGrp="1"/>
-          </p:cNvSpPr>
-          <p:nvPr/>
-        </p:nvSpPr>
-        <p:spPr>
-          <a:xfrm xmlns:a="http://schemas.openxmlformats.org/drawingml/2006/main">
-            <a:off x="8058150" y="2771775"/>
-            <a:ext cx="1752600" cy="171450"/>
-          </a:xfrm>
-          <a:prstGeom xmlns:a="http://schemas.openxmlformats.org/drawingml/2006/main" prst="rect">
-            <a:avLst/>
-          </a:prstGeom>
-          <a:noFill xmlns:a="http://schemas.openxmlformats.org/drawingml/2006/main"/>
-          <a:ln xmlns:a="http://schemas.openxmlformats.org/drawingml/2006/main" w="0">
-            <a:noFill/>
-            <a:prstDash val="solid"/>
-          </a:ln>
-        </p:spPr>
-        <p:txBody>
-          <a:bodyPr xmlns:a="http://schemas.openxmlformats.org/drawingml/2006/main" wrap="square" lIns="0" tIns="0" rIns="0" bIns="0" anchor="t">
-            <a:noAutofit/>
-          </a:bodyPr>
-          <a:lstStyle xmlns:a="http://schemas.openxmlformats.org/drawingml/2006/main"/>
-          <a:p xmlns:a="http://schemas.openxmlformats.org/drawingml/2006/main">
-            <a:pPr algn="l">
-              <a:lnSpc>
-                <a:spcPct val="115000"/>
-              </a:lnSpc>
-              <a:buNone/>
-              <a:defRPr sz="825" b="0">
-                <a:solidFill>
-                  <a:srgbClr val="315E9D"/>
                 </a:solidFill>
                 <a:latin typeface="SFMono-Regular"/>
                 <a:ea typeface="SFMono-Regular"/>
@@ -6314,342 +8171,26 @@
               </a:defRPr>
             </a:pPr>
             <a:r>
-              <a:rPr sz="825" b="0">
-                <a:solidFill>
-                  <a:srgbClr val="315E9D"/>
+              <a:rPr sz="1058" b="0">
+                <a:solidFill>
+                  <a:srgbClr val="15221D"/>
                 </a:solidFill>
                 <a:latin typeface="SFMono-Regular"/>
                 <a:ea typeface="SFMono-Regular"/>
                 <a:cs typeface="SFMono-Regular"/>
               </a:rPr>
-              <a:t>workspace · review · file</a:t>
-            </a:r>
-          </a:p>
-        </p:txBody>
-      </p:sp>
-      <p:sp>
-        <p:nvSpPr>
-          <p:cNvPr id="39" name="">
-            <a:extLst xmlns:a="http://schemas.openxmlformats.org/drawingml/2006/main">
-              <a:ext uri="{FF2B5EF4-FFF2-40B4-BE49-F238E27FC236}">
-                <a16:creationId xmlns:a16="http://schemas.microsoft.com/office/drawing/2014/main" id="{27FD194C-340B-4471-9617-7C0D0426827B}"/>
-              </a:ext>
-            </a:extLst>
-          </p:cNvPr>
-          <p:cNvSpPr>
-            <a:spLocks xmlns:a="http://schemas.openxmlformats.org/drawingml/2006/main" noGrp="1"/>
-          </p:cNvSpPr>
-          <p:nvPr/>
-        </p:nvSpPr>
-        <p:spPr>
-          <a:xfrm xmlns:a="http://schemas.openxmlformats.org/drawingml/2006/main">
-            <a:off x="9801225" y="2562225"/>
-            <a:ext cx="304800" cy="285750"/>
-          </a:xfrm>
-          <a:prstGeom xmlns:a="http://schemas.openxmlformats.org/drawingml/2006/main" prst="rect">
-            <a:avLst/>
-          </a:prstGeom>
-          <a:noFill xmlns:a="http://schemas.openxmlformats.org/drawingml/2006/main"/>
-          <a:ln xmlns:a="http://schemas.openxmlformats.org/drawingml/2006/main" w="0">
-            <a:noFill/>
-            <a:prstDash val="solid"/>
-          </a:ln>
-        </p:spPr>
-        <p:txBody>
-          <a:bodyPr xmlns:a="http://schemas.openxmlformats.org/drawingml/2006/main" wrap="square" lIns="0" tIns="0" rIns="0" bIns="0" anchor="t">
-            <a:noAutofit/>
-          </a:bodyPr>
-          <a:lstStyle xmlns:a="http://schemas.openxmlformats.org/drawingml/2006/main"/>
-          <a:p xmlns:a="http://schemas.openxmlformats.org/drawingml/2006/main">
-            <a:pPr algn="ctr">
-              <a:lnSpc>
-                <a:spcPct val="115000"/>
-              </a:lnSpc>
-              <a:buNone/>
-              <a:defRPr sz="1650" b="1">
-                <a:solidFill>
-                  <a:srgbClr val="315E9D"/>
-                </a:solidFill>
-                <a:latin typeface="PingFang SC"/>
-                <a:ea typeface="PingFang SC"/>
-                <a:cs typeface="PingFang SC"/>
-              </a:defRPr>
-            </a:pPr>
-            <a:r>
-              <a:rPr sz="1650" b="1">
-                <a:solidFill>
-                  <a:srgbClr val="315E9D"/>
-                </a:solidFill>
-                <a:latin typeface="PingFang SC"/>
-                <a:ea typeface="PingFang SC"/>
-                <a:cs typeface="PingFang SC"/>
-              </a:rPr>
-              <a:t>→</a:t>
-            </a:r>
-          </a:p>
-        </p:txBody>
-      </p:sp>
-      <p:sp>
-        <p:nvSpPr>
-          <p:cNvPr id="40" name="">
-            <a:extLst xmlns:a="http://schemas.openxmlformats.org/drawingml/2006/main">
-              <a:ext uri="{FF2B5EF4-FFF2-40B4-BE49-F238E27FC236}">
-                <a16:creationId xmlns:a16="http://schemas.microsoft.com/office/drawing/2014/main" id="{37CAD6D1-16A2-4A3A-BED9-9315E35E2F31}"/>
-              </a:ext>
-            </a:extLst>
-          </p:cNvPr>
-          <p:cNvSpPr>
-            <a:spLocks xmlns:a="http://schemas.openxmlformats.org/drawingml/2006/main" noGrp="1"/>
-          </p:cNvSpPr>
-          <p:nvPr/>
-        </p:nvSpPr>
-        <p:spPr>
-          <a:xfrm xmlns:a="http://schemas.openxmlformats.org/drawingml/2006/main">
-            <a:off x="10172700" y="2447925"/>
-            <a:ext cx="1219200" cy="523875"/>
-          </a:xfrm>
-          <a:prstGeom xmlns:a="http://schemas.openxmlformats.org/drawingml/2006/main" prst="rect">
-            <a:avLst/>
-          </a:prstGeom>
-          <a:noFill xmlns:a="http://schemas.openxmlformats.org/drawingml/2006/main"/>
-          <a:ln xmlns:a="http://schemas.openxmlformats.org/drawingml/2006/main" w="0">
-            <a:noFill/>
-            <a:prstDash val="solid"/>
-          </a:ln>
-        </p:spPr>
-        <p:txBody>
-          <a:bodyPr xmlns:a="http://schemas.openxmlformats.org/drawingml/2006/main" wrap="square" lIns="0" tIns="0" rIns="0" bIns="0" anchor="t">
-            <a:noAutofit/>
-          </a:bodyPr>
-          <a:lstStyle xmlns:a="http://schemas.openxmlformats.org/drawingml/2006/main"/>
+              <a:t>Roadmap proposal</a:t>
+            </a:r>
+          </a:p>
           <a:p xmlns:a="http://schemas.openxmlformats.org/drawingml/2006/main">
             <a:pPr algn="l">
               <a:lnSpc>
                 <a:spcPct val="116000"/>
               </a:lnSpc>
               <a:buNone/>
-              <a:defRPr sz="1013" b="1">
-                <a:solidFill>
-                  <a:srgbClr val="6D7C73"/>
-                </a:solidFill>
-                <a:latin typeface="PingFang SC"/>
-                <a:ea typeface="PingFang SC"/>
-                <a:cs typeface="PingFang SC"/>
-              </a:defRPr>
-            </a:pPr>
-            <a:r>
-              <a:rPr sz="1013" b="1">
-                <a:solidFill>
-                  <a:srgbClr val="6D7C73"/>
-                </a:solidFill>
-                <a:latin typeface="PingFang SC"/>
-                <a:ea typeface="PingFang SC"/>
-                <a:cs typeface="PingFang SC"/>
-              </a:rPr>
-              <a:t>Task · Attempt · Review</a:t>
-            </a:r>
-          </a:p>
-          <a:p xmlns:a="http://schemas.openxmlformats.org/drawingml/2006/main">
-            <a:pPr algn="l">
-              <a:lnSpc>
-                <a:spcPct val="116000"/>
-              </a:lnSpc>
-              <a:buNone/>
-              <a:defRPr sz="1013" b="1">
-                <a:solidFill>
-                  <a:srgbClr val="6D7C73"/>
-                </a:solidFill>
-                <a:latin typeface="PingFang SC"/>
-                <a:ea typeface="PingFang SC"/>
-                <a:cs typeface="PingFang SC"/>
-              </a:defRPr>
-            </a:pPr>
-            <a:r>
-              <a:rPr sz="1013" b="1">
-                <a:solidFill>
-                  <a:srgbClr val="6D7C73"/>
-                </a:solidFill>
-                <a:latin typeface="PingFang SC"/>
-                <a:ea typeface="PingFang SC"/>
-                <a:cs typeface="PingFang SC"/>
-              </a:rPr>
-              <a:t>Lecture · Exercise</a:t>
-            </a:r>
-          </a:p>
-        </p:txBody>
-      </p:sp>
-      <p:sp>
-        <p:nvSpPr>
-          <p:cNvPr id="41" name="">
-            <a:extLst xmlns:a="http://schemas.openxmlformats.org/drawingml/2006/main">
-              <a:ext uri="{FF2B5EF4-FFF2-40B4-BE49-F238E27FC236}">
-                <a16:creationId xmlns:a16="http://schemas.microsoft.com/office/drawing/2014/main" id="{7A863C7A-F89C-4151-8BA6-9A5F48E4364A}"/>
-              </a:ext>
-            </a:extLst>
-          </p:cNvPr>
-          <p:cNvSpPr>
-            <a:spLocks xmlns:a="http://schemas.openxmlformats.org/drawingml/2006/main" noGrp="1"/>
-          </p:cNvSpPr>
-          <p:nvPr/>
-        </p:nvSpPr>
-        <p:spPr>
-          <a:xfrm xmlns:a="http://schemas.openxmlformats.org/drawingml/2006/main">
-            <a:off x="7867650" y="3238500"/>
-            <a:ext cx="3676650" cy="742950"/>
-          </a:xfrm>
-          <a:prstGeom xmlns:a="http://schemas.openxmlformats.org/drawingml/2006/main" prst="roundRect">
-            <a:avLst>
-              <a:gd name="adj" fmla="val 20513"/>
-            </a:avLst>
-          </a:prstGeom>
-          <a:solidFill xmlns:a="http://schemas.openxmlformats.org/drawingml/2006/main">
-            <a:srgbClr val="FFFFFF"/>
-          </a:solidFill>
-          <a:ln xmlns:a="http://schemas.openxmlformats.org/drawingml/2006/main" w="10478">
-            <a:solidFill>
-              <a:srgbClr val="64529B"/>
-            </a:solidFill>
-            <a:prstDash val="solid"/>
-          </a:ln>
-        </p:spPr>
-      </p:sp>
-      <p:sp>
-        <p:nvSpPr>
-          <p:cNvPr id="42" name="">
-            <a:extLst xmlns:a="http://schemas.openxmlformats.org/drawingml/2006/main">
-              <a:ext uri="{FF2B5EF4-FFF2-40B4-BE49-F238E27FC236}">
-                <a16:creationId xmlns:a16="http://schemas.microsoft.com/office/drawing/2014/main" id="{90EB7291-EEC2-410E-9FEE-47F480D11C90}"/>
-              </a:ext>
-            </a:extLst>
-          </p:cNvPr>
-          <p:cNvSpPr>
-            <a:spLocks xmlns:a="http://schemas.openxmlformats.org/drawingml/2006/main" noGrp="1"/>
-          </p:cNvSpPr>
-          <p:nvPr/>
-        </p:nvSpPr>
-        <p:spPr>
-          <a:xfrm xmlns:a="http://schemas.openxmlformats.org/drawingml/2006/main">
-            <a:off x="7867650" y="3238500"/>
-            <a:ext cx="66675" cy="742950"/>
-          </a:xfrm>
-          <a:prstGeom xmlns:a="http://schemas.openxmlformats.org/drawingml/2006/main" prst="rect">
-            <a:avLst/>
-          </a:prstGeom>
-          <a:solidFill xmlns:a="http://schemas.openxmlformats.org/drawingml/2006/main">
-            <a:srgbClr val="64529B"/>
-          </a:solidFill>
-          <a:ln xmlns:a="http://schemas.openxmlformats.org/drawingml/2006/main" w="0">
-            <a:solidFill>
-              <a:srgbClr val="64529B"/>
-            </a:solidFill>
-            <a:prstDash val="solid"/>
-          </a:ln>
-        </p:spPr>
-      </p:sp>
-      <p:sp>
-        <p:nvSpPr>
-          <p:cNvPr id="43" name="">
-            <a:extLst xmlns:a="http://schemas.openxmlformats.org/drawingml/2006/main">
-              <a:ext uri="{FF2B5EF4-FFF2-40B4-BE49-F238E27FC236}">
-                <a16:creationId xmlns:a16="http://schemas.microsoft.com/office/drawing/2014/main" id="{56A239D4-887A-4DD7-BD0E-6E85541A5CCB}"/>
-              </a:ext>
-            </a:extLst>
-          </p:cNvPr>
-          <p:cNvSpPr>
-            <a:spLocks xmlns:a="http://schemas.openxmlformats.org/drawingml/2006/main" noGrp="1"/>
-          </p:cNvSpPr>
-          <p:nvPr/>
-        </p:nvSpPr>
-        <p:spPr>
-          <a:xfrm xmlns:a="http://schemas.openxmlformats.org/drawingml/2006/main">
-            <a:off x="8058150" y="3343275"/>
-            <a:ext cx="1752600" cy="238125"/>
-          </a:xfrm>
-          <a:prstGeom xmlns:a="http://schemas.openxmlformats.org/drawingml/2006/main" prst="rect">
-            <a:avLst/>
-          </a:prstGeom>
-          <a:noFill xmlns:a="http://schemas.openxmlformats.org/drawingml/2006/main"/>
-          <a:ln xmlns:a="http://schemas.openxmlformats.org/drawingml/2006/main" w="0">
-            <a:noFill/>
-            <a:prstDash val="solid"/>
-          </a:ln>
-        </p:spPr>
-        <p:txBody>
-          <a:bodyPr xmlns:a="http://schemas.openxmlformats.org/drawingml/2006/main" wrap="square" lIns="0" tIns="0" rIns="0" bIns="0" anchor="t">
-            <a:noAutofit/>
-          </a:bodyPr>
-          <a:lstStyle xmlns:a="http://schemas.openxmlformats.org/drawingml/2006/main"/>
-          <a:p xmlns:a="http://schemas.openxmlformats.org/drawingml/2006/main">
-            <a:pPr algn="l">
-              <a:lnSpc>
-                <a:spcPct val="115000"/>
-              </a:lnSpc>
-              <a:buNone/>
-              <a:defRPr sz="1200" b="1">
+              <a:defRPr sz="1058" b="0">
                 <a:solidFill>
                   <a:srgbClr val="15221D"/>
-                </a:solidFill>
-                <a:latin typeface="PingFang SC"/>
-                <a:ea typeface="PingFang SC"/>
-                <a:cs typeface="PingFang SC"/>
-              </a:defRPr>
-            </a:pPr>
-            <a:r>
-              <a:rPr sz="1200" b="1">
-                <a:solidFill>
-                  <a:srgbClr val="15221D"/>
-                </a:solidFill>
-                <a:latin typeface="PingFang SC"/>
-                <a:ea typeface="PingFang SC"/>
-                <a:cs typeface="PingFang SC"/>
-              </a:rPr>
-              <a:t>路径 / 项目 / 路线</a:t>
-            </a:r>
-          </a:p>
-        </p:txBody>
-      </p:sp>
-      <p:sp>
-        <p:nvSpPr>
-          <p:cNvPr id="44" name="">
-            <a:extLst xmlns:a="http://schemas.openxmlformats.org/drawingml/2006/main">
-              <a:ext uri="{FF2B5EF4-FFF2-40B4-BE49-F238E27FC236}">
-                <a16:creationId xmlns:a16="http://schemas.microsoft.com/office/drawing/2014/main" id="{24EEF127-E81B-4330-9092-243CA3B0095E}"/>
-              </a:ext>
-            </a:extLst>
-          </p:cNvPr>
-          <p:cNvSpPr>
-            <a:spLocks xmlns:a="http://schemas.openxmlformats.org/drawingml/2006/main" noGrp="1"/>
-          </p:cNvSpPr>
-          <p:nvPr/>
-        </p:nvSpPr>
-        <p:spPr>
-          <a:xfrm xmlns:a="http://schemas.openxmlformats.org/drawingml/2006/main">
-            <a:off x="8058150" y="3657600"/>
-            <a:ext cx="1752600" cy="171450"/>
-          </a:xfrm>
-          <a:prstGeom xmlns:a="http://schemas.openxmlformats.org/drawingml/2006/main" prst="rect">
-            <a:avLst/>
-          </a:prstGeom>
-          <a:noFill xmlns:a="http://schemas.openxmlformats.org/drawingml/2006/main"/>
-          <a:ln xmlns:a="http://schemas.openxmlformats.org/drawingml/2006/main" w="0">
-            <a:noFill/>
-            <a:prstDash val="solid"/>
-          </a:ln>
-        </p:spPr>
-        <p:txBody>
-          <a:bodyPr xmlns:a="http://schemas.openxmlformats.org/drawingml/2006/main" wrap="square" lIns="0" tIns="0" rIns="0" bIns="0" anchor="t">
-            <a:noAutofit/>
-          </a:bodyPr>
-          <a:lstStyle xmlns:a="http://schemas.openxmlformats.org/drawingml/2006/main"/>
-          <a:p xmlns:a="http://schemas.openxmlformats.org/drawingml/2006/main">
-            <a:pPr algn="l">
-              <a:lnSpc>
-                <a:spcPct val="115000"/>
-              </a:lnSpc>
-              <a:buNone/>
-              <a:defRPr sz="825" b="0">
-                <a:solidFill>
-                  <a:srgbClr val="64529B"/>
                 </a:solidFill>
                 <a:latin typeface="SFMono-Regular"/>
                 <a:ea typeface="SFMono-Regular"/>
@@ -6657,37 +8198,37 @@
               </a:defRPr>
             </a:pPr>
             <a:r>
-              <a:rPr sz="825" b="0">
-                <a:solidFill>
-                  <a:srgbClr val="64529B"/>
+              <a:rPr sz="1058" b="0">
+                <a:solidFill>
+                  <a:srgbClr val="15221D"/>
                 </a:solidFill>
                 <a:latin typeface="SFMono-Regular"/>
                 <a:ea typeface="SFMono-Regular"/>
                 <a:cs typeface="SFMono-Regular"/>
               </a:rPr>
-              <a:t>path · project · roadmap</a:t>
-            </a:r>
-          </a:p>
-        </p:txBody>
-      </p:sp>
-      <p:sp>
-        <p:nvSpPr>
-          <p:cNvPr id="45" name="">
-            <a:extLst xmlns:a="http://schemas.openxmlformats.org/drawingml/2006/main">
-              <a:ext uri="{FF2B5EF4-FFF2-40B4-BE49-F238E27FC236}">
-                <a16:creationId xmlns:a16="http://schemas.microsoft.com/office/drawing/2014/main" id="{D838053E-3EAA-487B-BFED-DB4B2A199673}"/>
-              </a:ext>
-            </a:extLst>
-          </p:cNvPr>
-          <p:cNvSpPr>
-            <a:spLocks xmlns:a="http://schemas.openxmlformats.org/drawingml/2006/main" noGrp="1"/>
-          </p:cNvSpPr>
-          <p:nvPr/>
-        </p:nvSpPr>
-        <p:spPr>
-          <a:xfrm xmlns:a="http://schemas.openxmlformats.org/drawingml/2006/main">
-            <a:off x="9801225" y="3448050"/>
-            <a:ext cx="304800" cy="285750"/>
+              <a:t>File proposal</a:t>
+            </a:r>
+          </a:p>
+        </p:txBody>
+      </p:sp>
+      <p:sp>
+        <p:nvSpPr>
+          <p:cNvPr id="121" name="">
+            <a:extLst xmlns:a="http://schemas.openxmlformats.org/drawingml/2006/main">
+              <a:ext uri="{FF2B5EF4-FFF2-40B4-BE49-F238E27FC236}">
+                <a16:creationId xmlns:a16="http://schemas.microsoft.com/office/drawing/2014/main" id="{670021B5-874C-40D0-B668-270CE38DAE17}"/>
+              </a:ext>
+            </a:extLst>
+          </p:cNvPr>
+          <p:cNvSpPr>
+            <a:spLocks xmlns:a="http://schemas.openxmlformats.org/drawingml/2006/main" noGrp="1"/>
+          </p:cNvSpPr>
+          <p:nvPr/>
+        </p:nvSpPr>
+        <p:spPr>
+          <a:xfrm xmlns:a="http://schemas.openxmlformats.org/drawingml/2006/main">
+            <a:off x="9963150" y="5276850"/>
+            <a:ext cx="1428750" cy="514350"/>
           </a:xfrm>
           <a:prstGeom xmlns:a="http://schemas.openxmlformats.org/drawingml/2006/main" prst="rect">
             <a:avLst/>
@@ -6704,12 +8245,12 @@
           </a:bodyPr>
           <a:lstStyle xmlns:a="http://schemas.openxmlformats.org/drawingml/2006/main"/>
           <a:p xmlns:a="http://schemas.openxmlformats.org/drawingml/2006/main">
-            <a:pPr algn="ctr">
-              <a:lnSpc>
-                <a:spcPct val="115000"/>
-              </a:lnSpc>
-              <a:buNone/>
-              <a:defRPr sz="1650" b="1">
+            <a:pPr algn="l">
+              <a:lnSpc>
+                <a:spcPct val="120000"/>
+              </a:lnSpc>
+              <a:buNone/>
+              <a:defRPr sz="1065" b="1">
                 <a:solidFill>
                   <a:srgbClr val="64529B"/>
                 </a:solidFill>
@@ -6719,7 +8260,7 @@
               </a:defRPr>
             </a:pPr>
             <a:r>
-              <a:rPr sz="1650" b="1">
+              <a:rPr sz="1065" b="1">
                 <a:solidFill>
                   <a:srgbClr val="64529B"/>
                 </a:solidFill>
@@ -6727,128 +8268,192 @@
                 <a:ea typeface="PingFang SC"/>
                 <a:cs typeface="PingFang SC"/>
               </a:rPr>
-              <a:t>→</a:t>
-            </a:r>
-          </a:p>
-        </p:txBody>
-      </p:sp>
-      <p:sp>
-        <p:nvSpPr>
-          <p:cNvPr id="46" name="">
-            <a:extLst xmlns:a="http://schemas.openxmlformats.org/drawingml/2006/main">
-              <a:ext uri="{FF2B5EF4-FFF2-40B4-BE49-F238E27FC236}">
-                <a16:creationId xmlns:a16="http://schemas.microsoft.com/office/drawing/2014/main" id="{9D269708-CA5E-49D8-BE50-9EB2750FB0C0}"/>
-              </a:ext>
-            </a:extLst>
-          </p:cNvPr>
-          <p:cNvSpPr>
-            <a:spLocks xmlns:a="http://schemas.openxmlformats.org/drawingml/2006/main" noGrp="1"/>
-          </p:cNvSpPr>
-          <p:nvPr/>
-        </p:nvSpPr>
-        <p:spPr>
-          <a:xfrm xmlns:a="http://schemas.openxmlformats.org/drawingml/2006/main">
-            <a:off x="10172700" y="3333750"/>
-            <a:ext cx="1219200" cy="523875"/>
-          </a:xfrm>
-          <a:prstGeom xmlns:a="http://schemas.openxmlformats.org/drawingml/2006/main" prst="rect">
-            <a:avLst/>
-          </a:prstGeom>
-          <a:noFill xmlns:a="http://schemas.openxmlformats.org/drawingml/2006/main"/>
-          <a:ln xmlns:a="http://schemas.openxmlformats.org/drawingml/2006/main" w="0">
-            <a:noFill/>
-            <a:prstDash val="solid"/>
-          </a:ln>
-        </p:spPr>
-        <p:txBody>
-          <a:bodyPr xmlns:a="http://schemas.openxmlformats.org/drawingml/2006/main" wrap="square" lIns="0" tIns="0" rIns="0" bIns="0" anchor="t">
-            <a:noAutofit/>
-          </a:bodyPr>
-          <a:lstStyle xmlns:a="http://schemas.openxmlformats.org/drawingml/2006/main"/>
-          <a:p xmlns:a="http://schemas.openxmlformats.org/drawingml/2006/main">
-            <a:pPr algn="l">
-              <a:lnSpc>
-                <a:spcPct val="116000"/>
-              </a:lnSpc>
-              <a:buNone/>
-              <a:defRPr sz="1013" b="1">
-                <a:solidFill>
-                  <a:srgbClr val="6D7C73"/>
-                </a:solidFill>
-                <a:latin typeface="PingFang SC"/>
-                <a:ea typeface="PingFang SC"/>
-                <a:cs typeface="PingFang SC"/>
-              </a:defRPr>
-            </a:pPr>
-            <a:r>
-              <a:rPr sz="1013" b="1">
-                <a:solidFill>
-                  <a:srgbClr val="6D7C73"/>
-                </a:solidFill>
-                <a:latin typeface="PingFang SC"/>
-                <a:ea typeface="PingFang SC"/>
-                <a:cs typeface="PingFang SC"/>
-              </a:rPr>
-              <a:t>DAG · Plan</a:t>
-            </a:r>
-          </a:p>
-          <a:p xmlns:a="http://schemas.openxmlformats.org/drawingml/2006/main">
-            <a:pPr algn="l">
-              <a:lnSpc>
-                <a:spcPct val="116000"/>
-              </a:lnSpc>
-              <a:buNone/>
-              <a:defRPr sz="1013" b="1">
-                <a:solidFill>
-                  <a:srgbClr val="6D7C73"/>
-                </a:solidFill>
-                <a:latin typeface="PingFang SC"/>
-                <a:ea typeface="PingFang SC"/>
-                <a:cs typeface="PingFang SC"/>
-              </a:defRPr>
-            </a:pPr>
-            <a:r>
-              <a:rPr sz="1013" b="1">
-                <a:solidFill>
-                  <a:srgbClr val="6D7C73"/>
-                </a:solidFill>
-                <a:latin typeface="PingFang SC"/>
-                <a:ea typeface="PingFang SC"/>
-                <a:cs typeface="PingFang SC"/>
-              </a:rPr>
-              <a:t>Project · Roadmap</a:t>
-            </a:r>
-          </a:p>
-        </p:txBody>
-      </p:sp>
-      <p:sp>
-        <p:nvSpPr>
-          <p:cNvPr id="47" name="always-read-strip">
-            <a:extLst xmlns:a="http://schemas.openxmlformats.org/drawingml/2006/main">
-              <a:ext uri="{FF2B5EF4-FFF2-40B4-BE49-F238E27FC236}">
-                <a16:creationId xmlns:a16="http://schemas.microsoft.com/office/drawing/2014/main" id="{91E3B568-149A-439D-9F18-ECF15CDB1FD6}"/>
-              </a:ext>
-            </a:extLst>
-          </p:cNvPr>
-          <p:cNvSpPr>
-            <a:spLocks xmlns:a="http://schemas.openxmlformats.org/drawingml/2006/main" noGrp="1"/>
-          </p:cNvSpPr>
-          <p:nvPr/>
-        </p:nvSpPr>
-        <p:spPr>
-          <a:xfrm xmlns:a="http://schemas.openxmlformats.org/drawingml/2006/main">
-            <a:off x="647700" y="4476750"/>
-            <a:ext cx="10896600" cy="1257300"/>
+              <a:t>待确认卡片</a:t>
+            </a:r>
+          </a:p>
+          <a:p xmlns:a="http://schemas.openxmlformats.org/drawingml/2006/main">
+            <a:pPr algn="l">
+              <a:lnSpc>
+                <a:spcPct val="120000"/>
+              </a:lnSpc>
+              <a:buNone/>
+              <a:defRPr sz="1065" b="1">
+                <a:solidFill>
+                  <a:srgbClr val="64529B"/>
+                </a:solidFill>
+                <a:latin typeface="PingFang SC"/>
+                <a:ea typeface="PingFang SC"/>
+                <a:cs typeface="PingFang SC"/>
+              </a:defRPr>
+            </a:pPr>
+            <a:r>
+              <a:rPr sz="1065" b="1">
+                <a:solidFill>
+                  <a:srgbClr val="64529B"/>
+                </a:solidFill>
+                <a:latin typeface="PingFang SC"/>
+                <a:ea typeface="PingFang SC"/>
+                <a:cs typeface="PingFang SC"/>
+              </a:rPr>
+              <a:t>→ 项目</a:t>
+            </a:r>
+          </a:p>
+        </p:txBody>
+      </p:sp>
+      <p:sp>
+        <p:nvSpPr>
+          <p:cNvPr id="122" name="">
+            <a:extLst xmlns:a="http://schemas.openxmlformats.org/drawingml/2006/main">
+              <a:ext uri="{FF2B5EF4-FFF2-40B4-BE49-F238E27FC236}">
+                <a16:creationId xmlns:a16="http://schemas.microsoft.com/office/drawing/2014/main" id="{CD85D0BD-EF34-47E5-8BAF-93D811640786}"/>
+              </a:ext>
+            </a:extLst>
+          </p:cNvPr>
+          <p:cNvSpPr>
+            <a:spLocks xmlns:a="http://schemas.openxmlformats.org/drawingml/2006/main" noGrp="1"/>
+          </p:cNvSpPr>
+          <p:nvPr/>
+        </p:nvSpPr>
+        <p:spPr>
+          <a:xfrm xmlns:a="http://schemas.openxmlformats.org/drawingml/2006/main">
+            <a:off x="4210050" y="2609850"/>
+            <a:ext cx="9525" cy="3257550"/>
+          </a:xfrm>
+          <a:prstGeom xmlns:a="http://schemas.openxmlformats.org/drawingml/2006/main" prst="rect">
+            <a:avLst/>
+          </a:prstGeom>
+          <a:solidFill xmlns:a="http://schemas.openxmlformats.org/drawingml/2006/main">
+            <a:srgbClr val="E4EAE6"/>
+          </a:solidFill>
+          <a:ln xmlns:a="http://schemas.openxmlformats.org/drawingml/2006/main" w="0">
+            <a:solidFill>
+              <a:srgbClr val="E4EAE6"/>
+            </a:solidFill>
+            <a:prstDash val="solid"/>
+          </a:ln>
+        </p:spPr>
+      </p:sp>
+      <p:sp>
+        <p:nvSpPr>
+          <p:cNvPr id="123" name="">
+            <a:extLst xmlns:a="http://schemas.openxmlformats.org/drawingml/2006/main">
+              <a:ext uri="{FF2B5EF4-FFF2-40B4-BE49-F238E27FC236}">
+                <a16:creationId xmlns:a16="http://schemas.microsoft.com/office/drawing/2014/main" id="{A61F162C-D312-4955-B3A2-CF598AC0FA28}"/>
+              </a:ext>
+            </a:extLst>
+          </p:cNvPr>
+          <p:cNvSpPr>
+            <a:spLocks xmlns:a="http://schemas.openxmlformats.org/drawingml/2006/main" noGrp="1"/>
+          </p:cNvSpPr>
+          <p:nvPr/>
+        </p:nvSpPr>
+        <p:spPr>
+          <a:xfrm xmlns:a="http://schemas.openxmlformats.org/drawingml/2006/main">
+            <a:off x="6400800" y="2609850"/>
+            <a:ext cx="9525" cy="3257550"/>
+          </a:xfrm>
+          <a:prstGeom xmlns:a="http://schemas.openxmlformats.org/drawingml/2006/main" prst="rect">
+            <a:avLst/>
+          </a:prstGeom>
+          <a:solidFill xmlns:a="http://schemas.openxmlformats.org/drawingml/2006/main">
+            <a:srgbClr val="E4EAE6"/>
+          </a:solidFill>
+          <a:ln xmlns:a="http://schemas.openxmlformats.org/drawingml/2006/main" w="0">
+            <a:solidFill>
+              <a:srgbClr val="E4EAE6"/>
+            </a:solidFill>
+            <a:prstDash val="solid"/>
+          </a:ln>
+        </p:spPr>
+      </p:sp>
+      <p:sp>
+        <p:nvSpPr>
+          <p:cNvPr id="124" name="">
+            <a:extLst xmlns:a="http://schemas.openxmlformats.org/drawingml/2006/main">
+              <a:ext uri="{FF2B5EF4-FFF2-40B4-BE49-F238E27FC236}">
+                <a16:creationId xmlns:a16="http://schemas.microsoft.com/office/drawing/2014/main" id="{860B2182-E125-46EC-BE40-7942557D3815}"/>
+              </a:ext>
+            </a:extLst>
+          </p:cNvPr>
+          <p:cNvSpPr>
+            <a:spLocks xmlns:a="http://schemas.openxmlformats.org/drawingml/2006/main" noGrp="1"/>
+          </p:cNvSpPr>
+          <p:nvPr/>
+        </p:nvSpPr>
+        <p:spPr>
+          <a:xfrm xmlns:a="http://schemas.openxmlformats.org/drawingml/2006/main">
+            <a:off x="9829800" y="2609850"/>
+            <a:ext cx="9525" cy="3257550"/>
+          </a:xfrm>
+          <a:prstGeom xmlns:a="http://schemas.openxmlformats.org/drawingml/2006/main" prst="rect">
+            <a:avLst/>
+          </a:prstGeom>
+          <a:solidFill xmlns:a="http://schemas.openxmlformats.org/drawingml/2006/main">
+            <a:srgbClr val="E4EAE6"/>
+          </a:solidFill>
+          <a:ln xmlns:a="http://schemas.openxmlformats.org/drawingml/2006/main" w="0">
+            <a:solidFill>
+              <a:srgbClr val="E4EAE6"/>
+            </a:solidFill>
+            <a:prstDash val="solid"/>
+          </a:ln>
+        </p:spPr>
+      </p:sp>
+      <p:sp>
+        <p:nvSpPr>
+          <p:cNvPr id="125" name="tool-runtime-boundary">
+            <a:extLst xmlns:a="http://schemas.openxmlformats.org/drawingml/2006/main">
+              <a:ext uri="{FF2B5EF4-FFF2-40B4-BE49-F238E27FC236}">
+                <a16:creationId xmlns:a16="http://schemas.microsoft.com/office/drawing/2014/main" id="{9E4B9854-1A04-4539-A099-E4F6488EAC16}"/>
+              </a:ext>
+            </a:extLst>
+          </p:cNvPr>
+          <p:cNvSpPr>
+            <a:spLocks xmlns:a="http://schemas.openxmlformats.org/drawingml/2006/main" noGrp="1"/>
+          </p:cNvSpPr>
+          <p:nvPr/>
+        </p:nvSpPr>
+        <p:spPr>
+          <a:xfrm xmlns:a="http://schemas.openxmlformats.org/drawingml/2006/main">
+            <a:off x="647700" y="6000750"/>
+            <a:ext cx="10896600" cy="533400"/>
           </a:xfrm>
           <a:prstGeom xmlns:a="http://schemas.openxmlformats.org/drawingml/2006/main" prst="roundRect">
             <a:avLst>
-              <a:gd name="adj" fmla="val 13636"/>
+              <a:gd name="adj" fmla="val 17857"/>
             </a:avLst>
           </a:prstGeom>
-          <a:solidFill xmlns:a="http://schemas.openxmlformats.org/drawingml/2006/main">
-            <a:srgbClr val="111B2B"/>
-          </a:solidFill>
-          <a:ln xmlns:a="http://schemas.openxmlformats.org/drawingml/2006/main" w="0">
+          <a:noFill xmlns:a="http://schemas.openxmlformats.org/drawingml/2006/main"/>
+          <a:ln xmlns:a="http://schemas.openxmlformats.org/drawingml/2006/main" w="0">
+            <a:noFill/>
+            <a:prstDash val="solid"/>
+          </a:ln>
+        </p:spPr>
+      </p:sp>
+      <p:sp>
+        <p:nvSpPr>
+          <p:cNvPr id="126" name="">
+            <a:extLst xmlns:a="http://schemas.openxmlformats.org/drawingml/2006/main">
+              <a:ext uri="{FF2B5EF4-FFF2-40B4-BE49-F238E27FC236}">
+                <a16:creationId xmlns:a16="http://schemas.microsoft.com/office/drawing/2014/main" id="{2C390701-8B91-43DC-BDC3-1BD78E9B54D2}"/>
+              </a:ext>
+            </a:extLst>
+          </p:cNvPr>
+          <p:cNvSpPr>
+            <a:spLocks xmlns:a="http://schemas.openxmlformats.org/drawingml/2006/main" noGrp="1"/>
+          </p:cNvSpPr>
+          <p:nvPr/>
+        </p:nvSpPr>
+        <p:spPr>
+          <a:xfrm xmlns:a="http://schemas.openxmlformats.org/drawingml/2006/main">
+            <a:off x="647700" y="6000750"/>
+            <a:ext cx="10896600" cy="9525"/>
+          </a:xfrm>
+          <a:prstGeom xmlns:a="http://schemas.openxmlformats.org/drawingml/2006/main" prst="line">
+            <a:avLst/>
+          </a:prstGeom>
+          <a:noFill xmlns:a="http://schemas.openxmlformats.org/drawingml/2006/main"/>
+          <a:ln xmlns:a="http://schemas.openxmlformats.org/drawingml/2006/main" w="19050">
             <a:solidFill>
               <a:srgbClr val="111B2B"/>
             </a:solidFill>
@@ -6858,22 +8463,53 @@
       </p:sp>
       <p:sp>
         <p:nvSpPr>
-          <p:cNvPr id="48" name="">
-            <a:extLst xmlns:a="http://schemas.openxmlformats.org/drawingml/2006/main">
-              <a:ext uri="{FF2B5EF4-FFF2-40B4-BE49-F238E27FC236}">
-                <a16:creationId xmlns:a16="http://schemas.microsoft.com/office/drawing/2014/main" id="{11D908E4-B90E-4640-9065-9BE08B1ACDE5}"/>
-              </a:ext>
-            </a:extLst>
-          </p:cNvPr>
-          <p:cNvSpPr>
-            <a:spLocks xmlns:a="http://schemas.openxmlformats.org/drawingml/2006/main" noGrp="1"/>
-          </p:cNvSpPr>
-          <p:nvPr/>
-        </p:nvSpPr>
-        <p:spPr>
-          <a:xfrm xmlns:a="http://schemas.openxmlformats.org/drawingml/2006/main">
-            <a:off x="876300" y="4686300"/>
-            <a:ext cx="1238250" cy="247650"/>
+          <p:cNvPr id="127" name="">
+            <a:extLst xmlns:a="http://schemas.openxmlformats.org/drawingml/2006/main">
+              <a:ext uri="{FF2B5EF4-FFF2-40B4-BE49-F238E27FC236}">
+                <a16:creationId xmlns:a16="http://schemas.microsoft.com/office/drawing/2014/main" id="{8CFB308B-1104-4423-87B5-6911655D8FE3}"/>
+              </a:ext>
+            </a:extLst>
+          </p:cNvPr>
+          <p:cNvSpPr>
+            <a:spLocks xmlns:a="http://schemas.openxmlformats.org/drawingml/2006/main" noGrp="1"/>
+          </p:cNvSpPr>
+          <p:nvPr/>
+        </p:nvSpPr>
+        <p:spPr>
+          <a:xfrm xmlns:a="http://schemas.openxmlformats.org/drawingml/2006/main">
+            <a:off x="647700" y="6534150"/>
+            <a:ext cx="10896600" cy="9525"/>
+          </a:xfrm>
+          <a:prstGeom xmlns:a="http://schemas.openxmlformats.org/drawingml/2006/main" prst="line">
+            <a:avLst/>
+          </a:prstGeom>
+          <a:noFill xmlns:a="http://schemas.openxmlformats.org/drawingml/2006/main"/>
+          <a:ln xmlns:a="http://schemas.openxmlformats.org/drawingml/2006/main" w="9525">
+            <a:solidFill>
+              <a:srgbClr val="D9E2DC"/>
+            </a:solidFill>
+            <a:prstDash val="solid"/>
+          </a:ln>
+        </p:spPr>
+      </p:sp>
+      <p:sp>
+        <p:nvSpPr>
+          <p:cNvPr id="128" name="">
+            <a:extLst xmlns:a="http://schemas.openxmlformats.org/drawingml/2006/main">
+              <a:ext uri="{FF2B5EF4-FFF2-40B4-BE49-F238E27FC236}">
+                <a16:creationId xmlns:a16="http://schemas.microsoft.com/office/drawing/2014/main" id="{091C72F4-2D86-4B80-964B-95BFC0B30EFF}"/>
+              </a:ext>
+            </a:extLst>
+          </p:cNvPr>
+          <p:cNvSpPr>
+            <a:spLocks xmlns:a="http://schemas.openxmlformats.org/drawingml/2006/main" noGrp="1"/>
+          </p:cNvSpPr>
+          <p:nvPr/>
+        </p:nvSpPr>
+        <p:spPr>
+          <a:xfrm xmlns:a="http://schemas.openxmlformats.org/drawingml/2006/main">
+            <a:off x="857250" y="6086475"/>
+            <a:ext cx="781050" cy="190500"/>
           </a:xfrm>
           <a:prstGeom xmlns:a="http://schemas.openxmlformats.org/drawingml/2006/main" prst="rect">
             <a:avLst/>
@@ -6895,47 +8531,47 @@
                 <a:spcPct val="115000"/>
               </a:lnSpc>
               <a:buNone/>
-              <a:defRPr sz="1350" b="1">
-                <a:solidFill>
-                  <a:srgbClr val="8FE0B2"/>
-                </a:solidFill>
-                <a:latin typeface="PingFang SC"/>
-                <a:ea typeface="PingFang SC"/>
-                <a:cs typeface="PingFang SC"/>
-              </a:defRPr>
-            </a:pPr>
-            <a:r>
-              <a:rPr sz="1350" b="1">
-                <a:solidFill>
-                  <a:srgbClr val="8FE0B2"/>
-                </a:solidFill>
-                <a:latin typeface="PingFang SC"/>
-                <a:ea typeface="PingFang SC"/>
-                <a:cs typeface="PingFang SC"/>
-              </a:rPr>
-              <a:t>每轮先读</a:t>
-            </a:r>
-          </a:p>
-        </p:txBody>
-      </p:sp>
-      <p:sp>
-        <p:nvSpPr>
-          <p:cNvPr id="49" name="">
-            <a:extLst xmlns:a="http://schemas.openxmlformats.org/drawingml/2006/main">
-              <a:ext uri="{FF2B5EF4-FFF2-40B4-BE49-F238E27FC236}">
-                <a16:creationId xmlns:a16="http://schemas.microsoft.com/office/drawing/2014/main" id="{ED95CD05-03F2-401D-94E0-E4E667369089}"/>
-              </a:ext>
-            </a:extLst>
-          </p:cNvPr>
-          <p:cNvSpPr>
-            <a:spLocks xmlns:a="http://schemas.openxmlformats.org/drawingml/2006/main" noGrp="1"/>
-          </p:cNvSpPr>
-          <p:nvPr/>
-        </p:nvSpPr>
-        <p:spPr>
-          <a:xfrm xmlns:a="http://schemas.openxmlformats.org/drawingml/2006/main">
-            <a:off x="2238375" y="4629150"/>
-            <a:ext cx="1714500" cy="361950"/>
+              <a:defRPr sz="1050" b="1">
+                <a:solidFill>
+                  <a:srgbClr val="087A53"/>
+                </a:solidFill>
+                <a:latin typeface="PingFang SC"/>
+                <a:ea typeface="PingFang SC"/>
+                <a:cs typeface="PingFang SC"/>
+              </a:defRPr>
+            </a:pPr>
+            <a:r>
+              <a:rPr sz="1050" b="1">
+                <a:solidFill>
+                  <a:srgbClr val="087A53"/>
+                </a:solidFill>
+                <a:latin typeface="PingFang SC"/>
+                <a:ea typeface="PingFang SC"/>
+                <a:cs typeface="PingFang SC"/>
+              </a:rPr>
+              <a:t>运行边界</a:t>
+            </a:r>
+          </a:p>
+        </p:txBody>
+      </p:sp>
+      <p:sp>
+        <p:nvSpPr>
+          <p:cNvPr id="129" name="">
+            <a:extLst xmlns:a="http://schemas.openxmlformats.org/drawingml/2006/main">
+              <a:ext uri="{FF2B5EF4-FFF2-40B4-BE49-F238E27FC236}">
+                <a16:creationId xmlns:a16="http://schemas.microsoft.com/office/drawing/2014/main" id="{139C4E20-9C01-4DE3-A18C-FE97DFD8815D}"/>
+              </a:ext>
+            </a:extLst>
+          </p:cNvPr>
+          <p:cNvSpPr>
+            <a:spLocks xmlns:a="http://schemas.openxmlformats.org/drawingml/2006/main" noGrp="1"/>
+          </p:cNvSpPr>
+          <p:nvPr/>
+        </p:nvSpPr>
+        <p:spPr>
+          <a:xfrm xmlns:a="http://schemas.openxmlformats.org/drawingml/2006/main">
+            <a:off x="1714500" y="6076950"/>
+            <a:ext cx="1619250" cy="209550"/>
           </a:xfrm>
           <a:prstGeom xmlns:a="http://schemas.openxmlformats.org/drawingml/2006/main" prst="rect">
             <a:avLst/>
@@ -6957,47 +8593,47 @@
                 <a:spcPct val="115000"/>
               </a:lnSpc>
               <a:buNone/>
-              <a:defRPr sz="1800" b="1">
-                <a:solidFill>
-                  <a:srgbClr val="FFFFFF"/>
-                </a:solidFill>
-                <a:latin typeface="PingFang SC"/>
-                <a:ea typeface="PingFang SC"/>
-                <a:cs typeface="PingFang SC"/>
-              </a:defRPr>
-            </a:pPr>
-            <a:r>
-              <a:rPr sz="1800" b="1">
-                <a:solidFill>
-                  <a:srgbClr val="FFFFFF"/>
-                </a:solidFill>
-                <a:latin typeface="PingFang SC"/>
-                <a:ea typeface="PingFang SC"/>
-                <a:cs typeface="PingFang SC"/>
-              </a:rPr>
-              <a:t>五核上下文</a:t>
-            </a:r>
-          </a:p>
-        </p:txBody>
-      </p:sp>
-      <p:sp>
-        <p:nvSpPr>
-          <p:cNvPr id="50" name="">
-            <a:extLst xmlns:a="http://schemas.openxmlformats.org/drawingml/2006/main">
-              <a:ext uri="{FF2B5EF4-FFF2-40B4-BE49-F238E27FC236}">
-                <a16:creationId xmlns:a16="http://schemas.microsoft.com/office/drawing/2014/main" id="{EBECBD39-CC16-4653-8C03-B633B421E01B}"/>
-              </a:ext>
-            </a:extLst>
-          </p:cNvPr>
-          <p:cNvSpPr>
-            <a:spLocks xmlns:a="http://schemas.openxmlformats.org/drawingml/2006/main" noGrp="1"/>
-          </p:cNvSpPr>
-          <p:nvPr/>
-        </p:nvSpPr>
-        <p:spPr>
-          <a:xfrm xmlns:a="http://schemas.openxmlformats.org/drawingml/2006/main">
-            <a:off x="3990975" y="4638675"/>
-            <a:ext cx="323850" cy="323850"/>
+              <a:defRPr sz="1088" b="1">
+                <a:solidFill>
+                  <a:srgbClr val="15221D"/>
+                </a:solidFill>
+                <a:latin typeface="PingFang SC"/>
+                <a:ea typeface="PingFang SC"/>
+                <a:cs typeface="PingFang SC"/>
+              </a:defRPr>
+            </a:pPr>
+            <a:r>
+              <a:rPr sz="1088" b="1">
+                <a:solidFill>
+                  <a:srgbClr val="15221D"/>
+                </a:solidFill>
+                <a:latin typeface="PingFang SC"/>
+                <a:ea typeface="PingFang SC"/>
+                <a:cs typeface="PingFang SC"/>
+              </a:rPr>
+              <a:t>Harness 按 scope 开放</a:t>
+            </a:r>
+          </a:p>
+        </p:txBody>
+      </p:sp>
+      <p:sp>
+        <p:nvSpPr>
+          <p:cNvPr id="130" name="">
+            <a:extLst xmlns:a="http://schemas.openxmlformats.org/drawingml/2006/main">
+              <a:ext uri="{FF2B5EF4-FFF2-40B4-BE49-F238E27FC236}">
+                <a16:creationId xmlns:a16="http://schemas.microsoft.com/office/drawing/2014/main" id="{2A1F6D1A-AD5E-4C2A-90AE-C865C5E82F33}"/>
+              </a:ext>
+            </a:extLst>
+          </p:cNvPr>
+          <p:cNvSpPr>
+            <a:spLocks xmlns:a="http://schemas.openxmlformats.org/drawingml/2006/main" noGrp="1"/>
+          </p:cNvSpPr>
+          <p:nvPr/>
+        </p:nvSpPr>
+        <p:spPr>
+          <a:xfrm xmlns:a="http://schemas.openxmlformats.org/drawingml/2006/main">
+            <a:off x="3352800" y="6076950"/>
+            <a:ext cx="228600" cy="209550"/>
           </a:xfrm>
           <a:prstGeom xmlns:a="http://schemas.openxmlformats.org/drawingml/2006/main" prst="rect">
             <a:avLst/>
@@ -7019,47 +8655,47 @@
                 <a:spcPct val="115000"/>
               </a:lnSpc>
               <a:buNone/>
-              <a:defRPr sz="1800" b="1">
-                <a:solidFill>
-                  <a:srgbClr val="8FA0B7"/>
-                </a:solidFill>
-                <a:latin typeface="PingFang SC"/>
-                <a:ea typeface="PingFang SC"/>
-                <a:cs typeface="PingFang SC"/>
-              </a:defRPr>
-            </a:pPr>
-            <a:r>
-              <a:rPr sz="1800" b="1">
-                <a:solidFill>
-                  <a:srgbClr val="8FA0B7"/>
-                </a:solidFill>
-                <a:latin typeface="PingFang SC"/>
-                <a:ea typeface="PingFang SC"/>
-                <a:cs typeface="PingFang SC"/>
-              </a:rPr>
-              <a:t>+</a:t>
-            </a:r>
-          </a:p>
-        </p:txBody>
-      </p:sp>
-      <p:sp>
-        <p:nvSpPr>
-          <p:cNvPr id="51" name="">
-            <a:extLst xmlns:a="http://schemas.openxmlformats.org/drawingml/2006/main">
-              <a:ext uri="{FF2B5EF4-FFF2-40B4-BE49-F238E27FC236}">
-                <a16:creationId xmlns:a16="http://schemas.microsoft.com/office/drawing/2014/main" id="{E27E6D17-8447-4E32-954F-E3C026A75930}"/>
-              </a:ext>
-            </a:extLst>
-          </p:cNvPr>
-          <p:cNvSpPr>
-            <a:spLocks xmlns:a="http://schemas.openxmlformats.org/drawingml/2006/main" noGrp="1"/>
-          </p:cNvSpPr>
-          <p:nvPr/>
-        </p:nvSpPr>
-        <p:spPr>
-          <a:xfrm xmlns:a="http://schemas.openxmlformats.org/drawingml/2006/main">
-            <a:off x="4400550" y="4629150"/>
-            <a:ext cx="1714500" cy="361950"/>
+              <a:defRPr sz="1200" b="1">
+                <a:solidFill>
+                  <a:srgbClr val="087A53"/>
+                </a:solidFill>
+                <a:latin typeface="PingFang SC"/>
+                <a:ea typeface="PingFang SC"/>
+                <a:cs typeface="PingFang SC"/>
+              </a:defRPr>
+            </a:pPr>
+            <a:r>
+              <a:rPr sz="1200" b="1">
+                <a:solidFill>
+                  <a:srgbClr val="087A53"/>
+                </a:solidFill>
+                <a:latin typeface="PingFang SC"/>
+                <a:ea typeface="PingFang SC"/>
+                <a:cs typeface="PingFang SC"/>
+              </a:rPr>
+              <a:t>→</a:t>
+            </a:r>
+          </a:p>
+        </p:txBody>
+      </p:sp>
+      <p:sp>
+        <p:nvSpPr>
+          <p:cNvPr id="131" name="">
+            <a:extLst xmlns:a="http://schemas.openxmlformats.org/drawingml/2006/main">
+              <a:ext uri="{FF2B5EF4-FFF2-40B4-BE49-F238E27FC236}">
+                <a16:creationId xmlns:a16="http://schemas.microsoft.com/office/drawing/2014/main" id="{6DB0E186-5D52-4A6E-A5FD-5CFA69FEAAA2}"/>
+              </a:ext>
+            </a:extLst>
+          </p:cNvPr>
+          <p:cNvSpPr>
+            <a:spLocks xmlns:a="http://schemas.openxmlformats.org/drawingml/2006/main" noGrp="1"/>
+          </p:cNvSpPr>
+          <p:nvPr/>
+        </p:nvSpPr>
+        <p:spPr>
+          <a:xfrm xmlns:a="http://schemas.openxmlformats.org/drawingml/2006/main">
+            <a:off x="3638550" y="6076950"/>
+            <a:ext cx="1762125" cy="209550"/>
           </a:xfrm>
           <a:prstGeom xmlns:a="http://schemas.openxmlformats.org/drawingml/2006/main" prst="rect">
             <a:avLst/>
@@ -7081,47 +8717,47 @@
                 <a:spcPct val="115000"/>
               </a:lnSpc>
               <a:buNone/>
-              <a:defRPr sz="1800" b="1">
-                <a:solidFill>
-                  <a:srgbClr val="FFFFFF"/>
-                </a:solidFill>
-                <a:latin typeface="PingFang SC"/>
-                <a:ea typeface="PingFang SC"/>
-                <a:cs typeface="PingFang SC"/>
-              </a:defRPr>
-            </a:pPr>
-            <a:r>
-              <a:rPr sz="1800" b="1">
-                <a:solidFill>
-                  <a:srgbClr val="FFFFFF"/>
-                </a:solidFill>
-                <a:latin typeface="PingFang SC"/>
-                <a:ea typeface="PingFang SC"/>
-                <a:cs typeface="PingFang SC"/>
-              </a:rPr>
-              <a:t>学习工作区</a:t>
-            </a:r>
-          </a:p>
-        </p:txBody>
-      </p:sp>
-      <p:sp>
-        <p:nvSpPr>
-          <p:cNvPr id="52" name="">
-            <a:extLst xmlns:a="http://schemas.openxmlformats.org/drawingml/2006/main">
-              <a:ext uri="{FF2B5EF4-FFF2-40B4-BE49-F238E27FC236}">
-                <a16:creationId xmlns:a16="http://schemas.microsoft.com/office/drawing/2014/main" id="{D5A3DC33-22E6-479E-BC06-E1B3D7D50F72}"/>
-              </a:ext>
-            </a:extLst>
-          </p:cNvPr>
-          <p:cNvSpPr>
-            <a:spLocks xmlns:a="http://schemas.openxmlformats.org/drawingml/2006/main" noGrp="1"/>
-          </p:cNvSpPr>
-          <p:nvPr/>
-        </p:nvSpPr>
-        <p:spPr>
-          <a:xfrm xmlns:a="http://schemas.openxmlformats.org/drawingml/2006/main">
-            <a:off x="6238875" y="4638675"/>
-            <a:ext cx="428625" cy="323850"/>
+              <a:defRPr sz="1088" b="1">
+                <a:solidFill>
+                  <a:srgbClr val="111B2B"/>
+                </a:solidFill>
+                <a:latin typeface="PingFang SC"/>
+                <a:ea typeface="PingFang SC"/>
+                <a:cs typeface="PingFang SC"/>
+              </a:defRPr>
+            </a:pPr>
+            <a:r>
+              <a:rPr sz="1088" b="1">
+                <a:solidFill>
+                  <a:srgbClr val="111B2B"/>
+                </a:solidFill>
+                <a:latin typeface="PingFang SC"/>
+                <a:ea typeface="PingFang SC"/>
+                <a:cs typeface="PingFang SC"/>
+              </a:rPr>
+              <a:t>观察 / 产物 / proposal</a:t>
+            </a:r>
+          </a:p>
+        </p:txBody>
+      </p:sp>
+      <p:sp>
+        <p:nvSpPr>
+          <p:cNvPr id="132" name="">
+            <a:extLst xmlns:a="http://schemas.openxmlformats.org/drawingml/2006/main">
+              <a:ext uri="{FF2B5EF4-FFF2-40B4-BE49-F238E27FC236}">
+                <a16:creationId xmlns:a16="http://schemas.microsoft.com/office/drawing/2014/main" id="{71B0D885-CF41-42E9-913A-3E0FDA2BD50B}"/>
+              </a:ext>
+            </a:extLst>
+          </p:cNvPr>
+          <p:cNvSpPr>
+            <a:spLocks xmlns:a="http://schemas.openxmlformats.org/drawingml/2006/main" noGrp="1"/>
+          </p:cNvSpPr>
+          <p:nvPr/>
+        </p:nvSpPr>
+        <p:spPr>
+          <a:xfrm xmlns:a="http://schemas.openxmlformats.org/drawingml/2006/main">
+            <a:off x="5429250" y="6076950"/>
+            <a:ext cx="228600" cy="209550"/>
           </a:xfrm>
           <a:prstGeom xmlns:a="http://schemas.openxmlformats.org/drawingml/2006/main" prst="rect">
             <a:avLst/>
@@ -7143,19 +8779,19 @@
                 <a:spcPct val="115000"/>
               </a:lnSpc>
               <a:buNone/>
-              <a:defRPr sz="1800" b="1">
-                <a:solidFill>
-                  <a:srgbClr val="8FE0B2"/>
-                </a:solidFill>
-                <a:latin typeface="PingFang SC"/>
-                <a:ea typeface="PingFang SC"/>
-                <a:cs typeface="PingFang SC"/>
-              </a:defRPr>
-            </a:pPr>
-            <a:r>
-              <a:rPr sz="1800" b="1">
-                <a:solidFill>
-                  <a:srgbClr val="8FE0B2"/>
+              <a:defRPr sz="1200" b="1">
+                <a:solidFill>
+                  <a:srgbClr val="087A53"/>
+                </a:solidFill>
+                <a:latin typeface="PingFang SC"/>
+                <a:ea typeface="PingFang SC"/>
+                <a:cs typeface="PingFang SC"/>
+              </a:defRPr>
+            </a:pPr>
+            <a:r>
+              <a:rPr sz="1200" b="1">
+                <a:solidFill>
+                  <a:srgbClr val="087A53"/>
                 </a:solidFill>
                 <a:latin typeface="PingFang SC"/>
                 <a:ea typeface="PingFang SC"/>
@@ -7168,22 +8804,22 @@
       </p:sp>
       <p:sp>
         <p:nvSpPr>
-          <p:cNvPr id="53" name="">
-            <a:extLst xmlns:a="http://schemas.openxmlformats.org/drawingml/2006/main">
-              <a:ext uri="{FF2B5EF4-FFF2-40B4-BE49-F238E27FC236}">
-                <a16:creationId xmlns:a16="http://schemas.microsoft.com/office/drawing/2014/main" id="{06E87DC9-C72A-4048-9091-A987FED20197}"/>
-              </a:ext>
-            </a:extLst>
-          </p:cNvPr>
-          <p:cNvSpPr>
-            <a:spLocks xmlns:a="http://schemas.openxmlformats.org/drawingml/2006/main" noGrp="1"/>
-          </p:cNvSpPr>
-          <p:nvPr/>
-        </p:nvSpPr>
-        <p:spPr>
-          <a:xfrm xmlns:a="http://schemas.openxmlformats.org/drawingml/2006/main">
-            <a:off x="6819900" y="4610100"/>
-            <a:ext cx="4095750" cy="285750"/>
+          <p:cNvPr id="133" name="">
+            <a:extLst xmlns:a="http://schemas.openxmlformats.org/drawingml/2006/main">
+              <a:ext uri="{FF2B5EF4-FFF2-40B4-BE49-F238E27FC236}">
+                <a16:creationId xmlns:a16="http://schemas.microsoft.com/office/drawing/2014/main" id="{337137FF-8084-4494-BAB1-F026C2E00E65}"/>
+              </a:ext>
+            </a:extLst>
+          </p:cNvPr>
+          <p:cNvSpPr>
+            <a:spLocks xmlns:a="http://schemas.openxmlformats.org/drawingml/2006/main" noGrp="1"/>
+          </p:cNvSpPr>
+          <p:nvPr/>
+        </p:nvSpPr>
+        <p:spPr>
+          <a:xfrm xmlns:a="http://schemas.openxmlformats.org/drawingml/2006/main">
+            <a:off x="5715000" y="6076950"/>
+            <a:ext cx="1857375" cy="209550"/>
           </a:xfrm>
           <a:prstGeom xmlns:a="http://schemas.openxmlformats.org/drawingml/2006/main" prst="rect">
             <a:avLst/>
@@ -7205,9 +8841,133 @@
                 <a:spcPct val="115000"/>
               </a:lnSpc>
               <a:buNone/>
+              <a:defRPr sz="1088" b="1">
+                <a:solidFill>
+                  <a:srgbClr val="15221D"/>
+                </a:solidFill>
+                <a:latin typeface="PingFang SC"/>
+                <a:ea typeface="PingFang SC"/>
+                <a:cs typeface="PingFang SC"/>
+              </a:defRPr>
+            </a:pPr>
+            <a:r>
+              <a:rPr sz="1088" b="1">
+                <a:solidFill>
+                  <a:srgbClr val="15221D"/>
+                </a:solidFill>
+                <a:latin typeface="PingFang SC"/>
+                <a:ea typeface="PingFang SC"/>
+                <a:cs typeface="PingFang SC"/>
+              </a:rPr>
+              <a:t>Action Board / API 确认</a:t>
+            </a:r>
+          </a:p>
+        </p:txBody>
+      </p:sp>
+      <p:sp>
+        <p:nvSpPr>
+          <p:cNvPr id="134" name="">
+            <a:extLst xmlns:a="http://schemas.openxmlformats.org/drawingml/2006/main">
+              <a:ext uri="{FF2B5EF4-FFF2-40B4-BE49-F238E27FC236}">
+                <a16:creationId xmlns:a16="http://schemas.microsoft.com/office/drawing/2014/main" id="{E078AC0F-3783-42E3-9A06-299CBE9A5ED4}"/>
+              </a:ext>
+            </a:extLst>
+          </p:cNvPr>
+          <p:cNvSpPr>
+            <a:spLocks xmlns:a="http://schemas.openxmlformats.org/drawingml/2006/main" noGrp="1"/>
+          </p:cNvSpPr>
+          <p:nvPr/>
+        </p:nvSpPr>
+        <p:spPr>
+          <a:xfrm xmlns:a="http://schemas.openxmlformats.org/drawingml/2006/main">
+            <a:off x="7600950" y="6076950"/>
+            <a:ext cx="228600" cy="209550"/>
+          </a:xfrm>
+          <a:prstGeom xmlns:a="http://schemas.openxmlformats.org/drawingml/2006/main" prst="rect">
+            <a:avLst/>
+          </a:prstGeom>
+          <a:noFill xmlns:a="http://schemas.openxmlformats.org/drawingml/2006/main"/>
+          <a:ln xmlns:a="http://schemas.openxmlformats.org/drawingml/2006/main" w="0">
+            <a:noFill/>
+            <a:prstDash val="solid"/>
+          </a:ln>
+        </p:spPr>
+        <p:txBody>
+          <a:bodyPr xmlns:a="http://schemas.openxmlformats.org/drawingml/2006/main" wrap="square" lIns="0" tIns="0" rIns="0" bIns="0" anchor="t">
+            <a:noAutofit/>
+          </a:bodyPr>
+          <a:lstStyle xmlns:a="http://schemas.openxmlformats.org/drawingml/2006/main"/>
+          <a:p xmlns:a="http://schemas.openxmlformats.org/drawingml/2006/main">
+            <a:pPr algn="ctr">
+              <a:lnSpc>
+                <a:spcPct val="115000"/>
+              </a:lnSpc>
+              <a:buNone/>
               <a:defRPr sz="1200" b="1">
                 <a:solidFill>
-                  <a:srgbClr val="D9E4EF"/>
+                  <a:srgbClr val="087A53"/>
+                </a:solidFill>
+                <a:latin typeface="PingFang SC"/>
+                <a:ea typeface="PingFang SC"/>
+                <a:cs typeface="PingFang SC"/>
+              </a:defRPr>
+            </a:pPr>
+            <a:r>
+              <a:rPr sz="1200" b="1">
+                <a:solidFill>
+                  <a:srgbClr val="087A53"/>
+                </a:solidFill>
+                <a:latin typeface="PingFang SC"/>
+                <a:ea typeface="PingFang SC"/>
+                <a:cs typeface="PingFang SC"/>
+              </a:rPr>
+              <a:t>→</a:t>
+            </a:r>
+          </a:p>
+        </p:txBody>
+      </p:sp>
+      <p:sp>
+        <p:nvSpPr>
+          <p:cNvPr id="135" name="">
+            <a:extLst xmlns:a="http://schemas.openxmlformats.org/drawingml/2006/main">
+              <a:ext uri="{FF2B5EF4-FFF2-40B4-BE49-F238E27FC236}">
+                <a16:creationId xmlns:a16="http://schemas.microsoft.com/office/drawing/2014/main" id="{0C9C1AD9-C0A2-4A9B-925B-897268DDC6D8}"/>
+              </a:ext>
+            </a:extLst>
+          </p:cNvPr>
+          <p:cNvSpPr>
+            <a:spLocks xmlns:a="http://schemas.openxmlformats.org/drawingml/2006/main" noGrp="1"/>
+          </p:cNvSpPr>
+          <p:nvPr/>
+        </p:nvSpPr>
+        <p:spPr>
+          <a:xfrm xmlns:a="http://schemas.openxmlformats.org/drawingml/2006/main">
+            <a:off x="7886700" y="6076950"/>
+            <a:ext cx="1952625" cy="209550"/>
+          </a:xfrm>
+          <a:prstGeom xmlns:a="http://schemas.openxmlformats.org/drawingml/2006/main" prst="rect">
+            <a:avLst/>
+          </a:prstGeom>
+          <a:noFill xmlns:a="http://schemas.openxmlformats.org/drawingml/2006/main"/>
+          <a:ln xmlns:a="http://schemas.openxmlformats.org/drawingml/2006/main" w="0">
+            <a:noFill/>
+            <a:prstDash val="solid"/>
+          </a:ln>
+        </p:spPr>
+        <p:txBody>
+          <a:bodyPr xmlns:a="http://schemas.openxmlformats.org/drawingml/2006/main" wrap="square" lIns="0" tIns="0" rIns="0" bIns="0" anchor="t">
+            <a:noAutofit/>
+          </a:bodyPr>
+          <a:lstStyle xmlns:a="http://schemas.openxmlformats.org/drawingml/2006/main"/>
+          <a:p xmlns:a="http://schemas.openxmlformats.org/drawingml/2006/main">
+            <a:pPr algn="l">
+              <a:lnSpc>
+                <a:spcPct val="115000"/>
+              </a:lnSpc>
+              <a:buNone/>
+              <a:defRPr sz="1088" b="1">
+                <a:solidFill>
+                  <a:srgbClr val="111B2B"/>
                 </a:solidFill>
                 <a:latin typeface="SFMono-Regular"/>
                 <a:ea typeface="SFMono-Regular"/>
@@ -7215,170 +8975,77 @@
               </a:defRPr>
             </a:pPr>
             <a:r>
-              <a:rPr sz="1200" b="1">
-                <a:solidFill>
-                  <a:srgbClr val="D9E4EF"/>
+              <a:rPr sz="1088" b="1">
+                <a:solidFill>
+                  <a:srgbClr val="111B2B"/>
                 </a:solidFill>
                 <a:latin typeface="SFMono-Regular"/>
                 <a:ea typeface="SFMono-Regular"/>
                 <a:cs typeface="SFMono-Regular"/>
               </a:rPr>
-              <a:t>KernelHead / Memory Graph / ContextPacket</a:t>
-            </a:r>
-          </a:p>
-        </p:txBody>
-      </p:sp>
-      <p:sp>
-        <p:nvSpPr>
-          <p:cNvPr id="54" name="">
-            <a:extLst xmlns:a="http://schemas.openxmlformats.org/drawingml/2006/main">
-              <a:ext uri="{FF2B5EF4-FFF2-40B4-BE49-F238E27FC236}">
-                <a16:creationId xmlns:a16="http://schemas.microsoft.com/office/drawing/2014/main" id="{64136C07-ACD6-4743-AA41-99009009EB7B}"/>
-              </a:ext>
-            </a:extLst>
-          </p:cNvPr>
-          <p:cNvSpPr>
-            <a:spLocks xmlns:a="http://schemas.openxmlformats.org/drawingml/2006/main" noGrp="1"/>
-          </p:cNvSpPr>
-          <p:nvPr/>
-        </p:nvSpPr>
-        <p:spPr>
-          <a:xfrm xmlns:a="http://schemas.openxmlformats.org/drawingml/2006/main">
-            <a:off x="6819900" y="4981575"/>
-            <a:ext cx="4095750" cy="238125"/>
-          </a:xfrm>
-          <a:prstGeom xmlns:a="http://schemas.openxmlformats.org/drawingml/2006/main" prst="rect">
-            <a:avLst/>
-          </a:prstGeom>
-          <a:noFill xmlns:a="http://schemas.openxmlformats.org/drawingml/2006/main"/>
-          <a:ln xmlns:a="http://schemas.openxmlformats.org/drawingml/2006/main" w="0">
-            <a:noFill/>
-            <a:prstDash val="solid"/>
-          </a:ln>
-        </p:spPr>
-        <p:txBody>
-          <a:bodyPr xmlns:a="http://schemas.openxmlformats.org/drawingml/2006/main" wrap="square" lIns="0" tIns="0" rIns="0" bIns="0" anchor="t">
-            <a:noAutofit/>
-          </a:bodyPr>
-          <a:lstStyle xmlns:a="http://schemas.openxmlformats.org/drawingml/2006/main"/>
-          <a:p xmlns:a="http://schemas.openxmlformats.org/drawingml/2006/main">
-            <a:pPr algn="l">
-              <a:lnSpc>
-                <a:spcPct val="115000"/>
-              </a:lnSpc>
-              <a:buNone/>
-              <a:defRPr sz="1125" b="0">
-                <a:solidFill>
-                  <a:srgbClr val="AEBCCF"/>
-                </a:solidFill>
-                <a:latin typeface="SFMono-Regular"/>
-                <a:ea typeface="SFMono-Regular"/>
-                <a:cs typeface="SFMono-Regular"/>
-              </a:defRPr>
-            </a:pPr>
-            <a:r>
-              <a:rPr sz="1125" b="0">
-                <a:solidFill>
-                  <a:srgbClr val="AEBCCF"/>
-                </a:solidFill>
-                <a:latin typeface="SFMono-Regular"/>
-                <a:ea typeface="SFMono-Regular"/>
-                <a:cs typeface="SFMono-Regular"/>
-              </a:rPr>
-              <a:t>Conversation / Project / LearningTask / ReviewSchedule</a:t>
-            </a:r>
-          </a:p>
-        </p:txBody>
-      </p:sp>
-      <p:sp>
-        <p:nvSpPr>
-          <p:cNvPr id="55" name="">
-            <a:extLst xmlns:a="http://schemas.openxmlformats.org/drawingml/2006/main">
-              <a:ext uri="{FF2B5EF4-FFF2-40B4-BE49-F238E27FC236}">
-                <a16:creationId xmlns:a16="http://schemas.microsoft.com/office/drawing/2014/main" id="{9C28D53D-362A-4508-ACC8-0AA2C876754E}"/>
-              </a:ext>
-            </a:extLst>
-          </p:cNvPr>
-          <p:cNvSpPr>
-            <a:spLocks xmlns:a="http://schemas.openxmlformats.org/drawingml/2006/main" noGrp="1"/>
-          </p:cNvSpPr>
-          <p:nvPr/>
-        </p:nvSpPr>
-        <p:spPr>
-          <a:xfrm xmlns:a="http://schemas.openxmlformats.org/drawingml/2006/main">
-            <a:off x="876300" y="5305425"/>
-            <a:ext cx="10191750" cy="9525"/>
-          </a:xfrm>
-          <a:prstGeom xmlns:a="http://schemas.openxmlformats.org/drawingml/2006/main" prst="line">
-            <a:avLst/>
-          </a:prstGeom>
-          <a:noFill xmlns:a="http://schemas.openxmlformats.org/drawingml/2006/main"/>
-          <a:ln xmlns:a="http://schemas.openxmlformats.org/drawingml/2006/main" w="9525">
-            <a:solidFill>
-              <a:srgbClr val="30415A"/>
-            </a:solidFill>
-            <a:prstDash val="solid"/>
-          </a:ln>
-        </p:spPr>
-      </p:sp>
-      <p:sp>
-        <p:nvSpPr>
-          <p:cNvPr id="56" name="">
-            <a:extLst xmlns:a="http://schemas.openxmlformats.org/drawingml/2006/main">
-              <a:ext uri="{FF2B5EF4-FFF2-40B4-BE49-F238E27FC236}">
-                <a16:creationId xmlns:a16="http://schemas.microsoft.com/office/drawing/2014/main" id="{1D3E8AA2-0676-4EDE-A5B2-FD877E0646FC}"/>
-              </a:ext>
-            </a:extLst>
-          </p:cNvPr>
-          <p:cNvSpPr>
-            <a:spLocks xmlns:a="http://schemas.openxmlformats.org/drawingml/2006/main" noGrp="1"/>
-          </p:cNvSpPr>
-          <p:nvPr/>
-        </p:nvSpPr>
-        <p:spPr>
-          <a:xfrm xmlns:a="http://schemas.openxmlformats.org/drawingml/2006/main">
-            <a:off x="876300" y="5429250"/>
-            <a:ext cx="10191750" cy="209550"/>
-          </a:xfrm>
-          <a:prstGeom xmlns:a="http://schemas.openxmlformats.org/drawingml/2006/main" prst="rect">
-            <a:avLst/>
-          </a:prstGeom>
-          <a:noFill xmlns:a="http://schemas.openxmlformats.org/drawingml/2006/main"/>
-          <a:ln xmlns:a="http://schemas.openxmlformats.org/drawingml/2006/main" w="0">
-            <a:noFill/>
-            <a:prstDash val="solid"/>
-          </a:ln>
-        </p:spPr>
-        <p:txBody>
-          <a:bodyPr xmlns:a="http://schemas.openxmlformats.org/drawingml/2006/main" wrap="square" lIns="0" tIns="0" rIns="0" bIns="0" anchor="t">
-            <a:noAutofit/>
-          </a:bodyPr>
-          <a:lstStyle xmlns:a="http://schemas.openxmlformats.org/drawingml/2006/main"/>
-          <a:p xmlns:a="http://schemas.openxmlformats.org/drawingml/2006/main">
-            <a:pPr algn="ctr">
-              <a:lnSpc>
-                <a:spcPct val="115000"/>
-              </a:lnSpc>
-              <a:buNone/>
-              <a:defRPr sz="1125" b="1">
-                <a:solidFill>
-                  <a:srgbClr val="D8E4DD"/>
-                </a:solidFill>
-                <a:latin typeface="PingFang SC"/>
-                <a:ea typeface="PingFang SC"/>
-                <a:cs typeface="PingFang SC"/>
-              </a:defRPr>
-            </a:pPr>
-            <a:r>
-              <a:rPr sz="1125" b="1">
-                <a:solidFill>
-                  <a:srgbClr val="D8E4DD"/>
-                </a:solidFill>
-                <a:latin typeface="PingFang SC"/>
-                <a:ea typeface="PingFang SC"/>
-                <a:cs typeface="PingFang SC"/>
-              </a:rPr>
-              <a:t>写入、应用路线、生成文件：通过确定性 runtime 与明确确认；工具观察本身不改变掌握。</a:t>
+              <a:t>EvidenceEvent → 五核链</a:t>
+            </a:r>
+          </a:p>
+        </p:txBody>
+      </p:sp>
+      <p:sp>
+        <p:nvSpPr>
+          <p:cNvPr id="136" name="">
+            <a:extLst xmlns:a="http://schemas.openxmlformats.org/drawingml/2006/main">
+              <a:ext uri="{FF2B5EF4-FFF2-40B4-BE49-F238E27FC236}">
+                <a16:creationId xmlns:a16="http://schemas.microsoft.com/office/drawing/2014/main" id="{4DC8ABF2-B232-4545-9003-7299D4A824E2}"/>
+              </a:ext>
+            </a:extLst>
+          </p:cNvPr>
+          <p:cNvSpPr>
+            <a:spLocks xmlns:a="http://schemas.openxmlformats.org/drawingml/2006/main" noGrp="1"/>
+          </p:cNvSpPr>
+          <p:nvPr/>
+        </p:nvSpPr>
+        <p:spPr>
+          <a:xfrm xmlns:a="http://schemas.openxmlformats.org/drawingml/2006/main">
+            <a:off x="9877425" y="6086475"/>
+            <a:ext cx="1466850" cy="323850"/>
+          </a:xfrm>
+          <a:prstGeom xmlns:a="http://schemas.openxmlformats.org/drawingml/2006/main" prst="rect">
+            <a:avLst/>
+          </a:prstGeom>
+          <a:noFill xmlns:a="http://schemas.openxmlformats.org/drawingml/2006/main"/>
+          <a:ln xmlns:a="http://schemas.openxmlformats.org/drawingml/2006/main" w="0">
+            <a:noFill/>
+            <a:prstDash val="solid"/>
+          </a:ln>
+        </p:spPr>
+        <p:txBody>
+          <a:bodyPr xmlns:a="http://schemas.openxmlformats.org/drawingml/2006/main" wrap="square" lIns="0" tIns="0" rIns="0" bIns="0" anchor="ctr">
+            <a:noAutofit/>
+          </a:bodyPr>
+          <a:lstStyle xmlns:a="http://schemas.openxmlformats.org/drawingml/2006/main"/>
+          <a:p xmlns:a="http://schemas.openxmlformats.org/drawingml/2006/main">
+            <a:pPr algn="r">
+              <a:lnSpc>
+                <a:spcPct val="112000"/>
+              </a:lnSpc>
+              <a:buNone/>
+              <a:defRPr sz="960" b="1">
+                <a:solidFill>
+                  <a:srgbClr val="6D7C73"/>
+                </a:solidFill>
+                <a:latin typeface="PingFang SC"/>
+                <a:ea typeface="PingFang SC"/>
+                <a:cs typeface="PingFang SC"/>
+              </a:defRPr>
+            </a:pPr>
+            <a:r>
+              <a:rPr sz="960" b="1">
+                <a:solidFill>
+                  <a:srgbClr val="6D7C73"/>
+                </a:solidFill>
+                <a:latin typeface="PingFang SC"/>
+                <a:ea typeface="PingFang SC"/>
+                <a:cs typeface="PingFang SC"/>
+              </a:rPr>
+              <a:t>读取、生成与任务完成本身都不等于掌握。</a:t>
             </a:r>
           </a:p>
         </p:txBody>
@@ -8986,7 +10653,7 @@
       </p:sp>
       <p:cxnSp>
         <p:nvCxnSpPr>
-          <p:cNvPr id="102" name=""/>
+          <p:cNvPr id="166" name=""/>
           <p:cNvCxnSpPr>
             <a:stCxn xmlns:a="http://schemas.openxmlformats.org/drawingml/2006/main" id="9" idx="3"/>
             <a:endCxn xmlns:a="http://schemas.openxmlformats.org/drawingml/2006/main" id="13" idx="1"/>
@@ -9013,7 +10680,7 @@
       </p:cxnSp>
       <p:cxnSp>
         <p:nvCxnSpPr>
-          <p:cNvPr id="103" name=""/>
+          <p:cNvPr id="167" name=""/>
           <p:cNvCxnSpPr>
             <a:stCxn xmlns:a="http://schemas.openxmlformats.org/drawingml/2006/main" id="13" idx="3"/>
             <a:endCxn xmlns:a="http://schemas.openxmlformats.org/drawingml/2006/main" id="17" idx="1"/>
@@ -9040,7 +10707,7 @@
       </p:cxnSp>
       <p:cxnSp>
         <p:nvCxnSpPr>
-          <p:cNvPr id="104" name=""/>
+          <p:cNvPr id="168" name=""/>
           <p:cNvCxnSpPr>
             <a:stCxn xmlns:a="http://schemas.openxmlformats.org/drawingml/2006/main" id="17" idx="3"/>
             <a:endCxn xmlns:a="http://schemas.openxmlformats.org/drawingml/2006/main" id="21" idx="1"/>
@@ -9067,7 +10734,7 @@
       </p:cxnSp>
       <p:cxnSp>
         <p:nvCxnSpPr>
-          <p:cNvPr id="105" name=""/>
+          <p:cNvPr id="169" name=""/>
           <p:cNvCxnSpPr>
             <a:stCxn xmlns:a="http://schemas.openxmlformats.org/drawingml/2006/main" id="21" idx="3"/>
             <a:endCxn xmlns:a="http://schemas.openxmlformats.org/drawingml/2006/main" id="25" idx="1"/>
